--- a/CarbonTrace_MSME_Hackathon.pptx
+++ b/CarbonTrace_MSME_Hackathon.pptx
@@ -8,6 +8,7 @@
     <p:sldId id="256" r:id="rId7"/>
     <p:sldId id="257" r:id="rId8"/>
     <p:sldId id="258" r:id="rId9"/>
+    <p:sldId id="264" r:id="rId15"/>
     <p:sldId id="259" r:id="rId10"/>
     <p:sldId id="260" r:id="rId11"/>
     <p:sldId id="261" r:id="rId12"/>
@@ -3806,7 +3807,7 @@
                 </a:solidFill>
                 <a:latin typeface="Calibri"/>
               </a:rPr>
-              <a:t>Architectural Diagram</a:t>
+              <a:t>Architecture — Fuel-Anchored, Three Data Tiers</a:t>
             </a:r>
           </a:p>
         </p:txBody>
@@ -3863,8 +3864,8 @@
         </p:nvSpPr>
         <p:spPr>
           <a:xfrm>
-            <a:off x="411480" y="1234440"/>
-            <a:ext cx="2542032" cy="411480"/>
+            <a:off x="411480" y="1115568"/>
+            <a:ext cx="2542032" cy="365760"/>
           </a:xfrm>
           <a:prstGeom prst="rect">
             <a:avLst/>
@@ -3883,7 +3884,7 @@
               </a:lnSpc>
             </a:pPr>
             <a:r>
-              <a:rPr sz="1500" b="1">
+              <a:rPr sz="1400" b="1">
                 <a:solidFill>
                   <a:srgbClr val="1B5E20"/>
                 </a:solidFill>
@@ -3902,8 +3903,8 @@
         </p:nvSpPr>
         <p:spPr>
           <a:xfrm>
-            <a:off x="411480" y="1874519"/>
-            <a:ext cx="2542032" cy="960120"/>
+            <a:off x="411480" y="1627632"/>
+            <a:ext cx="2542032" cy="804672"/>
           </a:xfrm>
           <a:prstGeom prst="roundRect">
             <a:avLst/>
@@ -3933,12 +3934,12 @@
           </a:fontRef>
         </p:style>
         <p:txBody>
-          <a:bodyPr rtlCol="0" anchor="ctr" wrap="square"/>
+          <a:bodyPr rtlCol="0" anchor="ctr" wrap="square" tIns="18000" bIns="18000"/>
           <a:lstStyle/>
           <a:p>
             <a:pPr algn="ctr"/>
             <a:r>
-              <a:rPr sz="1350" b="1">
+              <a:rPr sz="1200" b="1">
                 <a:solidFill>
                   <a:srgbClr val="212121"/>
                 </a:solidFill>
@@ -3950,13 +3951,13 @@
           <a:p>
             <a:pPr algn="ctr"/>
             <a:r>
-              <a:rPr sz="1350" b="0">
+              <a:rPr sz="1200" b="0">
                 <a:solidFill>
                   <a:srgbClr val="212121"/>
                 </a:solidFill>
                 <a:latin typeface="Calibri"/>
               </a:rPr>
-              <a:t>(ignition / trip trigger)</a:t>
+              <a:t>(auto-start trigger)</a:t>
             </a:r>
           </a:p>
         </p:txBody>
@@ -3969,8 +3970,8 @@
         </p:nvSpPr>
         <p:spPr>
           <a:xfrm>
-            <a:off x="411480" y="3090671"/>
-            <a:ext cx="2542032" cy="960120"/>
+            <a:off x="411480" y="2596896"/>
+            <a:ext cx="2542032" cy="804672"/>
           </a:xfrm>
           <a:prstGeom prst="roundRect">
             <a:avLst/>
@@ -4000,12 +4001,12 @@
           </a:fontRef>
         </p:style>
         <p:txBody>
-          <a:bodyPr rtlCol="0" anchor="ctr" wrap="square"/>
+          <a:bodyPr rtlCol="0" anchor="ctr" wrap="square" tIns="18000" bIns="18000"/>
           <a:lstStyle/>
           <a:p>
             <a:pPr algn="ctr"/>
             <a:r>
-              <a:rPr sz="1350" b="1">
+              <a:rPr sz="1200" b="1">
                 <a:solidFill>
                   <a:srgbClr val="212121"/>
                 </a:solidFill>
@@ -4017,13 +4018,13 @@
           <a:p>
             <a:pPr algn="ctr"/>
             <a:r>
-              <a:rPr sz="1350" b="0">
+              <a:rPr sz="1200" b="0">
                 <a:solidFill>
                   <a:srgbClr val="212121"/>
                 </a:solidFill>
                 <a:latin typeface="Calibri"/>
               </a:rPr>
-              <a:t>sensors (drive data)</a:t>
+              <a:t>(drive profile)</a:t>
             </a:r>
           </a:p>
         </p:txBody>
@@ -4036,8 +4037,8 @@
         </p:nvSpPr>
         <p:spPr>
           <a:xfrm>
-            <a:off x="411480" y="4306823"/>
-            <a:ext cx="2542032" cy="960120"/>
+            <a:off x="411480" y="3566160"/>
+            <a:ext cx="2542032" cy="804672"/>
           </a:xfrm>
           <a:prstGeom prst="roundRect">
             <a:avLst/>
@@ -4067,44 +4068,111 @@
           </a:fontRef>
         </p:style>
         <p:txBody>
-          <a:bodyPr rtlCol="0" anchor="ctr" wrap="square"/>
+          <a:bodyPr rtlCol="0" anchor="ctr" wrap="square" tIns="18000" bIns="18000"/>
           <a:lstStyle/>
           <a:p>
             <a:pPr algn="ctr"/>
             <a:r>
-              <a:rPr sz="1350" b="1">
+              <a:rPr sz="1200" b="1">
                 <a:solidFill>
                   <a:srgbClr val="212121"/>
                 </a:solidFill>
                 <a:latin typeface="Calibri"/>
               </a:rPr>
-              <a:t>Connected-car API</a:t>
+              <a:t>Payment notifications</a:t>
             </a:r>
           </a:p>
           <a:p>
             <a:pPr algn="ctr"/>
             <a:r>
-              <a:rPr sz="1350" b="0">
+              <a:rPr sz="1200" b="0">
                 <a:solidFill>
                   <a:srgbClr val="212121"/>
                 </a:solidFill>
                 <a:latin typeface="Calibri"/>
               </a:rPr>
-              <a:t>(optional, fuel data)</a:t>
-            </a:r>
-          </a:p>
-        </p:txBody>
-      </p:sp>
-      <p:sp>
-        <p:nvSpPr>
-          <p:cNvPr id="9" name="TextBox 8"/>
+              <a:t>(litres, on-device)</a:t>
+            </a:r>
+          </a:p>
+        </p:txBody>
+      </p:sp>
+      <p:sp>
+        <p:nvSpPr>
+          <p:cNvPr id="9" name="Rounded Rectangle 8"/>
+          <p:cNvSpPr/>
+          <p:nvPr/>
+        </p:nvSpPr>
+        <p:spPr>
+          <a:xfrm>
+            <a:off x="411480" y="4535424"/>
+            <a:ext cx="2542032" cy="804672"/>
+          </a:xfrm>
+          <a:prstGeom prst="roundRect">
+            <a:avLst/>
+          </a:prstGeom>
+          <a:solidFill>
+            <a:srgbClr val="F1F8E9"/>
+          </a:solidFill>
+          <a:ln w="12700">
+            <a:solidFill>
+              <a:srgbClr val="43A047"/>
+            </a:solidFill>
+          </a:ln>
+          <a:effectLst/>
+        </p:spPr>
+        <p:style>
+          <a:lnRef idx="1">
+            <a:schemeClr val="accent1"/>
+          </a:lnRef>
+          <a:fillRef idx="3">
+            <a:schemeClr val="accent1"/>
+          </a:fillRef>
+          <a:effectRef idx="2">
+            <a:schemeClr val="accent1"/>
+          </a:effectRef>
+          <a:fontRef idx="minor">
+            <a:schemeClr val="lt1"/>
+          </a:fontRef>
+        </p:style>
+        <p:txBody>
+          <a:bodyPr rtlCol="0" anchor="ctr" wrap="square" tIns="18000" bIns="18000"/>
+          <a:lstStyle/>
+          <a:p>
+            <a:pPr algn="ctr"/>
+            <a:r>
+              <a:rPr sz="1200" b="1">
+                <a:solidFill>
+                  <a:srgbClr val="212121"/>
+                </a:solidFill>
+                <a:latin typeface="Calibri"/>
+              </a:rPr>
+              <a:t>Connected-car cloud /</a:t>
+            </a:r>
+          </a:p>
+          <a:p>
+            <a:pPr algn="ctr"/>
+            <a:r>
+              <a:rPr sz="1200" b="0">
+                <a:solidFill>
+                  <a:srgbClr val="212121"/>
+                </a:solidFill>
+                <a:latin typeface="Calibri"/>
+              </a:rPr>
+              <a:t>OBD ECU (optional)</a:t>
+            </a:r>
+          </a:p>
+        </p:txBody>
+      </p:sp>
+      <p:sp>
+        <p:nvSpPr>
+          <p:cNvPr id="10" name="TextBox 9"/>
           <p:cNvSpPr txBox="1"/>
           <p:nvPr/>
         </p:nvSpPr>
         <p:spPr>
           <a:xfrm>
-            <a:off x="3429000" y="1234440"/>
-            <a:ext cx="2542032" cy="411480"/>
+            <a:off x="3429000" y="1115568"/>
+            <a:ext cx="2542032" cy="365760"/>
           </a:xfrm>
           <a:prstGeom prst="rect">
             <a:avLst/>
@@ -4123,7 +4191,7 @@
               </a:lnSpc>
             </a:pPr>
             <a:r>
-              <a:rPr sz="1500" b="1">
+              <a:rPr sz="1400" b="1">
                 <a:solidFill>
                   <a:srgbClr val="1B5E20"/>
                 </a:solidFill>
@@ -4136,14 +4204,14 @@
       </p:sp>
       <p:sp>
         <p:nvSpPr>
-          <p:cNvPr id="10" name="Rounded Rectangle 9"/>
+          <p:cNvPr id="11" name="Rounded Rectangle 10"/>
           <p:cNvSpPr/>
           <p:nvPr/>
         </p:nvSpPr>
         <p:spPr>
           <a:xfrm>
-            <a:off x="3429000" y="1874519"/>
-            <a:ext cx="2542032" cy="960120"/>
+            <a:off x="3429000" y="1627632"/>
+            <a:ext cx="2542032" cy="804672"/>
           </a:xfrm>
           <a:prstGeom prst="roundRect">
             <a:avLst/>
@@ -4173,44 +4241,44 @@
           </a:fontRef>
         </p:style>
         <p:txBody>
-          <a:bodyPr rtlCol="0" anchor="ctr" wrap="square"/>
+          <a:bodyPr rtlCol="0" anchor="ctr" wrap="square" tIns="18000" bIns="18000"/>
           <a:lstStyle/>
           <a:p>
             <a:pPr algn="ctr"/>
             <a:r>
-              <a:rPr sz="1350" b="1">
+              <a:rPr sz="1200" b="1">
                 <a:solidFill>
                   <a:srgbClr val="212121"/>
                 </a:solidFill>
                 <a:latin typeface="Calibri"/>
               </a:rPr>
-              <a:t>Auto-start trip</a:t>
+              <a:t>Auto trip recorder</a:t>
             </a:r>
           </a:p>
           <a:p>
             <a:pPr algn="ctr"/>
             <a:r>
-              <a:rPr sz="1350" b="0">
+              <a:rPr sz="1200" b="0">
                 <a:solidFill>
                   <a:srgbClr val="212121"/>
                 </a:solidFill>
                 <a:latin typeface="Calibri"/>
               </a:rPr>
-              <a:t>recorder service</a:t>
-            </a:r>
-          </a:p>
-        </p:txBody>
-      </p:sp>
-      <p:sp>
-        <p:nvSpPr>
-          <p:cNvPr id="11" name="Rounded Rectangle 10"/>
+              <a:t>(zero-touch)</a:t>
+            </a:r>
+          </a:p>
+        </p:txBody>
+      </p:sp>
+      <p:sp>
+        <p:nvSpPr>
+          <p:cNvPr id="12" name="Rounded Rectangle 11"/>
           <p:cNvSpPr/>
           <p:nvPr/>
         </p:nvSpPr>
         <p:spPr>
           <a:xfrm>
-            <a:off x="3429000" y="3090671"/>
-            <a:ext cx="2542032" cy="960120"/>
+            <a:off x="3429000" y="2596896"/>
+            <a:ext cx="2542032" cy="804672"/>
           </a:xfrm>
           <a:prstGeom prst="roundRect">
             <a:avLst/>
@@ -4240,44 +4308,44 @@
           </a:fontRef>
         </p:style>
         <p:txBody>
-          <a:bodyPr rtlCol="0" anchor="ctr" wrap="square"/>
+          <a:bodyPr rtlCol="0" anchor="ctr" wrap="square" tIns="18000" bIns="18000"/>
           <a:lstStyle/>
           <a:p>
             <a:pPr algn="ctr"/>
             <a:r>
-              <a:rPr sz="1350" b="1">
+              <a:rPr sz="1200" b="1">
                 <a:solidFill>
                   <a:srgbClr val="212121"/>
                 </a:solidFill>
                 <a:latin typeface="Calibri"/>
               </a:rPr>
-              <a:t>Local trip store</a:t>
+              <a:t>Virtual odometer</a:t>
             </a:r>
           </a:p>
           <a:p>
             <a:pPr algn="ctr"/>
             <a:r>
-              <a:rPr sz="1350" b="0">
+              <a:rPr sz="1200" b="0">
                 <a:solidFill>
                   <a:srgbClr val="212121"/>
                 </a:solidFill>
                 <a:latin typeface="Calibri"/>
               </a:rPr>
-              <a:t>(offline-first)</a:t>
-            </a:r>
-          </a:p>
-        </p:txBody>
-      </p:sp>
-      <p:sp>
-        <p:nvSpPr>
-          <p:cNvPr id="12" name="Rounded Rectangle 11"/>
+              <a:t>(auto-advancing)</a:t>
+            </a:r>
+          </a:p>
+        </p:txBody>
+      </p:sp>
+      <p:sp>
+        <p:nvSpPr>
+          <p:cNvPr id="13" name="Rounded Rectangle 12"/>
           <p:cNvSpPr/>
           <p:nvPr/>
         </p:nvSpPr>
         <p:spPr>
           <a:xfrm>
-            <a:off x="3429000" y="4306823"/>
-            <a:ext cx="2542032" cy="960120"/>
+            <a:off x="3429000" y="3566160"/>
+            <a:ext cx="2542032" cy="804672"/>
           </a:xfrm>
           <a:prstGeom prst="roundRect">
             <a:avLst/>
@@ -4307,69 +4375,30 @@
           </a:fontRef>
         </p:style>
         <p:txBody>
-          <a:bodyPr rtlCol="0" anchor="ctr" wrap="square"/>
+          <a:bodyPr rtlCol="0" anchor="ctr" wrap="square" tIns="18000" bIns="18000"/>
           <a:lstStyle/>
           <a:p>
             <a:pPr algn="ctr"/>
             <a:r>
-              <a:rPr sz="1350" b="1">
+              <a:rPr sz="1200" b="1">
                 <a:solidFill>
                   <a:srgbClr val="212121"/>
                 </a:solidFill>
                 <a:latin typeface="Calibri"/>
               </a:rPr>
-              <a:t>Dashboard and</a:t>
+              <a:t>Auto fill-up capture</a:t>
             </a:r>
           </a:p>
           <a:p>
             <a:pPr algn="ctr"/>
             <a:r>
-              <a:rPr sz="1350" b="0">
+              <a:rPr sz="1200" b="0">
                 <a:solidFill>
                   <a:srgbClr val="212121"/>
                 </a:solidFill>
                 <a:latin typeface="Calibri"/>
               </a:rPr>
-              <a:t>alerts UI</a:t>
-            </a:r>
-          </a:p>
-        </p:txBody>
-      </p:sp>
-      <p:sp>
-        <p:nvSpPr>
-          <p:cNvPr id="13" name="TextBox 12"/>
-          <p:cNvSpPr txBox="1"/>
-          <p:nvPr/>
-        </p:nvSpPr>
-        <p:spPr>
-          <a:xfrm>
-            <a:off x="6446520" y="1234440"/>
-            <a:ext cx="2542032" cy="411480"/>
-          </a:xfrm>
-          <a:prstGeom prst="rect">
-            <a:avLst/>
-          </a:prstGeom>
-          <a:noFill/>
-        </p:spPr>
-        <p:txBody>
-          <a:bodyPr wrap="square" anchor="t">
-            <a:spAutoFit/>
-          </a:bodyPr>
-          <a:lstStyle/>
-          <a:p>
-            <a:pPr algn="ctr">
-              <a:lnSpc>
-                <a:spcPct val="100000"/>
-              </a:lnSpc>
-            </a:pPr>
-            <a:r>
-              <a:rPr sz="1500" b="1">
-                <a:solidFill>
-                  <a:srgbClr val="1B5E20"/>
-                </a:solidFill>
-                <a:latin typeface="Calibri"/>
-              </a:rPr>
-              <a:t>3. CLOUD BACKEND</a:t>
+              <a:t>(refuel stop + payment)</a:t>
             </a:r>
           </a:p>
         </p:txBody>
@@ -4382,8 +4411,8 @@
         </p:nvSpPr>
         <p:spPr>
           <a:xfrm>
-            <a:off x="6446520" y="1874519"/>
-            <a:ext cx="2542032" cy="960120"/>
+            <a:off x="3429000" y="4535424"/>
+            <a:ext cx="2542032" cy="804672"/>
           </a:xfrm>
           <a:prstGeom prst="roundRect">
             <a:avLst/>
@@ -4413,44 +4442,83 @@
           </a:fontRef>
         </p:style>
         <p:txBody>
-          <a:bodyPr rtlCol="0" anchor="ctr" wrap="square"/>
+          <a:bodyPr rtlCol="0" anchor="ctr" wrap="square" tIns="18000" bIns="18000"/>
           <a:lstStyle/>
           <a:p>
             <a:pPr algn="ctr"/>
             <a:r>
-              <a:rPr sz="1350" b="1">
+              <a:rPr sz="1200" b="1">
                 <a:solidFill>
                   <a:srgbClr val="212121"/>
                 </a:solidFill>
                 <a:latin typeface="Calibri"/>
               </a:rPr>
-              <a:t>Emission estimation</a:t>
+              <a:t>Offline-first store</a:t>
             </a:r>
           </a:p>
           <a:p>
             <a:pPr algn="ctr"/>
             <a:r>
-              <a:rPr sz="1350" b="0">
+              <a:rPr sz="1200" b="0">
                 <a:solidFill>
                   <a:srgbClr val="212121"/>
                 </a:solidFill>
                 <a:latin typeface="Calibri"/>
               </a:rPr>
-              <a:t>engine (BS6 / COPERT)</a:t>
-            </a:r>
-          </a:p>
-        </p:txBody>
-      </p:sp>
-      <p:sp>
-        <p:nvSpPr>
-          <p:cNvPr id="15" name="Rounded Rectangle 14"/>
+              <a:t>and dashboard</a:t>
+            </a:r>
+          </a:p>
+        </p:txBody>
+      </p:sp>
+      <p:sp>
+        <p:nvSpPr>
+          <p:cNvPr id="15" name="TextBox 14"/>
+          <p:cNvSpPr txBox="1"/>
+          <p:nvPr/>
+        </p:nvSpPr>
+        <p:spPr>
+          <a:xfrm>
+            <a:off x="6446520" y="1115568"/>
+            <a:ext cx="2542032" cy="365760"/>
+          </a:xfrm>
+          <a:prstGeom prst="rect">
+            <a:avLst/>
+          </a:prstGeom>
+          <a:noFill/>
+        </p:spPr>
+        <p:txBody>
+          <a:bodyPr wrap="square" anchor="t">
+            <a:spAutoFit/>
+          </a:bodyPr>
+          <a:lstStyle/>
+          <a:p>
+            <a:pPr algn="ctr">
+              <a:lnSpc>
+                <a:spcPct val="100000"/>
+              </a:lnSpc>
+            </a:pPr>
+            <a:r>
+              <a:rPr sz="1400" b="1">
+                <a:solidFill>
+                  <a:srgbClr val="1B5E20"/>
+                </a:solidFill>
+                <a:latin typeface="Calibri"/>
+              </a:rPr>
+              <a:t>3. CLOUD BACKEND</a:t>
+            </a:r>
+          </a:p>
+        </p:txBody>
+      </p:sp>
+      <p:sp>
+        <p:nvSpPr>
+          <p:cNvPr id="16" name="Rounded Rectangle 15"/>
           <p:cNvSpPr/>
           <p:nvPr/>
         </p:nvSpPr>
         <p:spPr>
           <a:xfrm>
-            <a:off x="6446520" y="3090671"/>
-            <a:ext cx="2542032" cy="960120"/>
+            <a:off x="6446520" y="1627632"/>
+            <a:ext cx="2542032" cy="804672"/>
           </a:xfrm>
           <a:prstGeom prst="roundRect">
             <a:avLst/>
@@ -4480,44 +4548,44 @@
           </a:fontRef>
         </p:style>
         <p:txBody>
-          <a:bodyPr rtlCol="0" anchor="ctr" wrap="square"/>
+          <a:bodyPr rtlCol="0" anchor="ctr" wrap="square" tIns="18000" bIns="18000"/>
           <a:lstStyle/>
           <a:p>
             <a:pPr algn="ctr"/>
             <a:r>
-              <a:rPr sz="1350" b="1">
+              <a:rPr sz="1200" b="1">
                 <a:solidFill>
                   <a:srgbClr val="212121"/>
                 </a:solidFill>
                 <a:latin typeface="Calibri"/>
               </a:rPr>
-              <a:t>Anomaly detection</a:t>
+              <a:t>Emission engine</a:t>
             </a:r>
           </a:p>
           <a:p>
             <a:pPr algn="ctr"/>
             <a:r>
-              <a:rPr sz="1350" b="0">
+              <a:rPr sz="1200" b="0">
                 <a:solidFill>
                   <a:srgbClr val="212121"/>
                 </a:solidFill>
                 <a:latin typeface="Calibri"/>
               </a:rPr>
-              <a:t>(baseline drift)</a:t>
-            </a:r>
-          </a:p>
-        </p:txBody>
-      </p:sp>
-      <p:sp>
-        <p:nvSpPr>
-          <p:cNvPr id="16" name="Rounded Rectangle 15"/>
+              <a:t>(COPERT/BS6 + fuel chemistry)</a:t>
+            </a:r>
+          </a:p>
+        </p:txBody>
+      </p:sp>
+      <p:sp>
+        <p:nvSpPr>
+          <p:cNvPr id="17" name="Rounded Rectangle 16"/>
           <p:cNvSpPr/>
           <p:nvPr/>
         </p:nvSpPr>
         <p:spPr>
           <a:xfrm>
-            <a:off x="6446520" y="4306823"/>
-            <a:ext cx="2542032" cy="960120"/>
+            <a:off x="6446520" y="2596896"/>
+            <a:ext cx="2542032" cy="804672"/>
           </a:xfrm>
           <a:prstGeom prst="roundRect">
             <a:avLst/>
@@ -4547,44 +4615,178 @@
           </a:fontRef>
         </p:style>
         <p:txBody>
-          <a:bodyPr rtlCol="0" anchor="ctr" wrap="square"/>
+          <a:bodyPr rtlCol="0" anchor="ctr" wrap="square" tIns="18000" bIns="18000"/>
           <a:lstStyle/>
           <a:p>
             <a:pPr algn="ctr"/>
             <a:r>
-              <a:rPr sz="1350" b="1">
+              <a:rPr sz="1200" b="1">
                 <a:solidFill>
                   <a:srgbClr val="212121"/>
                 </a:solidFill>
                 <a:latin typeface="Calibri"/>
               </a:rPr>
-              <a:t>Trip and vehicle</a:t>
+              <a:t>Calibration</a:t>
             </a:r>
           </a:p>
           <a:p>
             <a:pPr algn="ctr"/>
             <a:r>
-              <a:rPr sz="1350" b="0">
+              <a:rPr sz="1200" b="0">
                 <a:solidFill>
                   <a:srgbClr val="212121"/>
                 </a:solidFill>
                 <a:latin typeface="Calibri"/>
               </a:rPr>
-              <a:t>database</a:t>
-            </a:r>
-          </a:p>
-        </p:txBody>
-      </p:sp>
-      <p:sp>
-        <p:nvSpPr>
-          <p:cNvPr id="17" name="TextBox 16"/>
+              <a:t>(measured / modelled)</a:t>
+            </a:r>
+          </a:p>
+        </p:txBody>
+      </p:sp>
+      <p:sp>
+        <p:nvSpPr>
+          <p:cNvPr id="18" name="Rounded Rectangle 17"/>
+          <p:cNvSpPr/>
+          <p:nvPr/>
+        </p:nvSpPr>
+        <p:spPr>
+          <a:xfrm>
+            <a:off x="6446520" y="3566160"/>
+            <a:ext cx="2542032" cy="804672"/>
+          </a:xfrm>
+          <a:prstGeom prst="roundRect">
+            <a:avLst/>
+          </a:prstGeom>
+          <a:solidFill>
+            <a:srgbClr val="FFFFFF"/>
+          </a:solidFill>
+          <a:ln w="12700">
+            <a:solidFill>
+              <a:srgbClr val="43A047"/>
+            </a:solidFill>
+          </a:ln>
+          <a:effectLst/>
+        </p:spPr>
+        <p:style>
+          <a:lnRef idx="1">
+            <a:schemeClr val="accent1"/>
+          </a:lnRef>
+          <a:fillRef idx="3">
+            <a:schemeClr val="accent1"/>
+          </a:fillRef>
+          <a:effectRef idx="2">
+            <a:schemeClr val="accent1"/>
+          </a:effectRef>
+          <a:fontRef idx="minor">
+            <a:schemeClr val="lt1"/>
+          </a:fontRef>
+        </p:style>
+        <p:txBody>
+          <a:bodyPr rtlCol="0" anchor="ctr" wrap="square" tIns="18000" bIns="18000"/>
+          <a:lstStyle/>
+          <a:p>
+            <a:pPr algn="ctr"/>
+            <a:r>
+              <a:rPr sz="1200" b="1">
+                <a:solidFill>
+                  <a:srgbClr val="212121"/>
+                </a:solidFill>
+                <a:latin typeface="Calibri"/>
+              </a:rPr>
+              <a:t>Baseline per driving type</a:t>
+            </a:r>
+          </a:p>
+          <a:p>
+            <a:pPr algn="ctr"/>
+            <a:r>
+              <a:rPr sz="1200" b="0">
+                <a:solidFill>
+                  <a:srgbClr val="212121"/>
+                </a:solidFill>
+                <a:latin typeface="Calibri"/>
+              </a:rPr>
+              <a:t>(city / mixed / highway)</a:t>
+            </a:r>
+          </a:p>
+        </p:txBody>
+      </p:sp>
+      <p:sp>
+        <p:nvSpPr>
+          <p:cNvPr id="19" name="Rounded Rectangle 18"/>
+          <p:cNvSpPr/>
+          <p:nvPr/>
+        </p:nvSpPr>
+        <p:spPr>
+          <a:xfrm>
+            <a:off x="6446520" y="4535424"/>
+            <a:ext cx="2542032" cy="804672"/>
+          </a:xfrm>
+          <a:prstGeom prst="roundRect">
+            <a:avLst/>
+          </a:prstGeom>
+          <a:solidFill>
+            <a:srgbClr val="FFFFFF"/>
+          </a:solidFill>
+          <a:ln w="12700">
+            <a:solidFill>
+              <a:srgbClr val="43A047"/>
+            </a:solidFill>
+          </a:ln>
+          <a:effectLst/>
+        </p:spPr>
+        <p:style>
+          <a:lnRef idx="1">
+            <a:schemeClr val="accent1"/>
+          </a:lnRef>
+          <a:fillRef idx="3">
+            <a:schemeClr val="accent1"/>
+          </a:fillRef>
+          <a:effectRef idx="2">
+            <a:schemeClr val="accent1"/>
+          </a:effectRef>
+          <a:fontRef idx="minor">
+            <a:schemeClr val="lt1"/>
+          </a:fontRef>
+        </p:style>
+        <p:txBody>
+          <a:bodyPr rtlCol="0" anchor="ctr" wrap="square" tIns="18000" bIns="18000"/>
+          <a:lstStyle/>
+          <a:p>
+            <a:pPr algn="ctr"/>
+            <a:r>
+              <a:rPr sz="1200" b="1">
+                <a:solidFill>
+                  <a:srgbClr val="212121"/>
+                </a:solidFill>
+                <a:latin typeface="Calibri"/>
+              </a:rPr>
+              <a:t>EWMA drift detection</a:t>
+            </a:r>
+          </a:p>
+          <a:p>
+            <a:pPr algn="ctr"/>
+            <a:r>
+              <a:rPr sz="1200" b="0">
+                <a:solidFill>
+                  <a:srgbClr val="212121"/>
+                </a:solidFill>
+                <a:latin typeface="Calibri"/>
+              </a:rPr>
+              <a:t>(alerts, PUC risk)</a:t>
+            </a:r>
+          </a:p>
+        </p:txBody>
+      </p:sp>
+      <p:sp>
+        <p:nvSpPr>
+          <p:cNvPr id="20" name="TextBox 19"/>
           <p:cNvSpPr txBox="1"/>
           <p:nvPr/>
         </p:nvSpPr>
         <p:spPr>
           <a:xfrm>
-            <a:off x="9464040" y="1234440"/>
-            <a:ext cx="2542032" cy="411480"/>
+            <a:off x="9464040" y="1115568"/>
+            <a:ext cx="2542032" cy="365760"/>
           </a:xfrm>
           <a:prstGeom prst="rect">
             <a:avLst/>
@@ -4603,7 +4805,7 @@
               </a:lnSpc>
             </a:pPr>
             <a:r>
-              <a:rPr sz="1500" b="1">
+              <a:rPr sz="1400" b="1">
                 <a:solidFill>
                   <a:srgbClr val="1B5E20"/>
                 </a:solidFill>
@@ -4616,14 +4818,14 @@
       </p:sp>
       <p:sp>
         <p:nvSpPr>
-          <p:cNvPr id="18" name="Rounded Rectangle 17"/>
+          <p:cNvPr id="21" name="Rounded Rectangle 20"/>
           <p:cNvSpPr/>
           <p:nvPr/>
         </p:nvSpPr>
         <p:spPr>
           <a:xfrm>
-            <a:off x="9464040" y="1874519"/>
-            <a:ext cx="2542032" cy="960120"/>
+            <a:off x="9464040" y="1627632"/>
+            <a:ext cx="2542032" cy="804672"/>
           </a:xfrm>
           <a:prstGeom prst="roundRect">
             <a:avLst/>
@@ -4653,44 +4855,44 @@
           </a:fontRef>
         </p:style>
         <p:txBody>
-          <a:bodyPr rtlCol="0" anchor="ctr" wrap="square"/>
+          <a:bodyPr rtlCol="0" anchor="ctr" wrap="square" tIns="18000" bIns="18000"/>
           <a:lstStyle/>
           <a:p>
             <a:pPr algn="ctr"/>
             <a:r>
-              <a:rPr sz="1350" b="1">
+              <a:rPr sz="1200" b="1">
                 <a:solidFill>
                   <a:srgbClr val="212121"/>
                 </a:solidFill>
                 <a:latin typeface="Calibri"/>
               </a:rPr>
-              <a:t>CO2 per trip and</a:t>
+              <a:t>Trip CO2 records</a:t>
             </a:r>
           </a:p>
           <a:p>
             <a:pPr algn="ctr"/>
             <a:r>
-              <a:rPr sz="1350" b="0">
+              <a:rPr sz="1200" b="0">
                 <a:solidFill>
                   <a:srgbClr val="212121"/>
                 </a:solidFill>
                 <a:latin typeface="Calibri"/>
               </a:rPr>
-              <a:t>g/km trends</a:t>
-            </a:r>
-          </a:p>
-        </p:txBody>
-      </p:sp>
-      <p:sp>
-        <p:nvSpPr>
-          <p:cNvPr id="19" name="Rounded Rectangle 18"/>
+              <a:t>and g/km trends</a:t>
+            </a:r>
+          </a:p>
+        </p:txBody>
+      </p:sp>
+      <p:sp>
+        <p:nvSpPr>
+          <p:cNvPr id="22" name="Rounded Rectangle 21"/>
           <p:cNvSpPr/>
           <p:nvPr/>
         </p:nvSpPr>
         <p:spPr>
           <a:xfrm>
-            <a:off x="9464040" y="3090671"/>
-            <a:ext cx="2542032" cy="960120"/>
+            <a:off x="9464040" y="2596896"/>
+            <a:ext cx="2542032" cy="804672"/>
           </a:xfrm>
           <a:prstGeom prst="roundRect">
             <a:avLst/>
@@ -4720,44 +4922,44 @@
           </a:fontRef>
         </p:style>
         <p:txBody>
-          <a:bodyPr rtlCol="0" anchor="ctr" wrap="square"/>
+          <a:bodyPr rtlCol="0" anchor="ctr" wrap="square" tIns="18000" bIns="18000"/>
           <a:lstStyle/>
           <a:p>
             <a:pPr algn="ctr"/>
             <a:r>
-              <a:rPr sz="1350" b="1">
+              <a:rPr sz="1200" b="1">
                 <a:solidFill>
                   <a:srgbClr val="212121"/>
                 </a:solidFill>
                 <a:latin typeface="Calibri"/>
               </a:rPr>
-              <a:t>Abnormal-emission alert</a:t>
+              <a:t>Measured fuel economy</a:t>
             </a:r>
           </a:p>
           <a:p>
             <a:pPr algn="ctr"/>
             <a:r>
-              <a:rPr sz="1350" b="0">
+              <a:rPr sz="1200" b="0">
                 <a:solidFill>
                   <a:srgbClr val="212121"/>
                 </a:solidFill>
                 <a:latin typeface="Calibri"/>
               </a:rPr>
-              <a:t>service reminder</a:t>
-            </a:r>
-          </a:p>
-        </p:txBody>
-      </p:sp>
-      <p:sp>
-        <p:nvSpPr>
-          <p:cNvPr id="20" name="Rounded Rectangle 19"/>
+              <a:t>(tank-to-tank)</a:t>
+            </a:r>
+          </a:p>
+        </p:txBody>
+      </p:sp>
+      <p:sp>
+        <p:nvSpPr>
+          <p:cNvPr id="23" name="Rounded Rectangle 22"/>
           <p:cNvSpPr/>
           <p:nvPr/>
         </p:nvSpPr>
         <p:spPr>
           <a:xfrm>
-            <a:off x="9464040" y="4306823"/>
-            <a:ext cx="2542032" cy="960120"/>
+            <a:off x="9464040" y="3566160"/>
+            <a:ext cx="2542032" cy="804672"/>
           </a:xfrm>
           <a:prstGeom prst="roundRect">
             <a:avLst/>
@@ -4787,44 +4989,111 @@
           </a:fontRef>
         </p:style>
         <p:txBody>
-          <a:bodyPr rtlCol="0" anchor="ctr" wrap="square"/>
+          <a:bodyPr rtlCol="0" anchor="ctr" wrap="square" tIns="18000" bIns="18000"/>
           <a:lstStyle/>
           <a:p>
             <a:pPr algn="ctr"/>
             <a:r>
-              <a:rPr sz="1350" b="1">
+              <a:rPr sz="1200" b="1">
                 <a:solidFill>
                   <a:srgbClr val="212121"/>
                 </a:solidFill>
                 <a:latin typeface="Calibri"/>
               </a:rPr>
+              <a:t>Service alert and</a:t>
+            </a:r>
+          </a:p>
+          <a:p>
+            <a:pPr algn="ctr"/>
+            <a:r>
+              <a:rPr sz="1200" b="0">
+                <a:solidFill>
+                  <a:srgbClr val="212121"/>
+                </a:solidFill>
+                <a:latin typeface="Calibri"/>
+              </a:rPr>
+              <a:t>recovery verification</a:t>
+            </a:r>
+          </a:p>
+        </p:txBody>
+      </p:sp>
+      <p:sp>
+        <p:nvSpPr>
+          <p:cNvPr id="24" name="Rounded Rectangle 23"/>
+          <p:cNvSpPr/>
+          <p:nvPr/>
+        </p:nvSpPr>
+        <p:spPr>
+          <a:xfrm>
+            <a:off x="9464040" y="4535424"/>
+            <a:ext cx="2542032" cy="804672"/>
+          </a:xfrm>
+          <a:prstGeom prst="roundRect">
+            <a:avLst/>
+          </a:prstGeom>
+          <a:solidFill>
+            <a:srgbClr val="F1F8E9"/>
+          </a:solidFill>
+          <a:ln w="12700">
+            <a:solidFill>
+              <a:srgbClr val="43A047"/>
+            </a:solidFill>
+          </a:ln>
+          <a:effectLst/>
+        </p:spPr>
+        <p:style>
+          <a:lnRef idx="1">
+            <a:schemeClr val="accent1"/>
+          </a:lnRef>
+          <a:fillRef idx="3">
+            <a:schemeClr val="accent1"/>
+          </a:fillRef>
+          <a:effectRef idx="2">
+            <a:schemeClr val="accent1"/>
+          </a:effectRef>
+          <a:fontRef idx="minor">
+            <a:schemeClr val="lt1"/>
+          </a:fontRef>
+        </p:style>
+        <p:txBody>
+          <a:bodyPr rtlCol="0" anchor="ctr" wrap="square" tIns="18000" bIns="18000"/>
+          <a:lstStyle/>
+          <a:p>
+            <a:pPr algn="ctr"/>
+            <a:r>
+              <a:rPr sz="1200" b="1">
+                <a:solidFill>
+                  <a:srgbClr val="212121"/>
+                </a:solidFill>
+                <a:latin typeface="Calibri"/>
+              </a:rPr>
               <a:t>PUC failure risk</a:t>
             </a:r>
           </a:p>
           <a:p>
             <a:pPr algn="ctr"/>
             <a:r>
-              <a:rPr sz="1350" b="0">
+              <a:rPr sz="1200" b="0">
                 <a:solidFill>
                   <a:srgbClr val="212121"/>
                 </a:solidFill>
                 <a:latin typeface="Calibri"/>
               </a:rPr>
-              <a:t>prediction</a:t>
+              <a:t>and fleet reports</a:t>
             </a:r>
           </a:p>
         </p:txBody>
       </p:sp>
       <p:cxnSp>
         <p:nvCxnSpPr>
-          <p:cNvPr id="21" name="Connector 20"/>
+          <p:cNvPr id="25" name="Connector 24"/>
           <p:cNvCxnSpPr/>
           <p:nvPr/>
         </p:nvCxnSpPr>
         <p:spPr>
           <a:xfrm>
-            <a:off x="2983512" y="3570731.0"/>
-            <a:ext cx="415488" cy="0.0"/>
+            <a:off x="2978512" y="3483864.0"/>
+            <a:ext cx="425488" cy="0.0"/>
           </a:xfrm>
           <a:prstGeom prst="line">
             <a:avLst/>
@@ -4853,14 +5122,14 @@
       </p:cxnSp>
       <p:cxnSp>
         <p:nvCxnSpPr>
-          <p:cNvPr id="22" name="Connector 21"/>
+          <p:cNvPr id="26" name="Connector 25"/>
           <p:cNvCxnSpPr/>
           <p:nvPr/>
         </p:nvCxnSpPr>
         <p:spPr>
           <a:xfrm>
-            <a:off x="6001032" y="3570731.0"/>
-            <a:ext cx="415488" cy="0.0"/>
+            <a:off x="5996032" y="3483864.0"/>
+            <a:ext cx="425488" cy="0.0"/>
           </a:xfrm>
           <a:prstGeom prst="line">
             <a:avLst/>
@@ -4889,14 +5158,14 @@
       </p:cxnSp>
       <p:cxnSp>
         <p:nvCxnSpPr>
-          <p:cNvPr id="23" name="Connector 22"/>
+          <p:cNvPr id="27" name="Connector 26"/>
           <p:cNvCxnSpPr/>
           <p:nvPr/>
         </p:nvCxnSpPr>
         <p:spPr>
           <a:xfrm>
-            <a:off x="9018552" y="3570731.0"/>
-            <a:ext cx="415488" cy="0.0"/>
+            <a:off x="9013552" y="3483864.0"/>
+            <a:ext cx="425488" cy="0.0"/>
           </a:xfrm>
           <a:prstGeom prst="line">
             <a:avLst/>
@@ -4925,14 +5194,14 @@
       </p:cxnSp>
       <p:sp>
         <p:nvSpPr>
-          <p:cNvPr id="24" name="TextBox 23"/>
+          <p:cNvPr id="28" name="TextBox 27"/>
           <p:cNvSpPr txBox="1"/>
           <p:nvPr/>
         </p:nvSpPr>
         <p:spPr>
           <a:xfrm>
-            <a:off x="411480" y="5806440"/>
-            <a:ext cx="11368735" cy="822960"/>
+            <a:off x="411480" y="5897880"/>
+            <a:ext cx="11368735" cy="777240"/>
           </a:xfrm>
           <a:prstGeom prst="rect">
             <a:avLst/>
@@ -4951,13 +5220,13 @@
               </a:lnSpc>
             </a:pPr>
             <a:r>
-              <a:rPr sz="1400" b="0">
+              <a:rPr sz="1350" b="0">
                 <a:solidFill>
                   <a:srgbClr val="616161"/>
                 </a:solidFill>
                 <a:latin typeface="Calibri"/>
               </a:rPr>
-              <a:t>Flow: the car starting triggers the app  →  the phone records the drive  →  the backend converts driving data into emission estimates and checks them against the car's baseline  →  the owner sees records, trends and service alerts.</a:t>
+              <a:t>Every figure is anchored to measured fuel: litres from payments / the car itself → CO2 by fixed combustion chemistry (1 L petrol = 2.31 kg CO2) → the driving model only interpolates between measurements and is continuously calibrated against them.</a:t>
             </a:r>
           </a:p>
         </p:txBody>
@@ -9050,6 +9319,745 @@
 </p:sld>
 </file>
 
+<file path=ppt/slides/slide9.xml><?xml version="1.0" encoding="utf-8"?>
+<p:sld xmlns:a="http://schemas.openxmlformats.org/drawingml/2006/main" xmlns:p="http://schemas.openxmlformats.org/presentationml/2006/main" xmlns:r="http://schemas.openxmlformats.org/officeDocument/2006/relationships">
+  <p:cSld>
+    <p:spTree>
+      <p:nvGrpSpPr>
+        <p:cNvPr id="1" name=""/>
+        <p:cNvGrpSpPr/>
+        <p:nvPr/>
+      </p:nvGrpSpPr>
+      <p:grpSpPr/>
+      <p:sp>
+        <p:nvSpPr>
+          <p:cNvPr id="2" name="Rectangle 1"/>
+          <p:cNvSpPr/>
+          <p:nvPr/>
+        </p:nvSpPr>
+        <p:spPr>
+          <a:xfrm>
+            <a:off x="0" y="0"/>
+            <a:ext cx="12191695" cy="914400"/>
+          </a:xfrm>
+          <a:prstGeom prst="rect">
+            <a:avLst/>
+          </a:prstGeom>
+          <a:solidFill>
+            <a:srgbClr val="1B5E20"/>
+          </a:solidFill>
+          <a:ln>
+            <a:noFill/>
+          </a:ln>
+          <a:effectLst/>
+        </p:spPr>
+        <p:style>
+          <a:lnRef idx="1">
+            <a:schemeClr val="accent1"/>
+          </a:lnRef>
+          <a:fillRef idx="3">
+            <a:schemeClr val="accent1"/>
+          </a:fillRef>
+          <a:effectRef idx="2">
+            <a:schemeClr val="accent1"/>
+          </a:effectRef>
+          <a:fontRef idx="minor">
+            <a:schemeClr val="lt1"/>
+          </a:fontRef>
+        </p:style>
+        <p:txBody>
+          <a:bodyPr rtlCol="0" anchor="ctr"/>
+          <a:lstStyle/>
+          <a:p>
+            <a:pPr algn="ctr"/>
+          </a:p>
+        </p:txBody>
+      </p:sp>
+      <p:sp>
+        <p:nvSpPr>
+          <p:cNvPr id="3" name="TextBox 2"/>
+          <p:cNvSpPr txBox="1"/>
+          <p:nvPr/>
+        </p:nvSpPr>
+        <p:spPr>
+          <a:xfrm>
+            <a:off x="502920" y="118872"/>
+            <a:ext cx="11185855" cy="685800"/>
+          </a:xfrm>
+          <a:prstGeom prst="rect">
+            <a:avLst/>
+          </a:prstGeom>
+          <a:noFill/>
+        </p:spPr>
+        <p:txBody>
+          <a:bodyPr wrap="square" anchor="ctr">
+            <a:spAutoFit/>
+          </a:bodyPr>
+          <a:lstStyle/>
+          <a:p>
+            <a:pPr algn="l">
+              <a:lnSpc>
+                <a:spcPct val="100000"/>
+              </a:lnSpc>
+            </a:pPr>
+            <a:r>
+              <a:rPr sz="3000" b="1">
+                <a:solidFill>
+                  <a:srgbClr val="FFFFFF"/>
+                </a:solidFill>
+                <a:latin typeface="Calibri"/>
+              </a:rPr>
+              <a:t>Data Captures Itself — No Typing, No Habit Change</a:t>
+            </a:r>
+          </a:p>
+        </p:txBody>
+      </p:sp>
+      <p:sp>
+        <p:nvSpPr>
+          <p:cNvPr id="4" name="Rectangle 3"/>
+          <p:cNvSpPr/>
+          <p:nvPr/>
+        </p:nvSpPr>
+        <p:spPr>
+          <a:xfrm>
+            <a:off x="0" y="914400"/>
+            <a:ext cx="12191695" cy="54864"/>
+          </a:xfrm>
+          <a:prstGeom prst="rect">
+            <a:avLst/>
+          </a:prstGeom>
+          <a:solidFill>
+            <a:srgbClr val="F9A825"/>
+          </a:solidFill>
+          <a:ln>
+            <a:noFill/>
+          </a:ln>
+          <a:effectLst/>
+        </p:spPr>
+        <p:style>
+          <a:lnRef idx="1">
+            <a:schemeClr val="accent1"/>
+          </a:lnRef>
+          <a:fillRef idx="3">
+            <a:schemeClr val="accent1"/>
+          </a:fillRef>
+          <a:effectRef idx="2">
+            <a:schemeClr val="accent1"/>
+          </a:effectRef>
+          <a:fontRef idx="minor">
+            <a:schemeClr val="lt1"/>
+          </a:fontRef>
+        </p:style>
+        <p:txBody>
+          <a:bodyPr rtlCol="0" anchor="ctr"/>
+          <a:lstStyle/>
+          <a:p>
+            <a:pPr algn="ctr"/>
+          </a:p>
+        </p:txBody>
+      </p:sp>
+      <p:graphicFrame>
+        <p:nvGraphicFramePr>
+          <p:cNvPr id="5" name="Table 4"/>
+          <p:cNvGraphicFramePr>
+            <a:graphicFrameLocks noGrp="1"/>
+          </p:cNvGraphicFramePr>
+          <p:nvPr/>
+        </p:nvGraphicFramePr>
+        <p:xfrm>
+          <a:off x="411480" y="1234440"/>
+          <a:ext cx="11365992" cy="3886200"/>
+        </p:xfrm>
+        <a:graphic>
+          <a:graphicData uri="http://schemas.openxmlformats.org/drawingml/2006/table">
+            <a:tbl>
+              <a:tblPr firstRow="1" bandRow="1">
+                <a:tableStyleId>{5C22544A-7EE6-4342-B048-85BDC9FD1C3A}</a:tableStyleId>
+              </a:tblPr>
+              <a:tblGrid>
+                <a:gridCol w="2651760"/>
+                <a:gridCol w="2926080"/>
+                <a:gridCol w="3291840"/>
+                <a:gridCol w="2496312"/>
+              </a:tblGrid>
+              <a:tr h="457200">
+                <a:tc>
+                  <a:txBody>
+                    <a:bodyPr wrap="square"/>
+                    <a:lstStyle/>
+                    <a:p>
+                      <a:r>
+                        <a:rPr sz="1400" b="1">
+                          <a:solidFill>
+                            <a:srgbClr val="FFFFFF"/>
+                          </a:solidFill>
+                          <a:latin typeface="Calibri"/>
+                        </a:rPr>
+                        <a:t>Tier</a:t>
+                      </a:r>
+                    </a:p>
+                  </a:txBody>
+                  <a:tcPr marL="82296" marR="82296" anchor="ctr">
+                    <a:solidFill>
+                      <a:srgbClr val="1B5E20"/>
+                    </a:solidFill>
+                  </a:tcPr>
+                </a:tc>
+                <a:tc>
+                  <a:txBody>
+                    <a:bodyPr wrap="square"/>
+                    <a:lstStyle/>
+                    <a:p>
+                      <a:r>
+                        <a:rPr sz="1400" b="1">
+                          <a:solidFill>
+                            <a:srgbClr val="FFFFFF"/>
+                          </a:solidFill>
+                          <a:latin typeface="Calibri"/>
+                        </a:rPr>
+                        <a:t>Odometer</a:t>
+                      </a:r>
+                    </a:p>
+                  </a:txBody>
+                  <a:tcPr marL="82296" marR="82296" anchor="ctr">
+                    <a:solidFill>
+                      <a:srgbClr val="1B5E20"/>
+                    </a:solidFill>
+                  </a:tcPr>
+                </a:tc>
+                <a:tc>
+                  <a:txBody>
+                    <a:bodyPr wrap="square"/>
+                    <a:lstStyle/>
+                    <a:p>
+                      <a:r>
+                        <a:rPr sz="1400" b="1">
+                          <a:solidFill>
+                            <a:srgbClr val="FFFFFF"/>
+                          </a:solidFill>
+                          <a:latin typeface="Calibri"/>
+                        </a:rPr>
+                        <a:t>Fuel (litres)</a:t>
+                      </a:r>
+                    </a:p>
+                  </a:txBody>
+                  <a:tcPr marL="82296" marR="82296" anchor="ctr">
+                    <a:solidFill>
+                      <a:srgbClr val="1B5E20"/>
+                    </a:solidFill>
+                  </a:tcPr>
+                </a:tc>
+                <a:tc>
+                  <a:txBody>
+                    <a:bodyPr wrap="square"/>
+                    <a:lstStyle/>
+                    <a:p>
+                      <a:r>
+                        <a:rPr sz="1400" b="1">
+                          <a:solidFill>
+                            <a:srgbClr val="FFFFFF"/>
+                          </a:solidFill>
+                          <a:latin typeface="Calibri"/>
+                        </a:rPr>
+                        <a:t>Hardware needed</a:t>
+                      </a:r>
+                    </a:p>
+                  </a:txBody>
+                  <a:tcPr marL="82296" marR="82296" anchor="ctr">
+                    <a:solidFill>
+                      <a:srgbClr val="1B5E20"/>
+                    </a:solidFill>
+                  </a:tcPr>
+                </a:tc>
+              </a:tr>
+              <a:tr h="1143000">
+                <a:tc>
+                  <a:txBody>
+                    <a:bodyPr wrap="square"/>
+                    <a:lstStyle/>
+                    <a:p>
+                      <a:r>
+                        <a:rPr sz="1250" b="1">
+                          <a:solidFill>
+                            <a:srgbClr val="1B5E20"/>
+                          </a:solidFill>
+                          <a:latin typeface="Calibri"/>
+                        </a:rPr>
+                        <a:t>Zero-hardware</a:t>
+                      </a:r>
+                    </a:p>
+                    <a:p>
+                      <a:r>
+                        <a:rPr sz="1250" b="0">
+                          <a:solidFill>
+                            <a:srgbClr val="1B5E20"/>
+                          </a:solidFill>
+                          <a:latin typeface="Calibri"/>
+                        </a:rPr>
+                        <a:t>(every car on the road)</a:t>
+                      </a:r>
+                    </a:p>
+                  </a:txBody>
+                  <a:tcPr marL="82296" marR="82296" anchor="ctr">
+                    <a:solidFill>
+                      <a:srgbClr val="F1F8E9"/>
+                    </a:solidFill>
+                  </a:tcPr>
+                </a:tc>
+                <a:tc>
+                  <a:txBody>
+                    <a:bodyPr wrap="square"/>
+                    <a:lstStyle/>
+                    <a:p>
+                      <a:r>
+                        <a:rPr sz="1250" b="0">
+                          <a:solidFill>
+                            <a:srgbClr val="212121"/>
+                          </a:solidFill>
+                          <a:latin typeface="Calibri"/>
+                        </a:rPr>
+                        <a:t>Virtual odometer: set once,</a:t>
+                      </a:r>
+                    </a:p>
+                    <a:p>
+                      <a:r>
+                        <a:rPr sz="1250" b="0">
+                          <a:solidFill>
+                            <a:srgbClr val="212121"/>
+                          </a:solidFill>
+                          <a:latin typeface="Calibri"/>
+                        </a:rPr>
+                        <a:t>GPS advances it every trip</a:t>
+                      </a:r>
+                    </a:p>
+                  </a:txBody>
+                  <a:tcPr marL="82296" marR="82296" anchor="ctr">
+                    <a:solidFill>
+                      <a:srgbClr val="FFFFFF"/>
+                    </a:solidFill>
+                  </a:tcPr>
+                </a:tc>
+                <a:tc>
+                  <a:txBody>
+                    <a:bodyPr wrap="square"/>
+                    <a:lstStyle/>
+                    <a:p>
+                      <a:r>
+                        <a:rPr sz="1250" b="0">
+                          <a:solidFill>
+                            <a:srgbClr val="212121"/>
+                          </a:solidFill>
+                          <a:latin typeface="Calibri"/>
+                        </a:rPr>
+                        <a:t>Payment notifications (UPI/card)</a:t>
+                      </a:r>
+                    </a:p>
+                    <a:p>
+                      <a:r>
+                        <a:rPr sz="1250" b="0">
+                          <a:solidFill>
+                            <a:srgbClr val="212121"/>
+                          </a:solidFill>
+                          <a:latin typeface="Calibri"/>
+                        </a:rPr>
+                        <a:t>auto-convert to litres on-device</a:t>
+                      </a:r>
+                    </a:p>
+                  </a:txBody>
+                  <a:tcPr marL="82296" marR="82296" anchor="ctr">
+                    <a:solidFill>
+                      <a:srgbClr val="FFFFFF"/>
+                    </a:solidFill>
+                  </a:tcPr>
+                </a:tc>
+                <a:tc>
+                  <a:txBody>
+                    <a:bodyPr wrap="square"/>
+                    <a:lstStyle/>
+                    <a:p>
+                      <a:r>
+                        <a:rPr sz="1250" b="0">
+                          <a:solidFill>
+                            <a:srgbClr val="212121"/>
+                          </a:solidFill>
+                          <a:latin typeface="Calibri"/>
+                        </a:rPr>
+                        <a:t>None</a:t>
+                      </a:r>
+                    </a:p>
+                  </a:txBody>
+                  <a:tcPr marL="82296" marR="82296" anchor="ctr">
+                    <a:solidFill>
+                      <a:srgbClr val="FFFFFF"/>
+                    </a:solidFill>
+                  </a:tcPr>
+                </a:tc>
+              </a:tr>
+              <a:tr h="1143000">
+                <a:tc>
+                  <a:txBody>
+                    <a:bodyPr wrap="square"/>
+                    <a:lstStyle/>
+                    <a:p>
+                      <a:r>
+                        <a:rPr sz="1250" b="1">
+                          <a:solidFill>
+                            <a:srgbClr val="1B5E20"/>
+                          </a:solidFill>
+                          <a:latin typeface="Calibri"/>
+                        </a:rPr>
+                        <a:t>Connected car</a:t>
+                      </a:r>
+                    </a:p>
+                    <a:p>
+                      <a:r>
+                        <a:rPr sz="1250" b="0">
+                          <a:solidFill>
+                            <a:srgbClr val="1B5E20"/>
+                          </a:solidFill>
+                          <a:latin typeface="Calibri"/>
+                        </a:rPr>
+                        <a:t>(BlueLink, iRA, iSmart...)</a:t>
+                      </a:r>
+                    </a:p>
+                  </a:txBody>
+                  <a:tcPr marL="82296" marR="82296" anchor="ctr">
+                    <a:solidFill>
+                      <a:srgbClr val="F1F8E9"/>
+                    </a:solidFill>
+                  </a:tcPr>
+                </a:tc>
+                <a:tc>
+                  <a:txBody>
+                    <a:bodyPr wrap="square"/>
+                    <a:lstStyle/>
+                    <a:p>
+                      <a:r>
+                        <a:rPr sz="1250" b="0">
+                          <a:solidFill>
+                            <a:srgbClr val="212121"/>
+                          </a:solidFill>
+                          <a:latin typeface="Calibri"/>
+                        </a:rPr>
+                        <a:t>Exact reading from the</a:t>
+                      </a:r>
+                    </a:p>
+                    <a:p>
+                      <a:r>
+                        <a:rPr sz="1250" b="0">
+                          <a:solidFill>
+                            <a:srgbClr val="212121"/>
+                          </a:solidFill>
+                          <a:latin typeface="Calibri"/>
+                        </a:rPr>
+                        <a:t>manufacturer cloud</a:t>
+                      </a:r>
+                    </a:p>
+                  </a:txBody>
+                  <a:tcPr marL="82296" marR="82296" anchor="ctr">
+                    <a:solidFill>
+                      <a:srgbClr val="FFFFFF"/>
+                    </a:solidFill>
+                  </a:tcPr>
+                </a:tc>
+                <a:tc>
+                  <a:txBody>
+                    <a:bodyPr wrap="square"/>
+                    <a:lstStyle/>
+                    <a:p>
+                      <a:r>
+                        <a:rPr sz="1250" b="0">
+                          <a:solidFill>
+                            <a:srgbClr val="212121"/>
+                          </a:solidFill>
+                          <a:latin typeface="Calibri"/>
+                        </a:rPr>
+                        <a:t>Fuel-level changes reported</a:t>
+                      </a:r>
+                    </a:p>
+                    <a:p>
+                      <a:r>
+                        <a:rPr sz="1250" b="0">
+                          <a:solidFill>
+                            <a:srgbClr val="212121"/>
+                          </a:solidFill>
+                          <a:latin typeface="Calibri"/>
+                        </a:rPr>
+                        <a:t>by the car's built-in telematics</a:t>
+                      </a:r>
+                    </a:p>
+                  </a:txBody>
+                  <a:tcPr marL="82296" marR="82296" anchor="ctr">
+                    <a:solidFill>
+                      <a:srgbClr val="FFFFFF"/>
+                    </a:solidFill>
+                  </a:tcPr>
+                </a:tc>
+                <a:tc>
+                  <a:txBody>
+                    <a:bodyPr wrap="square"/>
+                    <a:lstStyle/>
+                    <a:p>
+                      <a:r>
+                        <a:rPr sz="1250" b="0">
+                          <a:solidFill>
+                            <a:srgbClr val="212121"/>
+                          </a:solidFill>
+                          <a:latin typeface="Calibri"/>
+                        </a:rPr>
+                        <a:t>None extra - factory TCU</a:t>
+                      </a:r>
+                    </a:p>
+                    <a:p>
+                      <a:r>
+                        <a:rPr sz="1250" b="0">
+                          <a:solidFill>
+                            <a:srgbClr val="212121"/>
+                          </a:solidFill>
+                          <a:latin typeface="Calibri"/>
+                        </a:rPr>
+                        <a:t>already in the car</a:t>
+                      </a:r>
+                    </a:p>
+                  </a:txBody>
+                  <a:tcPr marL="82296" marR="82296" anchor="ctr">
+                    <a:solidFill>
+                      <a:srgbClr val="FFFFFF"/>
+                    </a:solidFill>
+                  </a:tcPr>
+                </a:tc>
+              </a:tr>
+              <a:tr h="1143000">
+                <a:tc>
+                  <a:txBody>
+                    <a:bodyPr wrap="square"/>
+                    <a:lstStyle/>
+                    <a:p>
+                      <a:r>
+                        <a:rPr sz="1250" b="1">
+                          <a:solidFill>
+                            <a:srgbClr val="1B5E20"/>
+                          </a:solidFill>
+                          <a:latin typeface="Calibri"/>
+                        </a:rPr>
+                        <a:t>OBD pro tier</a:t>
+                      </a:r>
+                    </a:p>
+                    <a:p>
+                      <a:r>
+                        <a:rPr sz="1250" b="0">
+                          <a:solidFill>
+                            <a:srgbClr val="1B5E20"/>
+                          </a:solidFill>
+                          <a:latin typeface="Calibri"/>
+                        </a:rPr>
+                        <a:t>(optional)</a:t>
+                      </a:r>
+                    </a:p>
+                  </a:txBody>
+                  <a:tcPr marL="82296" marR="82296" anchor="ctr">
+                    <a:solidFill>
+                      <a:srgbClr val="F1F8E9"/>
+                    </a:solidFill>
+                  </a:tcPr>
+                </a:tc>
+                <a:tc>
+                  <a:txBody>
+                    <a:bodyPr wrap="square"/>
+                    <a:lstStyle/>
+                    <a:p>
+                      <a:r>
+                        <a:rPr sz="1250" b="0">
+                          <a:solidFill>
+                            <a:srgbClr val="212121"/>
+                          </a:solidFill>
+                          <a:latin typeface="Calibri"/>
+                        </a:rPr>
+                        <a:t>True ECU odometer (PID A6),</a:t>
+                      </a:r>
+                    </a:p>
+                    <a:p>
+                      <a:r>
+                        <a:rPr sz="1250" b="0">
+                          <a:solidFill>
+                            <a:srgbClr val="212121"/>
+                          </a:solidFill>
+                          <a:latin typeface="Calibri"/>
+                        </a:rPr>
+                        <a:t>auto-corrects GPS drift</a:t>
+                      </a:r>
+                    </a:p>
+                  </a:txBody>
+                  <a:tcPr marL="82296" marR="82296" anchor="ctr">
+                    <a:solidFill>
+                      <a:srgbClr val="FFFFFF"/>
+                    </a:solidFill>
+                  </a:tcPr>
+                </a:tc>
+                <a:tc>
+                  <a:txBody>
+                    <a:bodyPr wrap="square"/>
+                    <a:lstStyle/>
+                    <a:p>
+                      <a:r>
+                        <a:rPr sz="1250" b="0">
+                          <a:solidFill>
+                            <a:srgbClr val="212121"/>
+                          </a:solidFill>
+                          <a:latin typeface="Calibri"/>
+                        </a:rPr>
+                        <a:t>Live fuel flow measured from</a:t>
+                      </a:r>
+                    </a:p>
+                    <a:p>
+                      <a:r>
+                        <a:rPr sz="1250" b="0">
+                          <a:solidFill>
+                            <a:srgbClr val="212121"/>
+                          </a:solidFill>
+                          <a:latin typeface="Calibri"/>
+                        </a:rPr>
+                        <a:t>the engine's airflow sensor</a:t>
+                      </a:r>
+                    </a:p>
+                  </a:txBody>
+                  <a:tcPr marL="82296" marR="82296" anchor="ctr">
+                    <a:solidFill>
+                      <a:srgbClr val="FFFFFF"/>
+                    </a:solidFill>
+                  </a:tcPr>
+                </a:tc>
+                <a:tc>
+                  <a:txBody>
+                    <a:bodyPr wrap="square"/>
+                    <a:lstStyle/>
+                    <a:p>
+                      <a:r>
+                        <a:rPr sz="1250" b="0">
+                          <a:solidFill>
+                            <a:srgbClr val="212121"/>
+                          </a:solidFill>
+                          <a:latin typeface="Calibri"/>
+                        </a:rPr>
+                        <a:t>₹500 ELM327 adapter</a:t>
+                      </a:r>
+                    </a:p>
+                    <a:p>
+                      <a:r>
+                        <a:rPr sz="1250" b="0">
+                          <a:solidFill>
+                            <a:srgbClr val="212121"/>
+                          </a:solidFill>
+                          <a:latin typeface="Calibri"/>
+                        </a:rPr>
+                        <a:t>in the OBD port</a:t>
+                      </a:r>
+                    </a:p>
+                  </a:txBody>
+                  <a:tcPr marL="82296" marR="82296" anchor="ctr">
+                    <a:solidFill>
+                      <a:srgbClr val="FFFFFF"/>
+                    </a:solidFill>
+                  </a:tcPr>
+                </a:tc>
+              </a:tr>
+            </a:tbl>
+          </a:graphicData>
+        </a:graphic>
+      </p:graphicFrame>
+      <p:sp>
+        <p:nvSpPr>
+          <p:cNvPr id="6" name="Rounded Rectangle 5"/>
+          <p:cNvSpPr/>
+          <p:nvPr/>
+        </p:nvSpPr>
+        <p:spPr>
+          <a:xfrm>
+            <a:off x="411480" y="5486400"/>
+            <a:ext cx="11368735" cy="914400"/>
+          </a:xfrm>
+          <a:prstGeom prst="roundRect">
+            <a:avLst/>
+          </a:prstGeom>
+          <a:solidFill>
+            <a:srgbClr val="F1F8E9"/>
+          </a:solidFill>
+          <a:ln w="12700">
+            <a:solidFill>
+              <a:srgbClr val="43A047"/>
+            </a:solidFill>
+          </a:ln>
+          <a:effectLst/>
+        </p:spPr>
+        <p:style>
+          <a:lnRef idx="1">
+            <a:schemeClr val="accent1"/>
+          </a:lnRef>
+          <a:fillRef idx="3">
+            <a:schemeClr val="accent1"/>
+          </a:fillRef>
+          <a:effectRef idx="2">
+            <a:schemeClr val="accent1"/>
+          </a:effectRef>
+          <a:fontRef idx="minor">
+            <a:schemeClr val="lt1"/>
+          </a:fontRef>
+        </p:style>
+        <p:txBody>
+          <a:bodyPr rtlCol="0" anchor="ctr"/>
+          <a:lstStyle/>
+          <a:p>
+            <a:pPr algn="ctr"/>
+          </a:p>
+        </p:txBody>
+      </p:sp>
+      <p:sp>
+        <p:nvSpPr>
+          <p:cNvPr id="7" name="TextBox 6"/>
+          <p:cNvSpPr txBox="1"/>
+          <p:nvPr/>
+        </p:nvSpPr>
+        <p:spPr>
+          <a:xfrm>
+            <a:off x="640080" y="5596128"/>
+            <a:ext cx="10911535" cy="731520"/>
+          </a:xfrm>
+          <a:prstGeom prst="rect">
+            <a:avLst/>
+          </a:prstGeom>
+          <a:noFill/>
+        </p:spPr>
+        <p:txBody>
+          <a:bodyPr wrap="square" anchor="ctr">
+            <a:spAutoFit/>
+          </a:bodyPr>
+          <a:lstStyle/>
+          <a:p>
+            <a:pPr algn="ctr">
+              <a:lnSpc>
+                <a:spcPct val="120000"/>
+              </a:lnSpc>
+            </a:pPr>
+            <a:r>
+              <a:rPr sz="1400" b="0">
+                <a:solidFill>
+                  <a:srgbClr val="1B5E20"/>
+                </a:solidFill>
+                <a:latin typeface="Calibri"/>
+              </a:rPr>
+              <a:t>Trips record themselves (car Bluetooth) · odometer tracks itself · fill-ups log themselves from payment alerts · refuel stops are auto-detected from GPS. The only manual case left: paying cash at the pump.</a:t>
+            </a:r>
+          </a:p>
+        </p:txBody>
+      </p:sp>
+    </p:spTree>
+  </p:cSld>
+  <p:clrMapOvr>
+    <a:masterClrMapping/>
+  </p:clrMapOvr>
+</p:sld>
+</file>
+
 <file path=ppt/theme/theme1.xml><?xml version="1.0" encoding="utf-8"?>
 <a:theme xmlns:a="http://schemas.openxmlformats.org/drawingml/2006/main" name="Office Theme">
   <a:themeElements>

--- a/CarbonTrace_MSME_Hackathon.pptx
+++ b/CarbonTrace_MSME_Hackathon.pptx
@@ -5240,4086 +5240,6 @@
 </file>
 
 <file path=ppt/slides/slide4.xml><?xml version="1.0" encoding="utf-8"?>
-<p:sld xmlns:a="http://schemas.openxmlformats.org/drawingml/2006/main" xmlns:p="http://schemas.openxmlformats.org/presentationml/2006/main" xmlns:r="http://schemas.openxmlformats.org/officeDocument/2006/relationships">
-  <p:cSld>
-    <p:spTree>
-      <p:nvGrpSpPr>
-        <p:cNvPr id="1" name=""/>
-        <p:cNvGrpSpPr/>
-        <p:nvPr/>
-      </p:nvGrpSpPr>
-      <p:grpSpPr/>
-      <p:sp>
-        <p:nvSpPr>
-          <p:cNvPr id="2" name="Rectangle 1"/>
-          <p:cNvSpPr/>
-          <p:nvPr/>
-        </p:nvSpPr>
-        <p:spPr>
-          <a:xfrm>
-            <a:off x="0" y="0"/>
-            <a:ext cx="12191695" cy="914400"/>
-          </a:xfrm>
-          <a:prstGeom prst="rect">
-            <a:avLst/>
-          </a:prstGeom>
-          <a:solidFill>
-            <a:srgbClr val="1B5E20"/>
-          </a:solidFill>
-          <a:ln>
-            <a:noFill/>
-          </a:ln>
-          <a:effectLst/>
-        </p:spPr>
-        <p:style>
-          <a:lnRef idx="1">
-            <a:schemeClr val="accent1"/>
-          </a:lnRef>
-          <a:fillRef idx="3">
-            <a:schemeClr val="accent1"/>
-          </a:fillRef>
-          <a:effectRef idx="2">
-            <a:schemeClr val="accent1"/>
-          </a:effectRef>
-          <a:fontRef idx="minor">
-            <a:schemeClr val="lt1"/>
-          </a:fontRef>
-        </p:style>
-        <p:txBody>
-          <a:bodyPr rtlCol="0" anchor="ctr"/>
-          <a:lstStyle/>
-          <a:p>
-            <a:pPr algn="ctr"/>
-          </a:p>
-        </p:txBody>
-      </p:sp>
-      <p:sp>
-        <p:nvSpPr>
-          <p:cNvPr id="3" name="TextBox 2"/>
-          <p:cNvSpPr txBox="1"/>
-          <p:nvPr/>
-        </p:nvSpPr>
-        <p:spPr>
-          <a:xfrm>
-            <a:off x="502920" y="118872"/>
-            <a:ext cx="11185855" cy="685800"/>
-          </a:xfrm>
-          <a:prstGeom prst="rect">
-            <a:avLst/>
-          </a:prstGeom>
-          <a:noFill/>
-        </p:spPr>
-        <p:txBody>
-          <a:bodyPr wrap="square" anchor="ctr">
-            <a:spAutoFit/>
-          </a:bodyPr>
-          <a:lstStyle/>
-          <a:p>
-            <a:pPr algn="l">
-              <a:lnSpc>
-                <a:spcPct val="100000"/>
-              </a:lnSpc>
-            </a:pPr>
-            <a:r>
-              <a:rPr sz="3000" b="1">
-                <a:solidFill>
-                  <a:srgbClr val="FFFFFF"/>
-                </a:solidFill>
-                <a:latin typeface="Calibri"/>
-              </a:rPr>
-              <a:t>Existing Solutions and How Ours Is Different</a:t>
-            </a:r>
-          </a:p>
-        </p:txBody>
-      </p:sp>
-      <p:sp>
-        <p:nvSpPr>
-          <p:cNvPr id="4" name="Rectangle 3"/>
-          <p:cNvSpPr/>
-          <p:nvPr/>
-        </p:nvSpPr>
-        <p:spPr>
-          <a:xfrm>
-            <a:off x="0" y="914400"/>
-            <a:ext cx="12191695" cy="54864"/>
-          </a:xfrm>
-          <a:prstGeom prst="rect">
-            <a:avLst/>
-          </a:prstGeom>
-          <a:solidFill>
-            <a:srgbClr val="F9A825"/>
-          </a:solidFill>
-          <a:ln>
-            <a:noFill/>
-          </a:ln>
-          <a:effectLst/>
-        </p:spPr>
-        <p:style>
-          <a:lnRef idx="1">
-            <a:schemeClr val="accent1"/>
-          </a:lnRef>
-          <a:fillRef idx="3">
-            <a:schemeClr val="accent1"/>
-          </a:fillRef>
-          <a:effectRef idx="2">
-            <a:schemeClr val="accent1"/>
-          </a:effectRef>
-          <a:fontRef idx="minor">
-            <a:schemeClr val="lt1"/>
-          </a:fontRef>
-        </p:style>
-        <p:txBody>
-          <a:bodyPr rtlCol="0" anchor="ctr"/>
-          <a:lstStyle/>
-          <a:p>
-            <a:pPr algn="ctr"/>
-          </a:p>
-        </p:txBody>
-      </p:sp>
-      <p:graphicFrame>
-        <p:nvGraphicFramePr>
-          <p:cNvPr id="5" name="Table 4"/>
-          <p:cNvGraphicFramePr>
-            <a:graphicFrameLocks noGrp="1"/>
-          </p:cNvGraphicFramePr>
-          <p:nvPr/>
-        </p:nvGraphicFramePr>
-        <p:xfrm>
-          <a:off x="411480" y="1234440"/>
-          <a:ext cx="11365992" cy="4965192"/>
-        </p:xfrm>
-        <a:graphic>
-          <a:graphicData uri="http://schemas.openxmlformats.org/drawingml/2006/table">
-            <a:tbl>
-              <a:tblPr firstRow="1" bandRow="1">
-                <a:tableStyleId>{5C22544A-7EE6-4342-B048-85BDC9FD1C3A}</a:tableStyleId>
-              </a:tblPr>
-              <a:tblGrid>
-                <a:gridCol w="2377440"/>
-                <a:gridCol w="2834640"/>
-                <a:gridCol w="3108960"/>
-                <a:gridCol w="3044952"/>
-              </a:tblGrid>
-              <a:tr h="502920">
-                <a:tc>
-                  <a:txBody>
-                    <a:bodyPr wrap="square"/>
-                    <a:lstStyle/>
-                    <a:p>
-                      <a:r>
-                        <a:rPr sz="1400" b="1">
-                          <a:solidFill>
-                            <a:srgbClr val="FFFFFF"/>
-                          </a:solidFill>
-                          <a:latin typeface="Calibri"/>
-                        </a:rPr>
-                        <a:t>Existing solution</a:t>
-                      </a:r>
-                    </a:p>
-                  </a:txBody>
-                  <a:tcPr marL="82296" marR="82296" marT="45720" marB="45720" anchor="ctr">
-                    <a:solidFill>
-                      <a:srgbClr val="1B5E20"/>
-                    </a:solidFill>
-                  </a:tcPr>
-                </a:tc>
-                <a:tc>
-                  <a:txBody>
-                    <a:bodyPr wrap="square"/>
-                    <a:lstStyle/>
-                    <a:p>
-                      <a:r>
-                        <a:rPr sz="1400" b="1">
-                          <a:solidFill>
-                            <a:srgbClr val="FFFFFF"/>
-                          </a:solidFill>
-                          <a:latin typeface="Calibri"/>
-                        </a:rPr>
-                        <a:t>What it does</a:t>
-                      </a:r>
-                    </a:p>
-                  </a:txBody>
-                  <a:tcPr marL="82296" marR="82296" marT="45720" marB="45720" anchor="ctr">
-                    <a:solidFill>
-                      <a:srgbClr val="1B5E20"/>
-                    </a:solidFill>
-                  </a:tcPr>
-                </a:tc>
-                <a:tc>
-                  <a:txBody>
-                    <a:bodyPr wrap="square"/>
-                    <a:lstStyle/>
-                    <a:p>
-                      <a:r>
-                        <a:rPr sz="1400" b="1">
-                          <a:solidFill>
-                            <a:srgbClr val="FFFFFF"/>
-                          </a:solidFill>
-                          <a:latin typeface="Calibri"/>
-                        </a:rPr>
-                        <a:t>Its limitation</a:t>
-                      </a:r>
-                    </a:p>
-                  </a:txBody>
-                  <a:tcPr marL="82296" marR="82296" marT="45720" marB="45720" anchor="ctr">
-                    <a:solidFill>
-                      <a:srgbClr val="1B5E20"/>
-                    </a:solidFill>
-                  </a:tcPr>
-                </a:tc>
-                <a:tc>
-                  <a:txBody>
-                    <a:bodyPr wrap="square"/>
-                    <a:lstStyle/>
-                    <a:p>
-                      <a:r>
-                        <a:rPr sz="1400" b="1">
-                          <a:solidFill>
-                            <a:srgbClr val="FFFFFF"/>
-                          </a:solidFill>
-                          <a:latin typeface="Calibri"/>
-                        </a:rPr>
-                        <a:t>CarbonTrace</a:t>
-                      </a:r>
-                    </a:p>
-                  </a:txBody>
-                  <a:tcPr marL="82296" marR="82296" marT="45720" marB="45720" anchor="ctr">
-                    <a:solidFill>
-                      <a:srgbClr val="1B5E20"/>
-                    </a:solidFill>
-                  </a:tcPr>
-                </a:tc>
-              </a:tr>
-              <a:tr h="1115568">
-                <a:tc>
-                  <a:txBody>
-                    <a:bodyPr wrap="square"/>
-                    <a:lstStyle/>
-                    <a:p>
-                      <a:r>
-                        <a:rPr sz="1300" b="1">
-                          <a:solidFill>
-                            <a:srgbClr val="212121"/>
-                          </a:solidFill>
-                          <a:latin typeface="Calibri"/>
-                        </a:rPr>
-                        <a:t>PUC test centres</a:t>
-                      </a:r>
-                    </a:p>
-                  </a:txBody>
-                  <a:tcPr marL="82296" marR="82296" marT="45720" marB="45720" anchor="ctr">
-                    <a:solidFill>
-                      <a:srgbClr val="FFFFFF"/>
-                    </a:solidFill>
-                  </a:tcPr>
-                </a:tc>
-                <a:tc>
-                  <a:txBody>
-                    <a:bodyPr wrap="square"/>
-                    <a:lstStyle/>
-                    <a:p>
-                      <a:r>
-                        <a:rPr sz="1300" b="0">
-                          <a:solidFill>
-                            <a:srgbClr val="212121"/>
-                          </a:solidFill>
-                          <a:latin typeface="Calibri"/>
-                        </a:rPr>
-                        <a:t>Certified tailpipe test once or twice a year</a:t>
-                      </a:r>
-                    </a:p>
-                  </a:txBody>
-                  <a:tcPr marL="82296" marR="82296" marT="45720" marB="45720" anchor="ctr">
-                    <a:solidFill>
-                      <a:srgbClr val="FFFFFF"/>
-                    </a:solidFill>
-                  </a:tcPr>
-                </a:tc>
-                <a:tc>
-                  <a:txBody>
-                    <a:bodyPr wrap="square"/>
-                    <a:lstStyle/>
-                    <a:p>
-                      <a:r>
-                        <a:rPr sz="1300" b="0">
-                          <a:solidFill>
-                            <a:srgbClr val="212121"/>
-                          </a:solidFill>
-                          <a:latin typeface="Calibri"/>
-                        </a:rPr>
-                        <a:t>A snapshot only; faults pollute unnoticed for months between tests</a:t>
-                      </a:r>
-                    </a:p>
-                  </a:txBody>
-                  <a:tcPr marL="82296" marR="82296" marT="45720" marB="45720" anchor="ctr">
-                    <a:solidFill>
-                      <a:srgbClr val="FFFFFF"/>
-                    </a:solidFill>
-                  </a:tcPr>
-                </a:tc>
-                <a:tc>
-                  <a:txBody>
-                    <a:bodyPr wrap="square"/>
-                    <a:lstStyle/>
-                    <a:p>
-                      <a:r>
-                        <a:rPr sz="1300" b="1">
-                          <a:solidFill>
-                            <a:srgbClr val="1B5E20"/>
-                          </a:solidFill>
-                          <a:latin typeface="Calibri"/>
-                        </a:rPr>
-                        <a:t>Continuous monitoring every single trip; predicts PUC failure early</a:t>
-                      </a:r>
-                    </a:p>
-                  </a:txBody>
-                  <a:tcPr marL="82296" marR="82296" marT="45720" marB="45720" anchor="ctr">
-                    <a:solidFill>
-                      <a:srgbClr val="F1F8E9"/>
-                    </a:solidFill>
-                  </a:tcPr>
-                </a:tc>
-              </a:tr>
-              <a:tr h="1115568">
-                <a:tc>
-                  <a:txBody>
-                    <a:bodyPr wrap="square"/>
-                    <a:lstStyle/>
-                    <a:p>
-                      <a:r>
-                        <a:rPr sz="1300" b="1">
-                          <a:solidFill>
-                            <a:srgbClr val="212121"/>
-                          </a:solidFill>
-                          <a:latin typeface="Calibri"/>
-                        </a:rPr>
-                        <a:t>OBD-II apps (Torque, Carista)</a:t>
-                      </a:r>
-                    </a:p>
-                  </a:txBody>
-                  <a:tcPr marL="82296" marR="82296" marT="45720" marB="45720" anchor="ctr">
-                    <a:solidFill>
-                      <a:srgbClr val="FFFFFF"/>
-                    </a:solidFill>
-                  </a:tcPr>
-                </a:tc>
-                <a:tc>
-                  <a:txBody>
-                    <a:bodyPr wrap="square"/>
-                    <a:lstStyle/>
-                    <a:p>
-                      <a:r>
-                        <a:rPr sz="1300" b="0">
-                          <a:solidFill>
-                            <a:srgbClr val="212121"/>
-                          </a:solidFill>
-                          <a:latin typeface="Calibri"/>
-                        </a:rPr>
-                        <a:t>Read live engine data from the diagnostics port</a:t>
-                      </a:r>
-                    </a:p>
-                  </a:txBody>
-                  <a:tcPr marL="82296" marR="82296" marT="45720" marB="45720" anchor="ctr">
-                    <a:solidFill>
-                      <a:srgbClr val="FFFFFF"/>
-                    </a:solidFill>
-                  </a:tcPr>
-                </a:tc>
-                <a:tc>
-                  <a:txBody>
-                    <a:bodyPr wrap="square"/>
-                    <a:lstStyle/>
-                    <a:p>
-                      <a:r>
-                        <a:rPr sz="1300" b="0">
-                          <a:solidFill>
-                            <a:srgbClr val="212121"/>
-                          </a:solidFill>
-                          <a:latin typeface="Calibri"/>
-                        </a:rPr>
-                        <a:t>Need a hardware dongle plugged into the car</a:t>
-                      </a:r>
-                    </a:p>
-                  </a:txBody>
-                  <a:tcPr marL="82296" marR="82296" marT="45720" marB="45720" anchor="ctr">
-                    <a:solidFill>
-                      <a:srgbClr val="FFFFFF"/>
-                    </a:solidFill>
-                  </a:tcPr>
-                </a:tc>
-                <a:tc>
-                  <a:txBody>
-                    <a:bodyPr wrap="square"/>
-                    <a:lstStyle/>
-                    <a:p>
-                      <a:r>
-                        <a:rPr sz="1300" b="1">
-                          <a:solidFill>
-                            <a:srgbClr val="1B5E20"/>
-                          </a:solidFill>
-                          <a:latin typeface="Calibri"/>
-                        </a:rPr>
-                        <a:t>Zero hardware - works with just the phone the owner already has</a:t>
-                      </a:r>
-                    </a:p>
-                  </a:txBody>
-                  <a:tcPr marL="82296" marR="82296" marT="45720" marB="45720" anchor="ctr">
-                    <a:solidFill>
-                      <a:srgbClr val="F1F8E9"/>
-                    </a:solidFill>
-                  </a:tcPr>
-                </a:tc>
-              </a:tr>
-              <a:tr h="1115568">
-                <a:tc>
-                  <a:txBody>
-                    <a:bodyPr wrap="square"/>
-                    <a:lstStyle/>
-                    <a:p>
-                      <a:r>
-                        <a:rPr sz="1300" b="1">
-                          <a:solidFill>
-                            <a:srgbClr val="212121"/>
-                          </a:solidFill>
-                          <a:latin typeface="Calibri"/>
-                        </a:rPr>
-                        <a:t>Manufacturer apps (BlueLink, iConnect)</a:t>
-                      </a:r>
-                    </a:p>
-                  </a:txBody>
-                  <a:tcPr marL="82296" marR="82296" marT="45720" marB="45720" anchor="ctr">
-                    <a:solidFill>
-                      <a:srgbClr val="FFFFFF"/>
-                    </a:solidFill>
-                  </a:tcPr>
-                </a:tc>
-                <a:tc>
-                  <a:txBody>
-                    <a:bodyPr wrap="square"/>
-                    <a:lstStyle/>
-                    <a:p>
-                      <a:r>
-                        <a:rPr sz="1300" b="0">
-                          <a:solidFill>
-                            <a:srgbClr val="212121"/>
-                          </a:solidFill>
-                          <a:latin typeface="Calibri"/>
-                        </a:rPr>
-                        <a:t>Connected-car stats for one brand's new models</a:t>
-                      </a:r>
-                    </a:p>
-                  </a:txBody>
-                  <a:tcPr marL="82296" marR="82296" marT="45720" marB="45720" anchor="ctr">
-                    <a:solidFill>
-                      <a:srgbClr val="FFFFFF"/>
-                    </a:solidFill>
-                  </a:tcPr>
-                </a:tc>
-                <a:tc>
-                  <a:txBody>
-                    <a:bodyPr wrap="square"/>
-                    <a:lstStyle/>
-                    <a:p>
-                      <a:r>
-                        <a:rPr sz="1300" b="0">
-                          <a:solidFill>
-                            <a:srgbClr val="212121"/>
-                          </a:solidFill>
-                          <a:latin typeface="Calibri"/>
-                        </a:rPr>
-                        <a:t>Brand-locked, recent cars only, no emission analytics</a:t>
-                      </a:r>
-                    </a:p>
-                  </a:txBody>
-                  <a:tcPr marL="82296" marR="82296" marT="45720" marB="45720" anchor="ctr">
-                    <a:solidFill>
-                      <a:srgbClr val="FFFFFF"/>
-                    </a:solidFill>
-                  </a:tcPr>
-                </a:tc>
-                <a:tc>
-                  <a:txBody>
-                    <a:bodyPr wrap="square"/>
-                    <a:lstStyle/>
-                    <a:p>
-                      <a:r>
-                        <a:rPr sz="1300" b="1">
-                          <a:solidFill>
-                            <a:srgbClr val="1B5E20"/>
-                          </a:solidFill>
-                          <a:latin typeface="Calibri"/>
-                        </a:rPr>
-                        <a:t>Works across brands and car ages; emission-focused analytics</a:t>
-                      </a:r>
-                    </a:p>
-                  </a:txBody>
-                  <a:tcPr marL="82296" marR="82296" marT="45720" marB="45720" anchor="ctr">
-                    <a:solidFill>
-                      <a:srgbClr val="F1F8E9"/>
-                    </a:solidFill>
-                  </a:tcPr>
-                </a:tc>
-              </a:tr>
-              <a:tr h="1115568">
-                <a:tc>
-                  <a:txBody>
-                    <a:bodyPr wrap="square"/>
-                    <a:lstStyle/>
-                    <a:p>
-                      <a:r>
-                        <a:rPr sz="1300" b="1">
-                          <a:solidFill>
-                            <a:srgbClr val="212121"/>
-                          </a:solidFill>
-                          <a:latin typeface="Calibri"/>
-                        </a:rPr>
-                        <a:t>Fuel log apps (Fuelio, Drivvo)</a:t>
-                      </a:r>
-                    </a:p>
-                  </a:txBody>
-                  <a:tcPr marL="82296" marR="82296" marT="45720" marB="45720" anchor="ctr">
-                    <a:solidFill>
-                      <a:srgbClr val="FFFFFF"/>
-                    </a:solidFill>
-                  </a:tcPr>
-                </a:tc>
-                <a:tc>
-                  <a:txBody>
-                    <a:bodyPr wrap="square"/>
-                    <a:lstStyle/>
-                    <a:p>
-                      <a:r>
-                        <a:rPr sz="1300" b="0">
-                          <a:solidFill>
-                            <a:srgbClr val="212121"/>
-                          </a:solidFill>
-                          <a:latin typeface="Calibri"/>
-                        </a:rPr>
-                        <a:t>Track mileage from manual fuel entries</a:t>
-                      </a:r>
-                    </a:p>
-                  </a:txBody>
-                  <a:tcPr marL="82296" marR="82296" marT="45720" marB="45720" anchor="ctr">
-                    <a:solidFill>
-                      <a:srgbClr val="FFFFFF"/>
-                    </a:solidFill>
-                  </a:tcPr>
-                </a:tc>
-                <a:tc>
-                  <a:txBody>
-                    <a:bodyPr wrap="square"/>
-                    <a:lstStyle/>
-                    <a:p>
-                      <a:r>
-                        <a:rPr sz="1300" b="0">
-                          <a:solidFill>
-                            <a:srgbClr val="212121"/>
-                          </a:solidFill>
-                          <a:latin typeface="Calibri"/>
-                        </a:rPr>
-                        <a:t>Manual entry, no emissions, no fault detection</a:t>
-                      </a:r>
-                    </a:p>
-                  </a:txBody>
-                  <a:tcPr marL="82296" marR="82296" marT="45720" marB="45720" anchor="ctr">
-                    <a:solidFill>
-                      <a:srgbClr val="FFFFFF"/>
-                    </a:solidFill>
-                  </a:tcPr>
-                </a:tc>
-                <a:tc>
-                  <a:txBody>
-                    <a:bodyPr wrap="square"/>
-                    <a:lstStyle/>
-                    <a:p>
-                      <a:r>
-                        <a:rPr sz="1300" b="1">
-                          <a:solidFill>
-                            <a:srgbClr val="1B5E20"/>
-                          </a:solidFill>
-                          <a:latin typeface="Calibri"/>
-                        </a:rPr>
-                        <a:t>Fully automatic trip capture with CO2 estimates and anomaly alerts</a:t>
-                      </a:r>
-                    </a:p>
-                  </a:txBody>
-                  <a:tcPr marL="82296" marR="82296" marT="45720" marB="45720" anchor="ctr">
-                    <a:solidFill>
-                      <a:srgbClr val="F1F8E9"/>
-                    </a:solidFill>
-                  </a:tcPr>
-                </a:tc>
-              </a:tr>
-            </a:tbl>
-          </a:graphicData>
-        </a:graphic>
-      </p:graphicFrame>
-    </p:spTree>
-  </p:cSld>
-  <p:clrMapOvr>
-    <a:masterClrMapping/>
-  </p:clrMapOvr>
-</p:sld>
-</file>
-
-<file path=ppt/slides/slide5.xml><?xml version="1.0" encoding="utf-8"?>
-<p:sld xmlns:a="http://schemas.openxmlformats.org/drawingml/2006/main" xmlns:p="http://schemas.openxmlformats.org/presentationml/2006/main" xmlns:r="http://schemas.openxmlformats.org/officeDocument/2006/relationships">
-  <p:cSld>
-    <p:spTree>
-      <p:nvGrpSpPr>
-        <p:cNvPr id="1" name=""/>
-        <p:cNvGrpSpPr/>
-        <p:nvPr/>
-      </p:nvGrpSpPr>
-      <p:grpSpPr/>
-      <p:sp>
-        <p:nvSpPr>
-          <p:cNvPr id="2" name="Rectangle 1"/>
-          <p:cNvSpPr/>
-          <p:nvPr/>
-        </p:nvSpPr>
-        <p:spPr>
-          <a:xfrm>
-            <a:off x="0" y="0"/>
-            <a:ext cx="12191695" cy="914400"/>
-          </a:xfrm>
-          <a:prstGeom prst="rect">
-            <a:avLst/>
-          </a:prstGeom>
-          <a:solidFill>
-            <a:srgbClr val="1B5E20"/>
-          </a:solidFill>
-          <a:ln>
-            <a:noFill/>
-          </a:ln>
-          <a:effectLst/>
-        </p:spPr>
-        <p:style>
-          <a:lnRef idx="1">
-            <a:schemeClr val="accent1"/>
-          </a:lnRef>
-          <a:fillRef idx="3">
-            <a:schemeClr val="accent1"/>
-          </a:fillRef>
-          <a:effectRef idx="2">
-            <a:schemeClr val="accent1"/>
-          </a:effectRef>
-          <a:fontRef idx="minor">
-            <a:schemeClr val="lt1"/>
-          </a:fontRef>
-        </p:style>
-        <p:txBody>
-          <a:bodyPr rtlCol="0" anchor="ctr"/>
-          <a:lstStyle/>
-          <a:p>
-            <a:pPr algn="ctr"/>
-          </a:p>
-        </p:txBody>
-      </p:sp>
-      <p:sp>
-        <p:nvSpPr>
-          <p:cNvPr id="3" name="TextBox 2"/>
-          <p:cNvSpPr txBox="1"/>
-          <p:nvPr/>
-        </p:nvSpPr>
-        <p:spPr>
-          <a:xfrm>
-            <a:off x="502920" y="118872"/>
-            <a:ext cx="11185855" cy="685800"/>
-          </a:xfrm>
-          <a:prstGeom prst="rect">
-            <a:avLst/>
-          </a:prstGeom>
-          <a:noFill/>
-        </p:spPr>
-        <p:txBody>
-          <a:bodyPr wrap="square" anchor="ctr">
-            <a:spAutoFit/>
-          </a:bodyPr>
-          <a:lstStyle/>
-          <a:p>
-            <a:pPr algn="l">
-              <a:lnSpc>
-                <a:spcPct val="100000"/>
-              </a:lnSpc>
-            </a:pPr>
-            <a:r>
-              <a:rPr sz="3000" b="1">
-                <a:solidFill>
-                  <a:srgbClr val="FFFFFF"/>
-                </a:solidFill>
-                <a:latin typeface="Calibri"/>
-              </a:rPr>
-              <a:t>Features We Offer</a:t>
-            </a:r>
-          </a:p>
-        </p:txBody>
-      </p:sp>
-      <p:sp>
-        <p:nvSpPr>
-          <p:cNvPr id="4" name="Rectangle 3"/>
-          <p:cNvSpPr/>
-          <p:nvPr/>
-        </p:nvSpPr>
-        <p:spPr>
-          <a:xfrm>
-            <a:off x="0" y="914400"/>
-            <a:ext cx="12191695" cy="54864"/>
-          </a:xfrm>
-          <a:prstGeom prst="rect">
-            <a:avLst/>
-          </a:prstGeom>
-          <a:solidFill>
-            <a:srgbClr val="F9A825"/>
-          </a:solidFill>
-          <a:ln>
-            <a:noFill/>
-          </a:ln>
-          <a:effectLst/>
-        </p:spPr>
-        <p:style>
-          <a:lnRef idx="1">
-            <a:schemeClr val="accent1"/>
-          </a:lnRef>
-          <a:fillRef idx="3">
-            <a:schemeClr val="accent1"/>
-          </a:fillRef>
-          <a:effectRef idx="2">
-            <a:schemeClr val="accent1"/>
-          </a:effectRef>
-          <a:fontRef idx="minor">
-            <a:schemeClr val="lt1"/>
-          </a:fontRef>
-        </p:style>
-        <p:txBody>
-          <a:bodyPr rtlCol="0" anchor="ctr"/>
-          <a:lstStyle/>
-          <a:p>
-            <a:pPr algn="ctr"/>
-          </a:p>
-        </p:txBody>
-      </p:sp>
-      <p:sp>
-        <p:nvSpPr>
-          <p:cNvPr id="5" name="TextBox 4"/>
-          <p:cNvSpPr txBox="1"/>
-          <p:nvPr/>
-        </p:nvSpPr>
-        <p:spPr>
-          <a:xfrm>
-            <a:off x="502920" y="1325880"/>
-            <a:ext cx="5486400" cy="5120640"/>
-          </a:xfrm>
-          <a:prstGeom prst="rect">
-            <a:avLst/>
-          </a:prstGeom>
-          <a:noFill/>
-        </p:spPr>
-        <p:txBody>
-          <a:bodyPr wrap="square">
-            <a:spAutoFit/>
-          </a:bodyPr>
-          <a:lstStyle/>
-          <a:p>
-            <a:pPr>
-              <a:lnSpc>
-                <a:spcPct val="108000"/>
-              </a:lnSpc>
-              <a:spcAft>
-                <a:spcPts val="1400"/>
-              </a:spcAft>
-            </a:pPr>
-            <a:r>
-              <a:rPr sz="1600" b="1">
-                <a:solidFill>
-                  <a:srgbClr val="43A047"/>
-                </a:solidFill>
-                <a:latin typeface="Calibri"/>
-              </a:rPr>
-              <a:t>▸ </a:t>
-            </a:r>
-            <a:r>
-              <a:rPr sz="1600" b="1">
-                <a:solidFill>
-                  <a:srgbClr val="212121"/>
-                </a:solidFill>
-                <a:latin typeface="Calibri"/>
-              </a:rPr>
-              <a:t>Auto-start with the car</a:t>
-            </a:r>
-            <a:r>
-              <a:rPr sz="1600">
-                <a:solidFill>
-                  <a:srgbClr val="212121"/>
-                </a:solidFill>
-                <a:latin typeface="Calibri"/>
-              </a:rPr>
-              <a:t> — app wakes on car Bluetooth connection or driving motion and records the trip hands-free.</a:t>
-            </a:r>
-          </a:p>
-          <a:p>
-            <a:pPr>
-              <a:lnSpc>
-                <a:spcPct val="108000"/>
-              </a:lnSpc>
-              <a:spcAft>
-                <a:spcPts val="1400"/>
-              </a:spcAft>
-            </a:pPr>
-            <a:r>
-              <a:rPr sz="1600" b="1">
-                <a:solidFill>
-                  <a:srgbClr val="43A047"/>
-                </a:solidFill>
-                <a:latin typeface="Calibri"/>
-              </a:rPr>
-              <a:t>▸ </a:t>
-            </a:r>
-            <a:r>
-              <a:rPr sz="1600" b="1">
-                <a:solidFill>
-                  <a:srgbClr val="212121"/>
-                </a:solidFill>
-                <a:latin typeface="Calibri"/>
-              </a:rPr>
-              <a:t>Continuous CO2 records</a:t>
-            </a:r>
-            <a:r>
-              <a:rPr sz="1600">
-                <a:solidFill>
-                  <a:srgbClr val="212121"/>
-                </a:solidFill>
-                <a:latin typeface="Calibri"/>
-              </a:rPr>
-              <a:t> — every trip logged with estimated CO2, distance and g/km - stored offline first, synced to the cloud.</a:t>
-            </a:r>
-          </a:p>
-          <a:p>
-            <a:pPr>
-              <a:lnSpc>
-                <a:spcPct val="108000"/>
-              </a:lnSpc>
-              <a:spcAft>
-                <a:spcPts val="1400"/>
-              </a:spcAft>
-            </a:pPr>
-            <a:r>
-              <a:rPr sz="1600" b="1">
-                <a:solidFill>
-                  <a:srgbClr val="43A047"/>
-                </a:solidFill>
-                <a:latin typeface="Calibri"/>
-              </a:rPr>
-              <a:t>▸ </a:t>
-            </a:r>
-            <a:r>
-              <a:rPr sz="1600" b="1">
-                <a:solidFill>
-                  <a:srgbClr val="212121"/>
-                </a:solidFill>
-                <a:latin typeface="Calibri"/>
-              </a:rPr>
-              <a:t>Emission trends</a:t>
-            </a:r>
-            <a:r>
-              <a:rPr sz="1600">
-                <a:solidFill>
-                  <a:srgbClr val="212121"/>
-                </a:solidFill>
-                <a:latin typeface="Calibri"/>
-              </a:rPr>
-              <a:t> — daily, weekly and monthly CO2 totals with the car's g/km curve over time.</a:t>
-            </a:r>
-          </a:p>
-          <a:p>
-            <a:pPr>
-              <a:lnSpc>
-                <a:spcPct val="108000"/>
-              </a:lnSpc>
-              <a:spcAft>
-                <a:spcPts val="1400"/>
-              </a:spcAft>
-            </a:pPr>
-            <a:r>
-              <a:rPr sz="1600" b="1">
-                <a:solidFill>
-                  <a:srgbClr val="43A047"/>
-                </a:solidFill>
-                <a:latin typeface="Calibri"/>
-              </a:rPr>
-              <a:t>▸ </a:t>
-            </a:r>
-            <a:r>
-              <a:rPr sz="1600" b="1">
-                <a:solidFill>
-                  <a:srgbClr val="212121"/>
-                </a:solidFill>
-                <a:latin typeface="Calibri"/>
-              </a:rPr>
-              <a:t>Abnormal-emission alerts</a:t>
-            </a:r>
-            <a:r>
-              <a:rPr sz="1600">
-                <a:solidFill>
-                  <a:srgbClr val="212121"/>
-                </a:solidFill>
-                <a:latin typeface="Calibri"/>
-              </a:rPr>
-              <a:t> — drift above the car's own baseline triggers a 'service recommended' notification with the estimated rise.</a:t>
-            </a:r>
-          </a:p>
-        </p:txBody>
-      </p:sp>
-      <p:sp>
-        <p:nvSpPr>
-          <p:cNvPr id="6" name="TextBox 5"/>
-          <p:cNvSpPr txBox="1"/>
-          <p:nvPr/>
-        </p:nvSpPr>
-        <p:spPr>
-          <a:xfrm>
-            <a:off x="6355080" y="1325880"/>
-            <a:ext cx="5486400" cy="5120640"/>
-          </a:xfrm>
-          <a:prstGeom prst="rect">
-            <a:avLst/>
-          </a:prstGeom>
-          <a:noFill/>
-        </p:spPr>
-        <p:txBody>
-          <a:bodyPr wrap="square">
-            <a:spAutoFit/>
-          </a:bodyPr>
-          <a:lstStyle/>
-          <a:p>
-            <a:pPr>
-              <a:lnSpc>
-                <a:spcPct val="108000"/>
-              </a:lnSpc>
-              <a:spcAft>
-                <a:spcPts val="1400"/>
-              </a:spcAft>
-            </a:pPr>
-            <a:r>
-              <a:rPr sz="1600" b="1">
-                <a:solidFill>
-                  <a:srgbClr val="43A047"/>
-                </a:solidFill>
-                <a:latin typeface="Calibri"/>
-              </a:rPr>
-              <a:t>▸ </a:t>
-            </a:r>
-            <a:r>
-              <a:rPr sz="1600" b="1">
-                <a:solidFill>
-                  <a:srgbClr val="212121"/>
-                </a:solidFill>
-                <a:latin typeface="Calibri"/>
-              </a:rPr>
-              <a:t>PUC failure prediction</a:t>
-            </a:r>
-            <a:r>
-              <a:rPr sz="1600">
-                <a:solidFill>
-                  <a:srgbClr val="212121"/>
-                </a:solidFill>
-                <a:latin typeface="Calibri"/>
-              </a:rPr>
-              <a:t> — 'know before you fail' - a risk score for the next emission test so servicing happens first.</a:t>
-            </a:r>
-          </a:p>
-          <a:p>
-            <a:pPr>
-              <a:lnSpc>
-                <a:spcPct val="108000"/>
-              </a:lnSpc>
-              <a:spcAft>
-                <a:spcPts val="1400"/>
-              </a:spcAft>
-            </a:pPr>
-            <a:r>
-              <a:rPr sz="1600" b="1">
-                <a:solidFill>
-                  <a:srgbClr val="43A047"/>
-                </a:solidFill>
-                <a:latin typeface="Calibri"/>
-              </a:rPr>
-              <a:t>▸ </a:t>
-            </a:r>
-            <a:r>
-              <a:rPr sz="1600" b="1">
-                <a:solidFill>
-                  <a:srgbClr val="212121"/>
-                </a:solidFill>
-                <a:latin typeface="Calibri"/>
-              </a:rPr>
-              <a:t>Driving-style insights</a:t>
-            </a:r>
-            <a:r>
-              <a:rPr sz="1600">
-                <a:solidFill>
-                  <a:srgbClr val="212121"/>
-                </a:solidFill>
-                <a:latin typeface="Calibri"/>
-              </a:rPr>
-              <a:t> — idling, harsh acceleration and speed patterns that raise emissions, with tips to cut them.</a:t>
-            </a:r>
-          </a:p>
-          <a:p>
-            <a:pPr>
-              <a:lnSpc>
-                <a:spcPct val="108000"/>
-              </a:lnSpc>
-              <a:spcAft>
-                <a:spcPts val="1400"/>
-              </a:spcAft>
-            </a:pPr>
-            <a:r>
-              <a:rPr sz="1600" b="1">
-                <a:solidFill>
-                  <a:srgbClr val="43A047"/>
-                </a:solidFill>
-                <a:latin typeface="Calibri"/>
-              </a:rPr>
-              <a:t>▸ </a:t>
-            </a:r>
-            <a:r>
-              <a:rPr sz="1600" b="1">
-                <a:solidFill>
-                  <a:srgbClr val="212121"/>
-                </a:solidFill>
-                <a:latin typeface="Calibri"/>
-              </a:rPr>
-              <a:t>Works on any car</a:t>
-            </a:r>
-            <a:r>
-              <a:rPr sz="1600">
-                <a:solidFill>
-                  <a:srgbClr val="212121"/>
-                </a:solidFill>
-                <a:latin typeface="Calibri"/>
-              </a:rPr>
-              <a:t> — no hardware and no brand lock-in; optional connected-car link sharpens accuracy on newer cars.</a:t>
-            </a:r>
-          </a:p>
-          <a:p>
-            <a:pPr>
-              <a:lnSpc>
-                <a:spcPct val="108000"/>
-              </a:lnSpc>
-              <a:spcAft>
-                <a:spcPts val="1400"/>
-              </a:spcAft>
-            </a:pPr>
-            <a:r>
-              <a:rPr sz="1600" b="1">
-                <a:solidFill>
-                  <a:srgbClr val="43A047"/>
-                </a:solidFill>
-                <a:latin typeface="Calibri"/>
-              </a:rPr>
-              <a:t>▸ </a:t>
-            </a:r>
-            <a:r>
-              <a:rPr sz="1600" b="1">
-                <a:solidFill>
-                  <a:srgbClr val="212121"/>
-                </a:solidFill>
-                <a:latin typeface="Calibri"/>
-              </a:rPr>
-              <a:t>Fleet view for MSMEs</a:t>
-            </a:r>
-            <a:r>
-              <a:rPr sz="1600">
-                <a:solidFill>
-                  <a:srgbClr val="212121"/>
-                </a:solidFill>
-                <a:latin typeface="Calibri"/>
-              </a:rPr>
-              <a:t> — small businesses see emissions and service alerts across all their vehicles in one dashboard.</a:t>
-            </a:r>
-          </a:p>
-        </p:txBody>
-      </p:sp>
-    </p:spTree>
-  </p:cSld>
-  <p:clrMapOvr>
-    <a:masterClrMapping/>
-  </p:clrMapOvr>
-</p:sld>
-</file>
-
-<file path=ppt/slides/slide6.xml><?xml version="1.0" encoding="utf-8"?>
-<p:sld xmlns:a="http://schemas.openxmlformats.org/drawingml/2006/main" xmlns:p="http://schemas.openxmlformats.org/presentationml/2006/main" xmlns:r="http://schemas.openxmlformats.org/officeDocument/2006/relationships">
-  <p:cSld>
-    <p:spTree>
-      <p:nvGrpSpPr>
-        <p:cNvPr id="1" name=""/>
-        <p:cNvGrpSpPr/>
-        <p:nvPr/>
-      </p:nvGrpSpPr>
-      <p:grpSpPr/>
-      <p:sp>
-        <p:nvSpPr>
-          <p:cNvPr id="2" name="Rectangle 1"/>
-          <p:cNvSpPr/>
-          <p:nvPr/>
-        </p:nvSpPr>
-        <p:spPr>
-          <a:xfrm>
-            <a:off x="0" y="0"/>
-            <a:ext cx="12191695" cy="914400"/>
-          </a:xfrm>
-          <a:prstGeom prst="rect">
-            <a:avLst/>
-          </a:prstGeom>
-          <a:solidFill>
-            <a:srgbClr val="1B5E20"/>
-          </a:solidFill>
-          <a:ln>
-            <a:noFill/>
-          </a:ln>
-          <a:effectLst/>
-        </p:spPr>
-        <p:style>
-          <a:lnRef idx="1">
-            <a:schemeClr val="accent1"/>
-          </a:lnRef>
-          <a:fillRef idx="3">
-            <a:schemeClr val="accent1"/>
-          </a:fillRef>
-          <a:effectRef idx="2">
-            <a:schemeClr val="accent1"/>
-          </a:effectRef>
-          <a:fontRef idx="minor">
-            <a:schemeClr val="lt1"/>
-          </a:fontRef>
-        </p:style>
-        <p:txBody>
-          <a:bodyPr rtlCol="0" anchor="ctr"/>
-          <a:lstStyle/>
-          <a:p>
-            <a:pPr algn="ctr"/>
-          </a:p>
-        </p:txBody>
-      </p:sp>
-      <p:sp>
-        <p:nvSpPr>
-          <p:cNvPr id="3" name="TextBox 2"/>
-          <p:cNvSpPr txBox="1"/>
-          <p:nvPr/>
-        </p:nvSpPr>
-        <p:spPr>
-          <a:xfrm>
-            <a:off x="502920" y="118872"/>
-            <a:ext cx="11185855" cy="685800"/>
-          </a:xfrm>
-          <a:prstGeom prst="rect">
-            <a:avLst/>
-          </a:prstGeom>
-          <a:noFill/>
-        </p:spPr>
-        <p:txBody>
-          <a:bodyPr wrap="square" anchor="ctr">
-            <a:spAutoFit/>
-          </a:bodyPr>
-          <a:lstStyle/>
-          <a:p>
-            <a:pPr algn="l">
-              <a:lnSpc>
-                <a:spcPct val="100000"/>
-              </a:lnSpc>
-            </a:pPr>
-            <a:r>
-              <a:rPr sz="3000" b="1">
-                <a:solidFill>
-                  <a:srgbClr val="FFFFFF"/>
-                </a:solidFill>
-                <a:latin typeface="Calibri"/>
-              </a:rPr>
-              <a:t>Feasibility</a:t>
-            </a:r>
-          </a:p>
-        </p:txBody>
-      </p:sp>
-      <p:sp>
-        <p:nvSpPr>
-          <p:cNvPr id="4" name="Rectangle 3"/>
-          <p:cNvSpPr/>
-          <p:nvPr/>
-        </p:nvSpPr>
-        <p:spPr>
-          <a:xfrm>
-            <a:off x="0" y="914400"/>
-            <a:ext cx="12191695" cy="54864"/>
-          </a:xfrm>
-          <a:prstGeom prst="rect">
-            <a:avLst/>
-          </a:prstGeom>
-          <a:solidFill>
-            <a:srgbClr val="F9A825"/>
-          </a:solidFill>
-          <a:ln>
-            <a:noFill/>
-          </a:ln>
-          <a:effectLst/>
-        </p:spPr>
-        <p:style>
-          <a:lnRef idx="1">
-            <a:schemeClr val="accent1"/>
-          </a:lnRef>
-          <a:fillRef idx="3">
-            <a:schemeClr val="accent1"/>
-          </a:fillRef>
-          <a:effectRef idx="2">
-            <a:schemeClr val="accent1"/>
-          </a:effectRef>
-          <a:fontRef idx="minor">
-            <a:schemeClr val="lt1"/>
-          </a:fontRef>
-        </p:style>
-        <p:txBody>
-          <a:bodyPr rtlCol="0" anchor="ctr"/>
-          <a:lstStyle/>
-          <a:p>
-            <a:pPr algn="ctr"/>
-          </a:p>
-        </p:txBody>
-      </p:sp>
-      <p:sp>
-        <p:nvSpPr>
-          <p:cNvPr id="5" name="Rounded Rectangle 4"/>
-          <p:cNvSpPr/>
-          <p:nvPr/>
-        </p:nvSpPr>
-        <p:spPr>
-          <a:xfrm>
-            <a:off x="411480" y="1234440"/>
-            <a:ext cx="3703320" cy="502920"/>
-          </a:xfrm>
-          <a:prstGeom prst="roundRect">
-            <a:avLst/>
-          </a:prstGeom>
-          <a:solidFill>
-            <a:srgbClr val="43A047"/>
-          </a:solidFill>
-          <a:ln>
-            <a:noFill/>
-          </a:ln>
-          <a:effectLst/>
-        </p:spPr>
-        <p:style>
-          <a:lnRef idx="1">
-            <a:schemeClr val="accent1"/>
-          </a:lnRef>
-          <a:fillRef idx="3">
-            <a:schemeClr val="accent1"/>
-          </a:fillRef>
-          <a:effectRef idx="2">
-            <a:schemeClr val="accent1"/>
-          </a:effectRef>
-          <a:fontRef idx="minor">
-            <a:schemeClr val="lt1"/>
-          </a:fontRef>
-        </p:style>
-        <p:txBody>
-          <a:bodyPr rtlCol="0" anchor="ctr"/>
-          <a:lstStyle/>
-          <a:p>
-            <a:pPr algn="ctr"/>
-          </a:p>
-        </p:txBody>
-      </p:sp>
-      <p:sp>
-        <p:nvSpPr>
-          <p:cNvPr id="6" name="TextBox 5"/>
-          <p:cNvSpPr txBox="1"/>
-          <p:nvPr/>
-        </p:nvSpPr>
-        <p:spPr>
-          <a:xfrm>
-            <a:off x="411480" y="1289304"/>
-            <a:ext cx="3703320" cy="411480"/>
-          </a:xfrm>
-          <a:prstGeom prst="rect">
-            <a:avLst/>
-          </a:prstGeom>
-          <a:noFill/>
-        </p:spPr>
-        <p:txBody>
-          <a:bodyPr wrap="square" anchor="t">
-            <a:spAutoFit/>
-          </a:bodyPr>
-          <a:lstStyle/>
-          <a:p>
-            <a:pPr algn="ctr">
-              <a:lnSpc>
-                <a:spcPct val="100000"/>
-              </a:lnSpc>
-            </a:pPr>
-            <a:r>
-              <a:rPr sz="1800" b="1">
-                <a:solidFill>
-                  <a:srgbClr val="FFFFFF"/>
-                </a:solidFill>
-                <a:latin typeface="Calibri"/>
-              </a:rPr>
-              <a:t>Technical</a:t>
-            </a:r>
-          </a:p>
-        </p:txBody>
-      </p:sp>
-      <p:sp>
-        <p:nvSpPr>
-          <p:cNvPr id="7" name="Rounded Rectangle 6"/>
-          <p:cNvSpPr/>
-          <p:nvPr/>
-        </p:nvSpPr>
-        <p:spPr>
-          <a:xfrm>
-            <a:off x="411480" y="1828800"/>
-            <a:ext cx="3703320" cy="4480560"/>
-          </a:xfrm>
-          <a:prstGeom prst="roundRect">
-            <a:avLst/>
-          </a:prstGeom>
-          <a:solidFill>
-            <a:srgbClr val="F1F8E9"/>
-          </a:solidFill>
-          <a:ln w="12700">
-            <a:solidFill>
-              <a:srgbClr val="43A047"/>
-            </a:solidFill>
-          </a:ln>
-          <a:effectLst/>
-        </p:spPr>
-        <p:style>
-          <a:lnRef idx="1">
-            <a:schemeClr val="accent1"/>
-          </a:lnRef>
-          <a:fillRef idx="3">
-            <a:schemeClr val="accent1"/>
-          </a:fillRef>
-          <a:effectRef idx="2">
-            <a:schemeClr val="accent1"/>
-          </a:effectRef>
-          <a:fontRef idx="minor">
-            <a:schemeClr val="lt1"/>
-          </a:fontRef>
-        </p:style>
-        <p:txBody>
-          <a:bodyPr rtlCol="0" anchor="ctr"/>
-          <a:lstStyle/>
-          <a:p>
-            <a:pPr algn="ctr"/>
-          </a:p>
-        </p:txBody>
-      </p:sp>
-      <p:sp>
-        <p:nvSpPr>
-          <p:cNvPr id="8" name="TextBox 7"/>
-          <p:cNvSpPr txBox="1"/>
-          <p:nvPr/>
-        </p:nvSpPr>
-        <p:spPr>
-          <a:xfrm>
-            <a:off x="576072" y="2011680"/>
-            <a:ext cx="3374136" cy="4114800"/>
-          </a:xfrm>
-          <a:prstGeom prst="rect">
-            <a:avLst/>
-          </a:prstGeom>
-          <a:noFill/>
-        </p:spPr>
-        <p:txBody>
-          <a:bodyPr wrap="square">
-            <a:spAutoFit/>
-          </a:bodyPr>
-          <a:lstStyle/>
-          <a:p>
-            <a:pPr>
-              <a:lnSpc>
-                <a:spcPct val="108000"/>
-              </a:lnSpc>
-              <a:spcAft>
-                <a:spcPts val="1000"/>
-              </a:spcAft>
-            </a:pPr>
-            <a:r>
-              <a:rPr sz="1350" b="1">
-                <a:solidFill>
-                  <a:srgbClr val="43A047"/>
-                </a:solidFill>
-                <a:latin typeface="Calibri"/>
-              </a:rPr>
-              <a:t>▸ </a:t>
-            </a:r>
-            <a:r>
-              <a:rPr sz="1350" b="1">
-                <a:solidFill>
-                  <a:srgbClr val="212121"/>
-                </a:solidFill>
-                <a:latin typeface="Calibri"/>
-              </a:rPr>
-              <a:t>Built on proven, public building blocks: Bluetooth and activity-recognition triggers, phone GPS, and standard emission models (BS6 norms, COPERT / EPA factors).</a:t>
-            </a:r>
-          </a:p>
-          <a:p>
-            <a:pPr>
-              <a:lnSpc>
-                <a:spcPct val="108000"/>
-              </a:lnSpc>
-              <a:spcAft>
-                <a:spcPts val="1000"/>
-              </a:spcAft>
-            </a:pPr>
-            <a:r>
-              <a:rPr sz="1350" b="1">
-                <a:solidFill>
-                  <a:srgbClr val="43A047"/>
-                </a:solidFill>
-                <a:latin typeface="Calibri"/>
-              </a:rPr>
-              <a:t>▸ </a:t>
-            </a:r>
-            <a:r>
-              <a:rPr sz="1350" b="1">
-                <a:solidFill>
-                  <a:srgbClr val="212121"/>
-                </a:solidFill>
-                <a:latin typeface="Calibri"/>
-              </a:rPr>
-              <a:t>Stack: Flutter app (Android-first), FastAPI backend, cloud database - all free, mature tools.</a:t>
-            </a:r>
-          </a:p>
-          <a:p>
-            <a:pPr>
-              <a:lnSpc>
-                <a:spcPct val="108000"/>
-              </a:lnSpc>
-              <a:spcAft>
-                <a:spcPts val="1000"/>
-              </a:spcAft>
-            </a:pPr>
-            <a:r>
-              <a:rPr sz="1350" b="1">
-                <a:solidFill>
-                  <a:srgbClr val="43A047"/>
-                </a:solidFill>
-                <a:latin typeface="Calibri"/>
-              </a:rPr>
-              <a:t>▸ </a:t>
-            </a:r>
-            <a:r>
-              <a:rPr sz="1350" b="1">
-                <a:solidFill>
-                  <a:srgbClr val="212121"/>
-                </a:solidFill>
-                <a:latin typeface="Calibri"/>
-              </a:rPr>
-              <a:t>Accuracy: estimates, not certified readings - but trend and drift detection is reliable because every car is compared with its own baseline.</a:t>
-            </a:r>
-          </a:p>
-        </p:txBody>
-      </p:sp>
-      <p:sp>
-        <p:nvSpPr>
-          <p:cNvPr id="9" name="Rounded Rectangle 8"/>
-          <p:cNvSpPr/>
-          <p:nvPr/>
-        </p:nvSpPr>
-        <p:spPr>
-          <a:xfrm>
-            <a:off x="4251960" y="1234440"/>
-            <a:ext cx="3703320" cy="502920"/>
-          </a:xfrm>
-          <a:prstGeom prst="roundRect">
-            <a:avLst/>
-          </a:prstGeom>
-          <a:solidFill>
-            <a:srgbClr val="43A047"/>
-          </a:solidFill>
-          <a:ln>
-            <a:noFill/>
-          </a:ln>
-          <a:effectLst/>
-        </p:spPr>
-        <p:style>
-          <a:lnRef idx="1">
-            <a:schemeClr val="accent1"/>
-          </a:lnRef>
-          <a:fillRef idx="3">
-            <a:schemeClr val="accent1"/>
-          </a:fillRef>
-          <a:effectRef idx="2">
-            <a:schemeClr val="accent1"/>
-          </a:effectRef>
-          <a:fontRef idx="minor">
-            <a:schemeClr val="lt1"/>
-          </a:fontRef>
-        </p:style>
-        <p:txBody>
-          <a:bodyPr rtlCol="0" anchor="ctr"/>
-          <a:lstStyle/>
-          <a:p>
-            <a:pPr algn="ctr"/>
-          </a:p>
-        </p:txBody>
-      </p:sp>
-      <p:sp>
-        <p:nvSpPr>
-          <p:cNvPr id="10" name="TextBox 9"/>
-          <p:cNvSpPr txBox="1"/>
-          <p:nvPr/>
-        </p:nvSpPr>
-        <p:spPr>
-          <a:xfrm>
-            <a:off x="4251960" y="1289304"/>
-            <a:ext cx="3703320" cy="411480"/>
-          </a:xfrm>
-          <a:prstGeom prst="rect">
-            <a:avLst/>
-          </a:prstGeom>
-          <a:noFill/>
-        </p:spPr>
-        <p:txBody>
-          <a:bodyPr wrap="square" anchor="t">
-            <a:spAutoFit/>
-          </a:bodyPr>
-          <a:lstStyle/>
-          <a:p>
-            <a:pPr algn="ctr">
-              <a:lnSpc>
-                <a:spcPct val="100000"/>
-              </a:lnSpc>
-            </a:pPr>
-            <a:r>
-              <a:rPr sz="1800" b="1">
-                <a:solidFill>
-                  <a:srgbClr val="FFFFFF"/>
-                </a:solidFill>
-                <a:latin typeface="Calibri"/>
-              </a:rPr>
-              <a:t>Economic</a:t>
-            </a:r>
-          </a:p>
-        </p:txBody>
-      </p:sp>
-      <p:sp>
-        <p:nvSpPr>
-          <p:cNvPr id="11" name="Rounded Rectangle 10"/>
-          <p:cNvSpPr/>
-          <p:nvPr/>
-        </p:nvSpPr>
-        <p:spPr>
-          <a:xfrm>
-            <a:off x="4251960" y="1828800"/>
-            <a:ext cx="3703320" cy="4480560"/>
-          </a:xfrm>
-          <a:prstGeom prst="roundRect">
-            <a:avLst/>
-          </a:prstGeom>
-          <a:solidFill>
-            <a:srgbClr val="F1F8E9"/>
-          </a:solidFill>
-          <a:ln w="12700">
-            <a:solidFill>
-              <a:srgbClr val="43A047"/>
-            </a:solidFill>
-          </a:ln>
-          <a:effectLst/>
-        </p:spPr>
-        <p:style>
-          <a:lnRef idx="1">
-            <a:schemeClr val="accent1"/>
-          </a:lnRef>
-          <a:fillRef idx="3">
-            <a:schemeClr val="accent1"/>
-          </a:fillRef>
-          <a:effectRef idx="2">
-            <a:schemeClr val="accent1"/>
-          </a:effectRef>
-          <a:fontRef idx="minor">
-            <a:schemeClr val="lt1"/>
-          </a:fontRef>
-        </p:style>
-        <p:txBody>
-          <a:bodyPr rtlCol="0" anchor="ctr"/>
-          <a:lstStyle/>
-          <a:p>
-            <a:pPr algn="ctr"/>
-          </a:p>
-        </p:txBody>
-      </p:sp>
-      <p:sp>
-        <p:nvSpPr>
-          <p:cNvPr id="12" name="TextBox 11"/>
-          <p:cNvSpPr txBox="1"/>
-          <p:nvPr/>
-        </p:nvSpPr>
-        <p:spPr>
-          <a:xfrm>
-            <a:off x="4416552" y="2011680"/>
-            <a:ext cx="3374136" cy="4114800"/>
-          </a:xfrm>
-          <a:prstGeom prst="rect">
-            <a:avLst/>
-          </a:prstGeom>
-          <a:noFill/>
-        </p:spPr>
-        <p:txBody>
-          <a:bodyPr wrap="square">
-            <a:spAutoFit/>
-          </a:bodyPr>
-          <a:lstStyle/>
-          <a:p>
-            <a:pPr>
-              <a:lnSpc>
-                <a:spcPct val="108000"/>
-              </a:lnSpc>
-              <a:spcAft>
-                <a:spcPts val="1000"/>
-              </a:spcAft>
-            </a:pPr>
-            <a:r>
-              <a:rPr sz="1350" b="1">
-                <a:solidFill>
-                  <a:srgbClr val="43A047"/>
-                </a:solidFill>
-                <a:latin typeface="Calibri"/>
-              </a:rPr>
-              <a:t>▸ </a:t>
-            </a:r>
-            <a:r>
-              <a:rPr sz="1350" b="1">
-                <a:solidFill>
-                  <a:srgbClr val="212121"/>
-                </a:solidFill>
-                <a:latin typeface="Calibri"/>
-              </a:rPr>
-              <a:t>Zero hardware means near-zero marginal cost per user; the entire MVP can be built on free tiers.</a:t>
-            </a:r>
-          </a:p>
-          <a:p>
-            <a:pPr>
-              <a:lnSpc>
-                <a:spcPct val="108000"/>
-              </a:lnSpc>
-              <a:spcAft>
-                <a:spcPts val="1000"/>
-              </a:spcAft>
-            </a:pPr>
-            <a:r>
-              <a:rPr sz="1350" b="1">
-                <a:solidFill>
-                  <a:srgbClr val="43A047"/>
-                </a:solidFill>
-                <a:latin typeface="Calibri"/>
-              </a:rPr>
-              <a:t>▸ </a:t>
-            </a:r>
-            <a:r>
-              <a:rPr sz="1350" b="1">
-                <a:solidFill>
-                  <a:srgbClr val="212121"/>
-                </a:solidFill>
-                <a:latin typeface="Calibri"/>
-              </a:rPr>
-              <a:t>Freemium model: personal use free; premium analytics and MSME fleet dashboards subscription-based.</a:t>
-            </a:r>
-          </a:p>
-          <a:p>
-            <a:pPr>
-              <a:lnSpc>
-                <a:spcPct val="108000"/>
-              </a:lnSpc>
-              <a:spcAft>
-                <a:spcPts val="1000"/>
-              </a:spcAft>
-            </a:pPr>
-            <a:r>
-              <a:rPr sz="1350" b="1">
-                <a:solidFill>
-                  <a:srgbClr val="43A047"/>
-                </a:solidFill>
-                <a:latin typeface="Calibri"/>
-              </a:rPr>
-              <a:t>▸ </a:t>
-            </a:r>
-            <a:r>
-              <a:rPr sz="1350" b="1">
-                <a:solidFill>
-                  <a:srgbClr val="212121"/>
-                </a:solidFill>
-                <a:latin typeface="Calibri"/>
-              </a:rPr>
-              <a:t>No inventory, logistics or servicing costs - pure software scaling.</a:t>
-            </a:r>
-          </a:p>
-        </p:txBody>
-      </p:sp>
-      <p:sp>
-        <p:nvSpPr>
-          <p:cNvPr id="13" name="Rounded Rectangle 12"/>
-          <p:cNvSpPr/>
-          <p:nvPr/>
-        </p:nvSpPr>
-        <p:spPr>
-          <a:xfrm>
-            <a:off x="8092440" y="1234440"/>
-            <a:ext cx="3703320" cy="502920"/>
-          </a:xfrm>
-          <a:prstGeom prst="roundRect">
-            <a:avLst/>
-          </a:prstGeom>
-          <a:solidFill>
-            <a:srgbClr val="43A047"/>
-          </a:solidFill>
-          <a:ln>
-            <a:noFill/>
-          </a:ln>
-          <a:effectLst/>
-        </p:spPr>
-        <p:style>
-          <a:lnRef idx="1">
-            <a:schemeClr val="accent1"/>
-          </a:lnRef>
-          <a:fillRef idx="3">
-            <a:schemeClr val="accent1"/>
-          </a:fillRef>
-          <a:effectRef idx="2">
-            <a:schemeClr val="accent1"/>
-          </a:effectRef>
-          <a:fontRef idx="minor">
-            <a:schemeClr val="lt1"/>
-          </a:fontRef>
-        </p:style>
-        <p:txBody>
-          <a:bodyPr rtlCol="0" anchor="ctr"/>
-          <a:lstStyle/>
-          <a:p>
-            <a:pPr algn="ctr"/>
-          </a:p>
-        </p:txBody>
-      </p:sp>
-      <p:sp>
-        <p:nvSpPr>
-          <p:cNvPr id="14" name="TextBox 13"/>
-          <p:cNvSpPr txBox="1"/>
-          <p:nvPr/>
-        </p:nvSpPr>
-        <p:spPr>
-          <a:xfrm>
-            <a:off x="8092440" y="1289304"/>
-            <a:ext cx="3703320" cy="411480"/>
-          </a:xfrm>
-          <a:prstGeom prst="rect">
-            <a:avLst/>
-          </a:prstGeom>
-          <a:noFill/>
-        </p:spPr>
-        <p:txBody>
-          <a:bodyPr wrap="square" anchor="t">
-            <a:spAutoFit/>
-          </a:bodyPr>
-          <a:lstStyle/>
-          <a:p>
-            <a:pPr algn="ctr">
-              <a:lnSpc>
-                <a:spcPct val="100000"/>
-              </a:lnSpc>
-            </a:pPr>
-            <a:r>
-              <a:rPr sz="1800" b="1">
-                <a:solidFill>
-                  <a:srgbClr val="FFFFFF"/>
-                </a:solidFill>
-                <a:latin typeface="Calibri"/>
-              </a:rPr>
-              <a:t>Market &amp; operational</a:t>
-            </a:r>
-          </a:p>
-        </p:txBody>
-      </p:sp>
-      <p:sp>
-        <p:nvSpPr>
-          <p:cNvPr id="15" name="Rounded Rectangle 14"/>
-          <p:cNvSpPr/>
-          <p:nvPr/>
-        </p:nvSpPr>
-        <p:spPr>
-          <a:xfrm>
-            <a:off x="8092440" y="1828800"/>
-            <a:ext cx="3703320" cy="4480560"/>
-          </a:xfrm>
-          <a:prstGeom prst="roundRect">
-            <a:avLst/>
-          </a:prstGeom>
-          <a:solidFill>
-            <a:srgbClr val="F1F8E9"/>
-          </a:solidFill>
-          <a:ln w="12700">
-            <a:solidFill>
-              <a:srgbClr val="43A047"/>
-            </a:solidFill>
-          </a:ln>
-          <a:effectLst/>
-        </p:spPr>
-        <p:style>
-          <a:lnRef idx="1">
-            <a:schemeClr val="accent1"/>
-          </a:lnRef>
-          <a:fillRef idx="3">
-            <a:schemeClr val="accent1"/>
-          </a:fillRef>
-          <a:effectRef idx="2">
-            <a:schemeClr val="accent1"/>
-          </a:effectRef>
-          <a:fontRef idx="minor">
-            <a:schemeClr val="lt1"/>
-          </a:fontRef>
-        </p:style>
-        <p:txBody>
-          <a:bodyPr rtlCol="0" anchor="ctr"/>
-          <a:lstStyle/>
-          <a:p>
-            <a:pPr algn="ctr"/>
-          </a:p>
-        </p:txBody>
-      </p:sp>
-      <p:sp>
-        <p:nvSpPr>
-          <p:cNvPr id="16" name="TextBox 15"/>
-          <p:cNvSpPr txBox="1"/>
-          <p:nvPr/>
-        </p:nvSpPr>
-        <p:spPr>
-          <a:xfrm>
-            <a:off x="8257032" y="2011680"/>
-            <a:ext cx="3374136" cy="4114800"/>
-          </a:xfrm>
-          <a:prstGeom prst="rect">
-            <a:avLst/>
-          </a:prstGeom>
-          <a:noFill/>
-        </p:spPr>
-        <p:txBody>
-          <a:bodyPr wrap="square">
-            <a:spAutoFit/>
-          </a:bodyPr>
-          <a:lstStyle/>
-          <a:p>
-            <a:pPr>
-              <a:lnSpc>
-                <a:spcPct val="108000"/>
-              </a:lnSpc>
-              <a:spcAft>
-                <a:spcPts val="1000"/>
-              </a:spcAft>
-            </a:pPr>
-            <a:r>
-              <a:rPr sz="1350" b="1">
-                <a:solidFill>
-                  <a:srgbClr val="43A047"/>
-                </a:solidFill>
-                <a:latin typeface="Calibri"/>
-              </a:rPr>
-              <a:t>▸ </a:t>
-            </a:r>
-            <a:r>
-              <a:rPr sz="1350" b="1">
-                <a:solidFill>
-                  <a:srgbClr val="212121"/>
-                </a:solidFill>
-                <a:latin typeface="Calibri"/>
-              </a:rPr>
-              <a:t>India has 30+ crore registered vehicles and PUC certification is legally mandatory - awareness of emissions is universal.</a:t>
-            </a:r>
-          </a:p>
-          <a:p>
-            <a:pPr>
-              <a:lnSpc>
-                <a:spcPct val="108000"/>
-              </a:lnSpc>
-              <a:spcAft>
-                <a:spcPts val="1000"/>
-              </a:spcAft>
-            </a:pPr>
-            <a:r>
-              <a:rPr sz="1350" b="1">
-                <a:solidFill>
-                  <a:srgbClr val="43A047"/>
-                </a:solidFill>
-                <a:latin typeface="Calibri"/>
-              </a:rPr>
-              <a:t>▸ </a:t>
-            </a:r>
-            <a:r>
-              <a:rPr sz="1350" b="1">
-                <a:solidFill>
-                  <a:srgbClr val="212121"/>
-                </a:solidFill>
-                <a:latin typeface="Calibri"/>
-              </a:rPr>
-              <a:t>Onboarding takes minutes: install, pick your car model, pair Bluetooth once.</a:t>
-            </a:r>
-          </a:p>
-          <a:p>
-            <a:pPr>
-              <a:lnSpc>
-                <a:spcPct val="108000"/>
-              </a:lnSpc>
-              <a:spcAft>
-                <a:spcPts val="1000"/>
-              </a:spcAft>
-            </a:pPr>
-            <a:r>
-              <a:rPr sz="1350" b="1">
-                <a:solidFill>
-                  <a:srgbClr val="43A047"/>
-                </a:solidFill>
-                <a:latin typeface="Calibri"/>
-              </a:rPr>
-              <a:t>▸ </a:t>
-            </a:r>
-            <a:r>
-              <a:rPr sz="1350" b="1">
-                <a:solidFill>
-                  <a:srgbClr val="212121"/>
-                </a:solidFill>
-                <a:latin typeface="Calibri"/>
-              </a:rPr>
-              <a:t>MVP is buildable by a small student team within the hackathon timeline.</a:t>
-            </a:r>
-          </a:p>
-        </p:txBody>
-      </p:sp>
-    </p:spTree>
-  </p:cSld>
-  <p:clrMapOvr>
-    <a:masterClrMapping/>
-  </p:clrMapOvr>
-</p:sld>
-</file>
-
-<file path=ppt/slides/slide7.xml><?xml version="1.0" encoding="utf-8"?>
-<p:sld xmlns:a="http://schemas.openxmlformats.org/drawingml/2006/main" xmlns:p="http://schemas.openxmlformats.org/presentationml/2006/main" xmlns:r="http://schemas.openxmlformats.org/officeDocument/2006/relationships">
-  <p:cSld>
-    <p:spTree>
-      <p:nvGrpSpPr>
-        <p:cNvPr id="1" name=""/>
-        <p:cNvGrpSpPr/>
-        <p:nvPr/>
-      </p:nvGrpSpPr>
-      <p:grpSpPr/>
-      <p:sp>
-        <p:nvSpPr>
-          <p:cNvPr id="2" name="Rectangle 1"/>
-          <p:cNvSpPr/>
-          <p:nvPr/>
-        </p:nvSpPr>
-        <p:spPr>
-          <a:xfrm>
-            <a:off x="0" y="0"/>
-            <a:ext cx="12191695" cy="914400"/>
-          </a:xfrm>
-          <a:prstGeom prst="rect">
-            <a:avLst/>
-          </a:prstGeom>
-          <a:solidFill>
-            <a:srgbClr val="1B5E20"/>
-          </a:solidFill>
-          <a:ln>
-            <a:noFill/>
-          </a:ln>
-          <a:effectLst/>
-        </p:spPr>
-        <p:style>
-          <a:lnRef idx="1">
-            <a:schemeClr val="accent1"/>
-          </a:lnRef>
-          <a:fillRef idx="3">
-            <a:schemeClr val="accent1"/>
-          </a:fillRef>
-          <a:effectRef idx="2">
-            <a:schemeClr val="accent1"/>
-          </a:effectRef>
-          <a:fontRef idx="minor">
-            <a:schemeClr val="lt1"/>
-          </a:fontRef>
-        </p:style>
-        <p:txBody>
-          <a:bodyPr rtlCol="0" anchor="ctr"/>
-          <a:lstStyle/>
-          <a:p>
-            <a:pPr algn="ctr"/>
-          </a:p>
-        </p:txBody>
-      </p:sp>
-      <p:sp>
-        <p:nvSpPr>
-          <p:cNvPr id="3" name="TextBox 2"/>
-          <p:cNvSpPr txBox="1"/>
-          <p:nvPr/>
-        </p:nvSpPr>
-        <p:spPr>
-          <a:xfrm>
-            <a:off x="502920" y="118872"/>
-            <a:ext cx="11185855" cy="685800"/>
-          </a:xfrm>
-          <a:prstGeom prst="rect">
-            <a:avLst/>
-          </a:prstGeom>
-          <a:noFill/>
-        </p:spPr>
-        <p:txBody>
-          <a:bodyPr wrap="square" anchor="ctr">
-            <a:spAutoFit/>
-          </a:bodyPr>
-          <a:lstStyle/>
-          <a:p>
-            <a:pPr algn="l">
-              <a:lnSpc>
-                <a:spcPct val="100000"/>
-              </a:lnSpc>
-            </a:pPr>
-            <a:r>
-              <a:rPr sz="3000" b="1">
-                <a:solidFill>
-                  <a:srgbClr val="FFFFFF"/>
-                </a:solidFill>
-                <a:latin typeface="Calibri"/>
-              </a:rPr>
-              <a:t>UN Sustainable Development Goals We Cover</a:t>
-            </a:r>
-          </a:p>
-        </p:txBody>
-      </p:sp>
-      <p:sp>
-        <p:nvSpPr>
-          <p:cNvPr id="4" name="Rectangle 3"/>
-          <p:cNvSpPr/>
-          <p:nvPr/>
-        </p:nvSpPr>
-        <p:spPr>
-          <a:xfrm>
-            <a:off x="0" y="914400"/>
-            <a:ext cx="12191695" cy="54864"/>
-          </a:xfrm>
-          <a:prstGeom prst="rect">
-            <a:avLst/>
-          </a:prstGeom>
-          <a:solidFill>
-            <a:srgbClr val="F9A825"/>
-          </a:solidFill>
-          <a:ln>
-            <a:noFill/>
-          </a:ln>
-          <a:effectLst/>
-        </p:spPr>
-        <p:style>
-          <a:lnRef idx="1">
-            <a:schemeClr val="accent1"/>
-          </a:lnRef>
-          <a:fillRef idx="3">
-            <a:schemeClr val="accent1"/>
-          </a:fillRef>
-          <a:effectRef idx="2">
-            <a:schemeClr val="accent1"/>
-          </a:effectRef>
-          <a:fontRef idx="minor">
-            <a:schemeClr val="lt1"/>
-          </a:fontRef>
-        </p:style>
-        <p:txBody>
-          <a:bodyPr rtlCol="0" anchor="ctr"/>
-          <a:lstStyle/>
-          <a:p>
-            <a:pPr algn="ctr"/>
-          </a:p>
-        </p:txBody>
-      </p:sp>
-      <p:sp>
-        <p:nvSpPr>
-          <p:cNvPr id="5" name="Rounded Rectangle 4"/>
-          <p:cNvSpPr/>
-          <p:nvPr/>
-        </p:nvSpPr>
-        <p:spPr>
-          <a:xfrm>
-            <a:off x="411480" y="1188720"/>
-            <a:ext cx="1234440" cy="932688"/>
-          </a:xfrm>
-          <a:prstGeom prst="roundRect">
-            <a:avLst/>
-          </a:prstGeom>
-          <a:solidFill>
-            <a:srgbClr val="1B5E20"/>
-          </a:solidFill>
-          <a:ln>
-            <a:noFill/>
-          </a:ln>
-          <a:effectLst/>
-        </p:spPr>
-        <p:style>
-          <a:lnRef idx="1">
-            <a:schemeClr val="accent1"/>
-          </a:lnRef>
-          <a:fillRef idx="3">
-            <a:schemeClr val="accent1"/>
-          </a:fillRef>
-          <a:effectRef idx="2">
-            <a:schemeClr val="accent1"/>
-          </a:effectRef>
-          <a:fontRef idx="minor">
-            <a:schemeClr val="lt1"/>
-          </a:fontRef>
-        </p:style>
-        <p:txBody>
-          <a:bodyPr rtlCol="0" anchor="ctr"/>
-          <a:lstStyle/>
-          <a:p>
-            <a:pPr algn="ctr"/>
-          </a:p>
-        </p:txBody>
-      </p:sp>
-      <p:sp>
-        <p:nvSpPr>
-          <p:cNvPr id="6" name="TextBox 5"/>
-          <p:cNvSpPr txBox="1"/>
-          <p:nvPr/>
-        </p:nvSpPr>
-        <p:spPr>
-          <a:xfrm>
-            <a:off x="411480" y="1408176"/>
-            <a:ext cx="1234440" cy="548640"/>
-          </a:xfrm>
-          <a:prstGeom prst="rect">
-            <a:avLst/>
-          </a:prstGeom>
-          <a:noFill/>
-        </p:spPr>
-        <p:txBody>
-          <a:bodyPr wrap="square" anchor="t">
-            <a:spAutoFit/>
-          </a:bodyPr>
-          <a:lstStyle/>
-          <a:p>
-            <a:pPr algn="ctr">
-              <a:lnSpc>
-                <a:spcPct val="100000"/>
-              </a:lnSpc>
-            </a:pPr>
-            <a:r>
-              <a:rPr sz="2000" b="1">
-                <a:solidFill>
-                  <a:srgbClr val="FFFFFF"/>
-                </a:solidFill>
-                <a:latin typeface="Calibri"/>
-              </a:rPr>
-              <a:t>SDG 3</a:t>
-            </a:r>
-          </a:p>
-        </p:txBody>
-      </p:sp>
-      <p:sp>
-        <p:nvSpPr>
-          <p:cNvPr id="7" name="TextBox 6"/>
-          <p:cNvSpPr txBox="1"/>
-          <p:nvPr/>
-        </p:nvSpPr>
-        <p:spPr>
-          <a:xfrm>
-            <a:off x="1828800" y="1207008"/>
-            <a:ext cx="3108960" cy="914400"/>
-          </a:xfrm>
-          <a:prstGeom prst="rect">
-            <a:avLst/>
-          </a:prstGeom>
-          <a:noFill/>
-        </p:spPr>
-        <p:txBody>
-          <a:bodyPr wrap="square" anchor="ctr">
-            <a:spAutoFit/>
-          </a:bodyPr>
-          <a:lstStyle/>
-          <a:p>
-            <a:pPr algn="l">
-              <a:lnSpc>
-                <a:spcPct val="100000"/>
-              </a:lnSpc>
-            </a:pPr>
-            <a:r>
-              <a:rPr sz="1600" b="1">
-                <a:solidFill>
-                  <a:srgbClr val="1B5E20"/>
-                </a:solidFill>
-                <a:latin typeface="Calibri"/>
-              </a:rPr>
-              <a:t>Good Health &amp; Well-Being</a:t>
-            </a:r>
-          </a:p>
-        </p:txBody>
-      </p:sp>
-      <p:sp>
-        <p:nvSpPr>
-          <p:cNvPr id="8" name="TextBox 7"/>
-          <p:cNvSpPr txBox="1"/>
-          <p:nvPr/>
-        </p:nvSpPr>
-        <p:spPr>
-          <a:xfrm>
-            <a:off x="5029200" y="1207008"/>
-            <a:ext cx="6766560" cy="914400"/>
-          </a:xfrm>
-          <a:prstGeom prst="rect">
-            <a:avLst/>
-          </a:prstGeom>
-          <a:noFill/>
-        </p:spPr>
-        <p:txBody>
-          <a:bodyPr wrap="square" anchor="ctr">
-            <a:spAutoFit/>
-          </a:bodyPr>
-          <a:lstStyle/>
-          <a:p>
-            <a:pPr algn="l">
-              <a:lnSpc>
-                <a:spcPct val="105000"/>
-              </a:lnSpc>
-            </a:pPr>
-            <a:r>
-              <a:rPr sz="1350" b="0">
-                <a:solidFill>
-                  <a:srgbClr val="212121"/>
-                </a:solidFill>
-                <a:latin typeface="Calibri"/>
-              </a:rPr>
-              <a:t>Vehicle exhaust is a major source of urban air pollution; fixing high-emitting engines earlier directly cuts the pollutants people breathe.</a:t>
-            </a:r>
-          </a:p>
-        </p:txBody>
-      </p:sp>
-      <p:sp>
-        <p:nvSpPr>
-          <p:cNvPr id="9" name="Rounded Rectangle 8"/>
-          <p:cNvSpPr/>
-          <p:nvPr/>
-        </p:nvSpPr>
-        <p:spPr>
-          <a:xfrm>
-            <a:off x="411480" y="2267712"/>
-            <a:ext cx="1234440" cy="932688"/>
-          </a:xfrm>
-          <a:prstGeom prst="roundRect">
-            <a:avLst/>
-          </a:prstGeom>
-          <a:solidFill>
-            <a:srgbClr val="1B5E20"/>
-          </a:solidFill>
-          <a:ln>
-            <a:noFill/>
-          </a:ln>
-          <a:effectLst/>
-        </p:spPr>
-        <p:style>
-          <a:lnRef idx="1">
-            <a:schemeClr val="accent1"/>
-          </a:lnRef>
-          <a:fillRef idx="3">
-            <a:schemeClr val="accent1"/>
-          </a:fillRef>
-          <a:effectRef idx="2">
-            <a:schemeClr val="accent1"/>
-          </a:effectRef>
-          <a:fontRef idx="minor">
-            <a:schemeClr val="lt1"/>
-          </a:fontRef>
-        </p:style>
-        <p:txBody>
-          <a:bodyPr rtlCol="0" anchor="ctr"/>
-          <a:lstStyle/>
-          <a:p>
-            <a:pPr algn="ctr"/>
-          </a:p>
-        </p:txBody>
-      </p:sp>
-      <p:sp>
-        <p:nvSpPr>
-          <p:cNvPr id="10" name="TextBox 9"/>
-          <p:cNvSpPr txBox="1"/>
-          <p:nvPr/>
-        </p:nvSpPr>
-        <p:spPr>
-          <a:xfrm>
-            <a:off x="411480" y="2487168"/>
-            <a:ext cx="1234440" cy="548640"/>
-          </a:xfrm>
-          <a:prstGeom prst="rect">
-            <a:avLst/>
-          </a:prstGeom>
-          <a:noFill/>
-        </p:spPr>
-        <p:txBody>
-          <a:bodyPr wrap="square" anchor="t">
-            <a:spAutoFit/>
-          </a:bodyPr>
-          <a:lstStyle/>
-          <a:p>
-            <a:pPr algn="ctr">
-              <a:lnSpc>
-                <a:spcPct val="100000"/>
-              </a:lnSpc>
-            </a:pPr>
-            <a:r>
-              <a:rPr sz="2000" b="1">
-                <a:solidFill>
-                  <a:srgbClr val="FFFFFF"/>
-                </a:solidFill>
-                <a:latin typeface="Calibri"/>
-              </a:rPr>
-              <a:t>SDG 9</a:t>
-            </a:r>
-          </a:p>
-        </p:txBody>
-      </p:sp>
-      <p:sp>
-        <p:nvSpPr>
-          <p:cNvPr id="11" name="TextBox 10"/>
-          <p:cNvSpPr txBox="1"/>
-          <p:nvPr/>
-        </p:nvSpPr>
-        <p:spPr>
-          <a:xfrm>
-            <a:off x="1828800" y="2286000"/>
-            <a:ext cx="3108960" cy="914400"/>
-          </a:xfrm>
-          <a:prstGeom prst="rect">
-            <a:avLst/>
-          </a:prstGeom>
-          <a:noFill/>
-        </p:spPr>
-        <p:txBody>
-          <a:bodyPr wrap="square" anchor="ctr">
-            <a:spAutoFit/>
-          </a:bodyPr>
-          <a:lstStyle/>
-          <a:p>
-            <a:pPr algn="l">
-              <a:lnSpc>
-                <a:spcPct val="100000"/>
-              </a:lnSpc>
-            </a:pPr>
-            <a:r>
-              <a:rPr sz="1600" b="1">
-                <a:solidFill>
-                  <a:srgbClr val="1B5E20"/>
-                </a:solidFill>
-                <a:latin typeface="Calibri"/>
-              </a:rPr>
-              <a:t>Industry, Innovation &amp; Infrastructure</a:t>
-            </a:r>
-          </a:p>
-        </p:txBody>
-      </p:sp>
-      <p:sp>
-        <p:nvSpPr>
-          <p:cNvPr id="12" name="TextBox 11"/>
-          <p:cNvSpPr txBox="1"/>
-          <p:nvPr/>
-        </p:nvSpPr>
-        <p:spPr>
-          <a:xfrm>
-            <a:off x="5029200" y="2286000"/>
-            <a:ext cx="6766560" cy="914400"/>
-          </a:xfrm>
-          <a:prstGeom prst="rect">
-            <a:avLst/>
-          </a:prstGeom>
-          <a:noFill/>
-        </p:spPr>
-        <p:txBody>
-          <a:bodyPr wrap="square" anchor="ctr">
-            <a:spAutoFit/>
-          </a:bodyPr>
-          <a:lstStyle/>
-          <a:p>
-            <a:pPr algn="l">
-              <a:lnSpc>
-                <a:spcPct val="105000"/>
-              </a:lnSpc>
-            </a:pPr>
-            <a:r>
-              <a:rPr sz="1350" b="0">
-                <a:solidFill>
-                  <a:srgbClr val="212121"/>
-                </a:solidFill>
-                <a:latin typeface="Calibri"/>
-              </a:rPr>
-              <a:t>A software-only innovation that upgrades emission monitoring without any new physical infrastructure or hardware manufacturing.</a:t>
-            </a:r>
-          </a:p>
-        </p:txBody>
-      </p:sp>
-      <p:sp>
-        <p:nvSpPr>
-          <p:cNvPr id="13" name="Rounded Rectangle 12"/>
-          <p:cNvSpPr/>
-          <p:nvPr/>
-        </p:nvSpPr>
-        <p:spPr>
-          <a:xfrm>
-            <a:off x="411480" y="3346704"/>
-            <a:ext cx="1234440" cy="932688"/>
-          </a:xfrm>
-          <a:prstGeom prst="roundRect">
-            <a:avLst/>
-          </a:prstGeom>
-          <a:solidFill>
-            <a:srgbClr val="1B5E20"/>
-          </a:solidFill>
-          <a:ln>
-            <a:noFill/>
-          </a:ln>
-          <a:effectLst/>
-        </p:spPr>
-        <p:style>
-          <a:lnRef idx="1">
-            <a:schemeClr val="accent1"/>
-          </a:lnRef>
-          <a:fillRef idx="3">
-            <a:schemeClr val="accent1"/>
-          </a:fillRef>
-          <a:effectRef idx="2">
-            <a:schemeClr val="accent1"/>
-          </a:effectRef>
-          <a:fontRef idx="minor">
-            <a:schemeClr val="lt1"/>
-          </a:fontRef>
-        </p:style>
-        <p:txBody>
-          <a:bodyPr rtlCol="0" anchor="ctr"/>
-          <a:lstStyle/>
-          <a:p>
-            <a:pPr algn="ctr"/>
-          </a:p>
-        </p:txBody>
-      </p:sp>
-      <p:sp>
-        <p:nvSpPr>
-          <p:cNvPr id="14" name="TextBox 13"/>
-          <p:cNvSpPr txBox="1"/>
-          <p:nvPr/>
-        </p:nvSpPr>
-        <p:spPr>
-          <a:xfrm>
-            <a:off x="411480" y="3566160"/>
-            <a:ext cx="1234440" cy="548640"/>
-          </a:xfrm>
-          <a:prstGeom prst="rect">
-            <a:avLst/>
-          </a:prstGeom>
-          <a:noFill/>
-        </p:spPr>
-        <p:txBody>
-          <a:bodyPr wrap="square" anchor="t">
-            <a:spAutoFit/>
-          </a:bodyPr>
-          <a:lstStyle/>
-          <a:p>
-            <a:pPr algn="ctr">
-              <a:lnSpc>
-                <a:spcPct val="100000"/>
-              </a:lnSpc>
-            </a:pPr>
-            <a:r>
-              <a:rPr sz="2000" b="1">
-                <a:solidFill>
-                  <a:srgbClr val="FFFFFF"/>
-                </a:solidFill>
-                <a:latin typeface="Calibri"/>
-              </a:rPr>
-              <a:t>SDG 11</a:t>
-            </a:r>
-          </a:p>
-        </p:txBody>
-      </p:sp>
-      <p:sp>
-        <p:nvSpPr>
-          <p:cNvPr id="15" name="TextBox 14"/>
-          <p:cNvSpPr txBox="1"/>
-          <p:nvPr/>
-        </p:nvSpPr>
-        <p:spPr>
-          <a:xfrm>
-            <a:off x="1828800" y="3364992"/>
-            <a:ext cx="3108960" cy="914400"/>
-          </a:xfrm>
-          <a:prstGeom prst="rect">
-            <a:avLst/>
-          </a:prstGeom>
-          <a:noFill/>
-        </p:spPr>
-        <p:txBody>
-          <a:bodyPr wrap="square" anchor="ctr">
-            <a:spAutoFit/>
-          </a:bodyPr>
-          <a:lstStyle/>
-          <a:p>
-            <a:pPr algn="l">
-              <a:lnSpc>
-                <a:spcPct val="100000"/>
-              </a:lnSpc>
-            </a:pPr>
-            <a:r>
-              <a:rPr sz="1600" b="1">
-                <a:solidFill>
-                  <a:srgbClr val="1B5E20"/>
-                </a:solidFill>
-                <a:latin typeface="Calibri"/>
-              </a:rPr>
-              <a:t>Sustainable Cities &amp; Communities</a:t>
-            </a:r>
-          </a:p>
-        </p:txBody>
-      </p:sp>
-      <p:sp>
-        <p:nvSpPr>
-          <p:cNvPr id="16" name="TextBox 15"/>
-          <p:cNvSpPr txBox="1"/>
-          <p:nvPr/>
-        </p:nvSpPr>
-        <p:spPr>
-          <a:xfrm>
-            <a:off x="5029200" y="3364992"/>
-            <a:ext cx="6766560" cy="914400"/>
-          </a:xfrm>
-          <a:prstGeom prst="rect">
-            <a:avLst/>
-          </a:prstGeom>
-          <a:noFill/>
-        </p:spPr>
-        <p:txBody>
-          <a:bodyPr wrap="square" anchor="ctr">
-            <a:spAutoFit/>
-          </a:bodyPr>
-          <a:lstStyle/>
-          <a:p>
-            <a:pPr algn="l">
-              <a:lnSpc>
-                <a:spcPct val="105000"/>
-              </a:lnSpc>
-            </a:pPr>
-            <a:r>
-              <a:rPr sz="1350" b="0">
-                <a:solidFill>
-                  <a:srgbClr val="212121"/>
-                </a:solidFill>
-                <a:latin typeface="Calibri"/>
-              </a:rPr>
-              <a:t>Cleaner running vehicles and fewer failed emission tests mean healthier, more sustainable city air.</a:t>
-            </a:r>
-          </a:p>
-        </p:txBody>
-      </p:sp>
-      <p:sp>
-        <p:nvSpPr>
-          <p:cNvPr id="17" name="Rounded Rectangle 16"/>
-          <p:cNvSpPr/>
-          <p:nvPr/>
-        </p:nvSpPr>
-        <p:spPr>
-          <a:xfrm>
-            <a:off x="411480" y="4425696"/>
-            <a:ext cx="1234440" cy="932688"/>
-          </a:xfrm>
-          <a:prstGeom prst="roundRect">
-            <a:avLst/>
-          </a:prstGeom>
-          <a:solidFill>
-            <a:srgbClr val="1B5E20"/>
-          </a:solidFill>
-          <a:ln>
-            <a:noFill/>
-          </a:ln>
-          <a:effectLst/>
-        </p:spPr>
-        <p:style>
-          <a:lnRef idx="1">
-            <a:schemeClr val="accent1"/>
-          </a:lnRef>
-          <a:fillRef idx="3">
-            <a:schemeClr val="accent1"/>
-          </a:fillRef>
-          <a:effectRef idx="2">
-            <a:schemeClr val="accent1"/>
-          </a:effectRef>
-          <a:fontRef idx="minor">
-            <a:schemeClr val="lt1"/>
-          </a:fontRef>
-        </p:style>
-        <p:txBody>
-          <a:bodyPr rtlCol="0" anchor="ctr"/>
-          <a:lstStyle/>
-          <a:p>
-            <a:pPr algn="ctr"/>
-          </a:p>
-        </p:txBody>
-      </p:sp>
-      <p:sp>
-        <p:nvSpPr>
-          <p:cNvPr id="18" name="TextBox 17"/>
-          <p:cNvSpPr txBox="1"/>
-          <p:nvPr/>
-        </p:nvSpPr>
-        <p:spPr>
-          <a:xfrm>
-            <a:off x="411480" y="4645152"/>
-            <a:ext cx="1234440" cy="548640"/>
-          </a:xfrm>
-          <a:prstGeom prst="rect">
-            <a:avLst/>
-          </a:prstGeom>
-          <a:noFill/>
-        </p:spPr>
-        <p:txBody>
-          <a:bodyPr wrap="square" anchor="t">
-            <a:spAutoFit/>
-          </a:bodyPr>
-          <a:lstStyle/>
-          <a:p>
-            <a:pPr algn="ctr">
-              <a:lnSpc>
-                <a:spcPct val="100000"/>
-              </a:lnSpc>
-            </a:pPr>
-            <a:r>
-              <a:rPr sz="2000" b="1">
-                <a:solidFill>
-                  <a:srgbClr val="FFFFFF"/>
-                </a:solidFill>
-                <a:latin typeface="Calibri"/>
-              </a:rPr>
-              <a:t>SDG 12</a:t>
-            </a:r>
-          </a:p>
-        </p:txBody>
-      </p:sp>
-      <p:sp>
-        <p:nvSpPr>
-          <p:cNvPr id="19" name="TextBox 18"/>
-          <p:cNvSpPr txBox="1"/>
-          <p:nvPr/>
-        </p:nvSpPr>
-        <p:spPr>
-          <a:xfrm>
-            <a:off x="1828800" y="4443984"/>
-            <a:ext cx="3108960" cy="914400"/>
-          </a:xfrm>
-          <a:prstGeom prst="rect">
-            <a:avLst/>
-          </a:prstGeom>
-          <a:noFill/>
-        </p:spPr>
-        <p:txBody>
-          <a:bodyPr wrap="square" anchor="ctr">
-            <a:spAutoFit/>
-          </a:bodyPr>
-          <a:lstStyle/>
-          <a:p>
-            <a:pPr algn="l">
-              <a:lnSpc>
-                <a:spcPct val="100000"/>
-              </a:lnSpc>
-            </a:pPr>
-            <a:r>
-              <a:rPr sz="1600" b="1">
-                <a:solidFill>
-                  <a:srgbClr val="1B5E20"/>
-                </a:solidFill>
-                <a:latin typeface="Calibri"/>
-              </a:rPr>
-              <a:t>Responsible Consumption &amp; Production</a:t>
-            </a:r>
-          </a:p>
-        </p:txBody>
-      </p:sp>
-      <p:sp>
-        <p:nvSpPr>
-          <p:cNvPr id="20" name="TextBox 19"/>
-          <p:cNvSpPr txBox="1"/>
-          <p:nvPr/>
-        </p:nvSpPr>
-        <p:spPr>
-          <a:xfrm>
-            <a:off x="5029200" y="4443984"/>
-            <a:ext cx="6766560" cy="914400"/>
-          </a:xfrm>
-          <a:prstGeom prst="rect">
-            <a:avLst/>
-          </a:prstGeom>
-          <a:noFill/>
-        </p:spPr>
-        <p:txBody>
-          <a:bodyPr wrap="square" anchor="ctr">
-            <a:spAutoFit/>
-          </a:bodyPr>
-          <a:lstStyle/>
-          <a:p>
-            <a:pPr algn="l">
-              <a:lnSpc>
-                <a:spcPct val="105000"/>
-              </a:lnSpc>
-            </a:pPr>
-            <a:r>
-              <a:rPr sz="1350" b="0">
-                <a:solidFill>
-                  <a:srgbClr val="212121"/>
-                </a:solidFill>
-                <a:latin typeface="Calibri"/>
-              </a:rPr>
-              <a:t>Emission and driving-style feedback nudges owners toward efficient driving and timely maintenance, reducing fuel waste.</a:t>
-            </a:r>
-          </a:p>
-        </p:txBody>
-      </p:sp>
-      <p:sp>
-        <p:nvSpPr>
-          <p:cNvPr id="21" name="Rounded Rectangle 20"/>
-          <p:cNvSpPr/>
-          <p:nvPr/>
-        </p:nvSpPr>
-        <p:spPr>
-          <a:xfrm>
-            <a:off x="411480" y="5504688"/>
-            <a:ext cx="1234440" cy="932688"/>
-          </a:xfrm>
-          <a:prstGeom prst="roundRect">
-            <a:avLst/>
-          </a:prstGeom>
-          <a:solidFill>
-            <a:srgbClr val="1B5E20"/>
-          </a:solidFill>
-          <a:ln>
-            <a:noFill/>
-          </a:ln>
-          <a:effectLst/>
-        </p:spPr>
-        <p:style>
-          <a:lnRef idx="1">
-            <a:schemeClr val="accent1"/>
-          </a:lnRef>
-          <a:fillRef idx="3">
-            <a:schemeClr val="accent1"/>
-          </a:fillRef>
-          <a:effectRef idx="2">
-            <a:schemeClr val="accent1"/>
-          </a:effectRef>
-          <a:fontRef idx="minor">
-            <a:schemeClr val="lt1"/>
-          </a:fontRef>
-        </p:style>
-        <p:txBody>
-          <a:bodyPr rtlCol="0" anchor="ctr"/>
-          <a:lstStyle/>
-          <a:p>
-            <a:pPr algn="ctr"/>
-          </a:p>
-        </p:txBody>
-      </p:sp>
-      <p:sp>
-        <p:nvSpPr>
-          <p:cNvPr id="22" name="TextBox 21"/>
-          <p:cNvSpPr txBox="1"/>
-          <p:nvPr/>
-        </p:nvSpPr>
-        <p:spPr>
-          <a:xfrm>
-            <a:off x="411480" y="5724144"/>
-            <a:ext cx="1234440" cy="548640"/>
-          </a:xfrm>
-          <a:prstGeom prst="rect">
-            <a:avLst/>
-          </a:prstGeom>
-          <a:noFill/>
-        </p:spPr>
-        <p:txBody>
-          <a:bodyPr wrap="square" anchor="t">
-            <a:spAutoFit/>
-          </a:bodyPr>
-          <a:lstStyle/>
-          <a:p>
-            <a:pPr algn="ctr">
-              <a:lnSpc>
-                <a:spcPct val="100000"/>
-              </a:lnSpc>
-            </a:pPr>
-            <a:r>
-              <a:rPr sz="2000" b="1">
-                <a:solidFill>
-                  <a:srgbClr val="FFFFFF"/>
-                </a:solidFill>
-                <a:latin typeface="Calibri"/>
-              </a:rPr>
-              <a:t>SDG 13</a:t>
-            </a:r>
-          </a:p>
-        </p:txBody>
-      </p:sp>
-      <p:sp>
-        <p:nvSpPr>
-          <p:cNvPr id="23" name="TextBox 22"/>
-          <p:cNvSpPr txBox="1"/>
-          <p:nvPr/>
-        </p:nvSpPr>
-        <p:spPr>
-          <a:xfrm>
-            <a:off x="1828800" y="5522976"/>
-            <a:ext cx="3108960" cy="914400"/>
-          </a:xfrm>
-          <a:prstGeom prst="rect">
-            <a:avLst/>
-          </a:prstGeom>
-          <a:noFill/>
-        </p:spPr>
-        <p:txBody>
-          <a:bodyPr wrap="square" anchor="ctr">
-            <a:spAutoFit/>
-          </a:bodyPr>
-          <a:lstStyle/>
-          <a:p>
-            <a:pPr algn="l">
-              <a:lnSpc>
-                <a:spcPct val="100000"/>
-              </a:lnSpc>
-            </a:pPr>
-            <a:r>
-              <a:rPr sz="1600" b="1">
-                <a:solidFill>
-                  <a:srgbClr val="1B5E20"/>
-                </a:solidFill>
-                <a:latin typeface="Calibri"/>
-              </a:rPr>
-              <a:t>Climate Action</a:t>
-            </a:r>
-          </a:p>
-        </p:txBody>
-      </p:sp>
-      <p:sp>
-        <p:nvSpPr>
-          <p:cNvPr id="24" name="TextBox 23"/>
-          <p:cNvSpPr txBox="1"/>
-          <p:nvPr/>
-        </p:nvSpPr>
-        <p:spPr>
-          <a:xfrm>
-            <a:off x="5029200" y="5522976"/>
-            <a:ext cx="6766560" cy="914400"/>
-          </a:xfrm>
-          <a:prstGeom prst="rect">
-            <a:avLst/>
-          </a:prstGeom>
-          <a:noFill/>
-        </p:spPr>
-        <p:txBody>
-          <a:bodyPr wrap="square" anchor="ctr">
-            <a:spAutoFit/>
-          </a:bodyPr>
-          <a:lstStyle/>
-          <a:p>
-            <a:pPr algn="l">
-              <a:lnSpc>
-                <a:spcPct val="105000"/>
-              </a:lnSpc>
-            </a:pPr>
-            <a:r>
-              <a:rPr sz="1350" b="0">
-                <a:solidFill>
-                  <a:srgbClr val="212121"/>
-                </a:solidFill>
-                <a:latin typeface="Calibri"/>
-              </a:rPr>
-              <a:t>Continuous CO2 tracking makes every owner's carbon footprint visible and actionable - small per-car savings multiplied across millions of vehicles.</a:t>
-            </a:r>
-          </a:p>
-        </p:txBody>
-      </p:sp>
-    </p:spTree>
-  </p:cSld>
-  <p:clrMapOvr>
-    <a:masterClrMapping/>
-  </p:clrMapOvr>
-</p:sld>
-</file>
-
-<file path=ppt/slides/slide8.xml><?xml version="1.0" encoding="utf-8"?>
-<p:sld xmlns:a="http://schemas.openxmlformats.org/drawingml/2006/main" xmlns:p="http://schemas.openxmlformats.org/presentationml/2006/main" xmlns:r="http://schemas.openxmlformats.org/officeDocument/2006/relationships">
-  <p:cSld>
-    <p:spTree>
-      <p:nvGrpSpPr>
-        <p:cNvPr id="1" name=""/>
-        <p:cNvGrpSpPr/>
-        <p:nvPr/>
-      </p:nvGrpSpPr>
-      <p:grpSpPr/>
-      <p:sp>
-        <p:nvSpPr>
-          <p:cNvPr id="2" name="Rectangle 1"/>
-          <p:cNvSpPr/>
-          <p:nvPr/>
-        </p:nvSpPr>
-        <p:spPr>
-          <a:xfrm>
-            <a:off x="0" y="0"/>
-            <a:ext cx="12191695" cy="914400"/>
-          </a:xfrm>
-          <a:prstGeom prst="rect">
-            <a:avLst/>
-          </a:prstGeom>
-          <a:solidFill>
-            <a:srgbClr val="1B5E20"/>
-          </a:solidFill>
-          <a:ln>
-            <a:noFill/>
-          </a:ln>
-          <a:effectLst/>
-        </p:spPr>
-        <p:style>
-          <a:lnRef idx="1">
-            <a:schemeClr val="accent1"/>
-          </a:lnRef>
-          <a:fillRef idx="3">
-            <a:schemeClr val="accent1"/>
-          </a:fillRef>
-          <a:effectRef idx="2">
-            <a:schemeClr val="accent1"/>
-          </a:effectRef>
-          <a:fontRef idx="minor">
-            <a:schemeClr val="lt1"/>
-          </a:fontRef>
-        </p:style>
-        <p:txBody>
-          <a:bodyPr rtlCol="0" anchor="ctr"/>
-          <a:lstStyle/>
-          <a:p>
-            <a:pPr algn="ctr"/>
-          </a:p>
-        </p:txBody>
-      </p:sp>
-      <p:sp>
-        <p:nvSpPr>
-          <p:cNvPr id="3" name="TextBox 2"/>
-          <p:cNvSpPr txBox="1"/>
-          <p:nvPr/>
-        </p:nvSpPr>
-        <p:spPr>
-          <a:xfrm>
-            <a:off x="502920" y="118872"/>
-            <a:ext cx="11185855" cy="685800"/>
-          </a:xfrm>
-          <a:prstGeom prst="rect">
-            <a:avLst/>
-          </a:prstGeom>
-          <a:noFill/>
-        </p:spPr>
-        <p:txBody>
-          <a:bodyPr wrap="square" anchor="ctr">
-            <a:spAutoFit/>
-          </a:bodyPr>
-          <a:lstStyle/>
-          <a:p>
-            <a:pPr algn="l">
-              <a:lnSpc>
-                <a:spcPct val="100000"/>
-              </a:lnSpc>
-            </a:pPr>
-            <a:r>
-              <a:rPr sz="3000" b="1">
-                <a:solidFill>
-                  <a:srgbClr val="FFFFFF"/>
-                </a:solidFill>
-                <a:latin typeface="Calibri"/>
-              </a:rPr>
-              <a:t>Budget Requirements</a:t>
-            </a:r>
-          </a:p>
-        </p:txBody>
-      </p:sp>
-      <p:sp>
-        <p:nvSpPr>
-          <p:cNvPr id="4" name="Rectangle 3"/>
-          <p:cNvSpPr/>
-          <p:nvPr/>
-        </p:nvSpPr>
-        <p:spPr>
-          <a:xfrm>
-            <a:off x="0" y="914400"/>
-            <a:ext cx="12191695" cy="54864"/>
-          </a:xfrm>
-          <a:prstGeom prst="rect">
-            <a:avLst/>
-          </a:prstGeom>
-          <a:solidFill>
-            <a:srgbClr val="F9A825"/>
-          </a:solidFill>
-          <a:ln>
-            <a:noFill/>
-          </a:ln>
-          <a:effectLst/>
-        </p:spPr>
-        <p:style>
-          <a:lnRef idx="1">
-            <a:schemeClr val="accent1"/>
-          </a:lnRef>
-          <a:fillRef idx="3">
-            <a:schemeClr val="accent1"/>
-          </a:fillRef>
-          <a:effectRef idx="2">
-            <a:schemeClr val="accent1"/>
-          </a:effectRef>
-          <a:fontRef idx="minor">
-            <a:schemeClr val="lt1"/>
-          </a:fontRef>
-        </p:style>
-        <p:txBody>
-          <a:bodyPr rtlCol="0" anchor="ctr"/>
-          <a:lstStyle/>
-          <a:p>
-            <a:pPr algn="ctr"/>
-          </a:p>
-        </p:txBody>
-      </p:sp>
-      <p:graphicFrame>
-        <p:nvGraphicFramePr>
-          <p:cNvPr id="5" name="Table 4"/>
-          <p:cNvGraphicFramePr>
-            <a:graphicFrameLocks noGrp="1"/>
-          </p:cNvGraphicFramePr>
-          <p:nvPr/>
-        </p:nvGraphicFramePr>
-        <p:xfrm>
-          <a:off x="411480" y="1188720"/>
-          <a:ext cx="11365992" cy="4288536"/>
-        </p:xfrm>
-        <a:graphic>
-          <a:graphicData uri="http://schemas.openxmlformats.org/drawingml/2006/table">
-            <a:tbl>
-              <a:tblPr firstRow="1" bandRow="1">
-                <a:tableStyleId>{5C22544A-7EE6-4342-B048-85BDC9FD1C3A}</a:tableStyleId>
-              </a:tblPr>
-              <a:tblGrid>
-                <a:gridCol w="3017520"/>
-                <a:gridCol w="1965960"/>
-                <a:gridCol w="1965960"/>
-                <a:gridCol w="4416552"/>
-              </a:tblGrid>
-              <a:tr h="411480">
-                <a:tc>
-                  <a:txBody>
-                    <a:bodyPr wrap="square"/>
-                    <a:lstStyle/>
-                    <a:p>
-                      <a:r>
-                        <a:rPr sz="1300" b="1">
-                          <a:solidFill>
-                            <a:srgbClr val="FFFFFF"/>
-                          </a:solidFill>
-                          <a:latin typeface="Calibri"/>
-                        </a:rPr>
-                        <a:t>Item</a:t>
-                      </a:r>
-                    </a:p>
-                  </a:txBody>
-                  <a:tcPr marL="73152" marR="73152" marT="27432" marB="27432" anchor="ctr">
-                    <a:solidFill>
-                      <a:srgbClr val="1B5E20"/>
-                    </a:solidFill>
-                  </a:tcPr>
-                </a:tc>
-                <a:tc>
-                  <a:txBody>
-                    <a:bodyPr wrap="square"/>
-                    <a:lstStyle/>
-                    <a:p>
-                      <a:r>
-                        <a:rPr sz="1300" b="1">
-                          <a:solidFill>
-                            <a:srgbClr val="FFFFFF"/>
-                          </a:solidFill>
-                          <a:latin typeface="Calibri"/>
-                        </a:rPr>
-                        <a:t>MVP / Hackathon</a:t>
-                      </a:r>
-                    </a:p>
-                  </a:txBody>
-                  <a:tcPr marL="73152" marR="73152" marT="27432" marB="27432" anchor="ctr">
-                    <a:solidFill>
-                      <a:srgbClr val="1B5E20"/>
-                    </a:solidFill>
-                  </a:tcPr>
-                </a:tc>
-                <a:tc>
-                  <a:txBody>
-                    <a:bodyPr wrap="square"/>
-                    <a:lstStyle/>
-                    <a:p>
-                      <a:r>
-                        <a:rPr sz="1300" b="1">
-                          <a:solidFill>
-                            <a:srgbClr val="FFFFFF"/>
-                          </a:solidFill>
-                          <a:latin typeface="Calibri"/>
-                        </a:rPr>
-                        <a:t>Pilot (Year 1)</a:t>
-                      </a:r>
-                    </a:p>
-                  </a:txBody>
-                  <a:tcPr marL="73152" marR="73152" marT="27432" marB="27432" anchor="ctr">
-                    <a:solidFill>
-                      <a:srgbClr val="1B5E20"/>
-                    </a:solidFill>
-                  </a:tcPr>
-                </a:tc>
-                <a:tc>
-                  <a:txBody>
-                    <a:bodyPr wrap="square"/>
-                    <a:lstStyle/>
-                    <a:p>
-                      <a:r>
-                        <a:rPr sz="1300" b="1">
-                          <a:solidFill>
-                            <a:srgbClr val="FFFFFF"/>
-                          </a:solidFill>
-                          <a:latin typeface="Calibri"/>
-                        </a:rPr>
-                        <a:t>Notes</a:t>
-                      </a:r>
-                    </a:p>
-                  </a:txBody>
-                  <a:tcPr marL="73152" marR="73152" marT="27432" marB="27432" anchor="ctr">
-                    <a:solidFill>
-                      <a:srgbClr val="1B5E20"/>
-                    </a:solidFill>
-                  </a:tcPr>
-                </a:tc>
-              </a:tr>
-              <a:tr h="484632">
-                <a:tc>
-                  <a:txBody>
-                    <a:bodyPr wrap="square"/>
-                    <a:lstStyle/>
-                    <a:p>
-                      <a:r>
-                        <a:rPr sz="1200" b="1">
-                          <a:solidFill>
-                            <a:srgbClr val="212121"/>
-                          </a:solidFill>
-                          <a:latin typeface="Calibri"/>
-                        </a:rPr>
-                        <a:t>App &amp; backend development</a:t>
-                      </a:r>
-                    </a:p>
-                  </a:txBody>
-                  <a:tcPr marL="73152" marR="73152" marT="27432" marB="27432" anchor="ctr">
-                    <a:solidFill>
-                      <a:srgbClr val="F1F8E9"/>
-                    </a:solidFill>
-                  </a:tcPr>
-                </a:tc>
-                <a:tc>
-                  <a:txBody>
-                    <a:bodyPr wrap="square"/>
-                    <a:lstStyle/>
-                    <a:p>
-                      <a:r>
-                        <a:rPr sz="1200" b="0">
-                          <a:solidFill>
-                            <a:srgbClr val="212121"/>
-                          </a:solidFill>
-                          <a:latin typeface="Calibri"/>
-                        </a:rPr>
-                        <a:t>₹0 (in-house)</a:t>
-                      </a:r>
-                    </a:p>
-                  </a:txBody>
-                  <a:tcPr marL="73152" marR="73152" marT="27432" marB="27432" anchor="ctr">
-                    <a:solidFill>
-                      <a:srgbClr val="F1F8E9"/>
-                    </a:solidFill>
-                  </a:tcPr>
-                </a:tc>
-                <a:tc>
-                  <a:txBody>
-                    <a:bodyPr wrap="square"/>
-                    <a:lstStyle/>
-                    <a:p>
-                      <a:r>
-                        <a:rPr sz="1200" b="0">
-                          <a:solidFill>
-                            <a:srgbClr val="212121"/>
-                          </a:solidFill>
-                          <a:latin typeface="Calibri"/>
-                        </a:rPr>
-                        <a:t>₹0 (in-house)</a:t>
-                      </a:r>
-                    </a:p>
-                  </a:txBody>
-                  <a:tcPr marL="73152" marR="73152" marT="27432" marB="27432" anchor="ctr">
-                    <a:solidFill>
-                      <a:srgbClr val="F1F8E9"/>
-                    </a:solidFill>
-                  </a:tcPr>
-                </a:tc>
-                <a:tc>
-                  <a:txBody>
-                    <a:bodyPr wrap="square"/>
-                    <a:lstStyle/>
-                    <a:p>
-                      <a:r>
-                        <a:rPr sz="1200" b="0">
-                          <a:solidFill>
-                            <a:srgbClr val="212121"/>
-                          </a:solidFill>
-                          <a:latin typeface="Calibri"/>
-                        </a:rPr>
-                        <a:t>Built by the team on free, open-source tools (Flutter, FastAPI, PostgreSQL)</a:t>
-                      </a:r>
-                    </a:p>
-                  </a:txBody>
-                  <a:tcPr marL="73152" marR="73152" marT="27432" marB="27432" anchor="ctr">
-                    <a:solidFill>
-                      <a:srgbClr val="F1F8E9"/>
-                    </a:solidFill>
-                  </a:tcPr>
-                </a:tc>
-              </a:tr>
-              <a:tr h="484632">
-                <a:tc>
-                  <a:txBody>
-                    <a:bodyPr wrap="square"/>
-                    <a:lstStyle/>
-                    <a:p>
-                      <a:r>
-                        <a:rPr sz="1200" b="1">
-                          <a:solidFill>
-                            <a:srgbClr val="212121"/>
-                          </a:solidFill>
-                          <a:latin typeface="Calibri"/>
-                        </a:rPr>
-                        <a:t>Cloud hosting &amp; database</a:t>
-                      </a:r>
-                    </a:p>
-                  </a:txBody>
-                  <a:tcPr marL="73152" marR="73152" marT="27432" marB="27432" anchor="ctr">
-                    <a:solidFill>
-                      <a:srgbClr val="FFFFFF"/>
-                    </a:solidFill>
-                  </a:tcPr>
-                </a:tc>
-                <a:tc>
-                  <a:txBody>
-                    <a:bodyPr wrap="square"/>
-                    <a:lstStyle/>
-                    <a:p>
-                      <a:r>
-                        <a:rPr sz="1200" b="0">
-                          <a:solidFill>
-                            <a:srgbClr val="212121"/>
-                          </a:solidFill>
-                          <a:latin typeface="Calibri"/>
-                        </a:rPr>
-                        <a:t>₹0 (free tier)</a:t>
-                      </a:r>
-                    </a:p>
-                  </a:txBody>
-                  <a:tcPr marL="73152" marR="73152" marT="27432" marB="27432" anchor="ctr">
-                    <a:solidFill>
-                      <a:srgbClr val="FFFFFF"/>
-                    </a:solidFill>
-                  </a:tcPr>
-                </a:tc>
-                <a:tc>
-                  <a:txBody>
-                    <a:bodyPr wrap="square"/>
-                    <a:lstStyle/>
-                    <a:p>
-                      <a:r>
-                        <a:rPr sz="1200" b="0">
-                          <a:solidFill>
-                            <a:srgbClr val="212121"/>
-                          </a:solidFill>
-                          <a:latin typeface="Calibri"/>
-                        </a:rPr>
-                        <a:t>₹18,000 - 30,000</a:t>
-                      </a:r>
-                    </a:p>
-                  </a:txBody>
-                  <a:tcPr marL="73152" marR="73152" marT="27432" marB="27432" anchor="ctr">
-                    <a:solidFill>
-                      <a:srgbClr val="FFFFFF"/>
-                    </a:solidFill>
-                  </a:tcPr>
-                </a:tc>
-                <a:tc>
-                  <a:txBody>
-                    <a:bodyPr wrap="square"/>
-                    <a:lstStyle/>
-                    <a:p>
-                      <a:r>
-                        <a:rPr sz="1200" b="0">
-                          <a:solidFill>
-                            <a:srgbClr val="212121"/>
-                          </a:solidFill>
-                          <a:latin typeface="Calibri"/>
-                        </a:rPr>
-                        <a:t>Free tiers cover the demo; ~₹1,500-2,500/month once pilot users join</a:t>
-                      </a:r>
-                    </a:p>
-                  </a:txBody>
-                  <a:tcPr marL="73152" marR="73152" marT="27432" marB="27432" anchor="ctr">
-                    <a:solidFill>
-                      <a:srgbClr val="FFFFFF"/>
-                    </a:solidFill>
-                  </a:tcPr>
-                </a:tc>
-              </a:tr>
-              <a:tr h="484632">
-                <a:tc>
-                  <a:txBody>
-                    <a:bodyPr wrap="square"/>
-                    <a:lstStyle/>
-                    <a:p>
-                      <a:r>
-                        <a:rPr sz="1200" b="1">
-                          <a:solidFill>
-                            <a:srgbClr val="212121"/>
-                          </a:solidFill>
-                          <a:latin typeface="Calibri"/>
-                        </a:rPr>
-                        <a:t>Google Play developer account</a:t>
-                      </a:r>
-                    </a:p>
-                  </a:txBody>
-                  <a:tcPr marL="73152" marR="73152" marT="27432" marB="27432" anchor="ctr">
-                    <a:solidFill>
-                      <a:srgbClr val="F1F8E9"/>
-                    </a:solidFill>
-                  </a:tcPr>
-                </a:tc>
-                <a:tc>
-                  <a:txBody>
-                    <a:bodyPr wrap="square"/>
-                    <a:lstStyle/>
-                    <a:p>
-                      <a:r>
-                        <a:rPr sz="1200" b="0">
-                          <a:solidFill>
-                            <a:srgbClr val="212121"/>
-                          </a:solidFill>
-                          <a:latin typeface="Calibri"/>
-                        </a:rPr>
-                        <a:t>₹2,100</a:t>
-                      </a:r>
-                    </a:p>
-                  </a:txBody>
-                  <a:tcPr marL="73152" marR="73152" marT="27432" marB="27432" anchor="ctr">
-                    <a:solidFill>
-                      <a:srgbClr val="F1F8E9"/>
-                    </a:solidFill>
-                  </a:tcPr>
-                </a:tc>
-                <a:tc>
-                  <a:txBody>
-                    <a:bodyPr wrap="square"/>
-                    <a:lstStyle/>
-                    <a:p>
-                      <a:r>
-                        <a:rPr sz="1200" b="0">
-                          <a:solidFill>
-                            <a:srgbClr val="212121"/>
-                          </a:solidFill>
-                          <a:latin typeface="Calibri"/>
-                        </a:rPr>
-                        <a:t>-</a:t>
-                      </a:r>
-                    </a:p>
-                  </a:txBody>
-                  <a:tcPr marL="73152" marR="73152" marT="27432" marB="27432" anchor="ctr">
-                    <a:solidFill>
-                      <a:srgbClr val="F1F8E9"/>
-                    </a:solidFill>
-                  </a:tcPr>
-                </a:tc>
-                <a:tc>
-                  <a:txBody>
-                    <a:bodyPr wrap="square"/>
-                    <a:lstStyle/>
-                    <a:p>
-                      <a:r>
-                        <a:rPr sz="1200" b="0">
-                          <a:solidFill>
-                            <a:srgbClr val="212121"/>
-                          </a:solidFill>
-                          <a:latin typeface="Calibri"/>
-                        </a:rPr>
-                        <a:t>One-time fee (~USD 25) to publish the Android app</a:t>
-                      </a:r>
-                    </a:p>
-                  </a:txBody>
-                  <a:tcPr marL="73152" marR="73152" marT="27432" marB="27432" anchor="ctr">
-                    <a:solidFill>
-                      <a:srgbClr val="F1F8E9"/>
-                    </a:solidFill>
-                  </a:tcPr>
-                </a:tc>
-              </a:tr>
-              <a:tr h="484632">
-                <a:tc>
-                  <a:txBody>
-                    <a:bodyPr wrap="square"/>
-                    <a:lstStyle/>
-                    <a:p>
-                      <a:r>
-                        <a:rPr sz="1200" b="1">
-                          <a:solidFill>
-                            <a:srgbClr val="212121"/>
-                          </a:solidFill>
-                          <a:latin typeface="Calibri"/>
-                        </a:rPr>
-                        <a:t>Apple App Store (optional, later)</a:t>
-                      </a:r>
-                    </a:p>
-                  </a:txBody>
-                  <a:tcPr marL="73152" marR="73152" marT="27432" marB="27432" anchor="ctr">
-                    <a:solidFill>
-                      <a:srgbClr val="FFFFFF"/>
-                    </a:solidFill>
-                  </a:tcPr>
-                </a:tc>
-                <a:tc>
-                  <a:txBody>
-                    <a:bodyPr wrap="square"/>
-                    <a:lstStyle/>
-                    <a:p>
-                      <a:r>
-                        <a:rPr sz="1200" b="0">
-                          <a:solidFill>
-                            <a:srgbClr val="212121"/>
-                          </a:solidFill>
-                          <a:latin typeface="Calibri"/>
-                        </a:rPr>
-                        <a:t>-</a:t>
-                      </a:r>
-                    </a:p>
-                  </a:txBody>
-                  <a:tcPr marL="73152" marR="73152" marT="27432" marB="27432" anchor="ctr">
-                    <a:solidFill>
-                      <a:srgbClr val="FFFFFF"/>
-                    </a:solidFill>
-                  </a:tcPr>
-                </a:tc>
-                <a:tc>
-                  <a:txBody>
-                    <a:bodyPr wrap="square"/>
-                    <a:lstStyle/>
-                    <a:p>
-                      <a:r>
-                        <a:rPr sz="1200" b="0">
-                          <a:solidFill>
-                            <a:srgbClr val="212121"/>
-                          </a:solidFill>
-                          <a:latin typeface="Calibri"/>
-                        </a:rPr>
-                        <a:t>₹8,500 / year</a:t>
-                      </a:r>
-                    </a:p>
-                  </a:txBody>
-                  <a:tcPr marL="73152" marR="73152" marT="27432" marB="27432" anchor="ctr">
-                    <a:solidFill>
-                      <a:srgbClr val="FFFFFF"/>
-                    </a:solidFill>
-                  </a:tcPr>
-                </a:tc>
-                <a:tc>
-                  <a:txBody>
-                    <a:bodyPr wrap="square"/>
-                    <a:lstStyle/>
-                    <a:p>
-                      <a:r>
-                        <a:rPr sz="1200" b="0">
-                          <a:solidFill>
-                            <a:srgbClr val="212121"/>
-                          </a:solidFill>
-                          <a:latin typeface="Calibri"/>
-                        </a:rPr>
-                        <a:t>Only when the iOS version ships (~USD 99/year)</a:t>
-                      </a:r>
-                    </a:p>
-                  </a:txBody>
-                  <a:tcPr marL="73152" marR="73152" marT="27432" marB="27432" anchor="ctr">
-                    <a:solidFill>
-                      <a:srgbClr val="FFFFFF"/>
-                    </a:solidFill>
-                  </a:tcPr>
-                </a:tc>
-              </a:tr>
-              <a:tr h="484632">
-                <a:tc>
-                  <a:txBody>
-                    <a:bodyPr wrap="square"/>
-                    <a:lstStyle/>
-                    <a:p>
-                      <a:r>
-                        <a:rPr sz="1200" b="1">
-                          <a:solidFill>
-                            <a:srgbClr val="212121"/>
-                          </a:solidFill>
-                          <a:latin typeface="Calibri"/>
-                        </a:rPr>
-                        <a:t>Domain, SSL &amp; email</a:t>
-                      </a:r>
-                    </a:p>
-                  </a:txBody>
-                  <a:tcPr marL="73152" marR="73152" marT="27432" marB="27432" anchor="ctr">
-                    <a:solidFill>
-                      <a:srgbClr val="F1F8E9"/>
-                    </a:solidFill>
-                  </a:tcPr>
-                </a:tc>
-                <a:tc>
-                  <a:txBody>
-                    <a:bodyPr wrap="square"/>
-                    <a:lstStyle/>
-                    <a:p>
-                      <a:r>
-                        <a:rPr sz="1200" b="0">
-                          <a:solidFill>
-                            <a:srgbClr val="212121"/>
-                          </a:solidFill>
-                          <a:latin typeface="Calibri"/>
-                        </a:rPr>
-                        <a:t>₹1,000</a:t>
-                      </a:r>
-                    </a:p>
-                  </a:txBody>
-                  <a:tcPr marL="73152" marR="73152" marT="27432" marB="27432" anchor="ctr">
-                    <a:solidFill>
-                      <a:srgbClr val="F1F8E9"/>
-                    </a:solidFill>
-                  </a:tcPr>
-                </a:tc>
-                <a:tc>
-                  <a:txBody>
-                    <a:bodyPr wrap="square"/>
-                    <a:lstStyle/>
-                    <a:p>
-                      <a:r>
-                        <a:rPr sz="1200" b="0">
-                          <a:solidFill>
-                            <a:srgbClr val="212121"/>
-                          </a:solidFill>
-                          <a:latin typeface="Calibri"/>
-                        </a:rPr>
-                        <a:t>₹1,500 / year</a:t>
-                      </a:r>
-                    </a:p>
-                  </a:txBody>
-                  <a:tcPr marL="73152" marR="73152" marT="27432" marB="27432" anchor="ctr">
-                    <a:solidFill>
-                      <a:srgbClr val="F1F8E9"/>
-                    </a:solidFill>
-                  </a:tcPr>
-                </a:tc>
-                <a:tc>
-                  <a:txBody>
-                    <a:bodyPr wrap="square"/>
-                    <a:lstStyle/>
-                    <a:p>
-                      <a:r>
-                        <a:rPr sz="1200" b="0">
-                          <a:solidFill>
-                            <a:srgbClr val="212121"/>
-                          </a:solidFill>
-                          <a:latin typeface="Calibri"/>
-                        </a:rPr>
-                        <a:t>Project website and support email</a:t>
-                      </a:r>
-                    </a:p>
-                  </a:txBody>
-                  <a:tcPr marL="73152" marR="73152" marT="27432" marB="27432" anchor="ctr">
-                    <a:solidFill>
-                      <a:srgbClr val="F1F8E9"/>
-                    </a:solidFill>
-                  </a:tcPr>
-                </a:tc>
-              </a:tr>
-              <a:tr h="484632">
-                <a:tc>
-                  <a:txBody>
-                    <a:bodyPr wrap="square"/>
-                    <a:lstStyle/>
-                    <a:p>
-                      <a:r>
-                        <a:rPr sz="1200" b="1">
-                          <a:solidFill>
-                            <a:srgbClr val="212121"/>
-                          </a:solidFill>
-                          <a:latin typeface="Calibri"/>
-                        </a:rPr>
-                        <a:t>Emission-factor data &amp; APIs</a:t>
-                      </a:r>
-                    </a:p>
-                  </a:txBody>
-                  <a:tcPr marL="73152" marR="73152" marT="27432" marB="27432" anchor="ctr">
-                    <a:solidFill>
-                      <a:srgbClr val="FFFFFF"/>
-                    </a:solidFill>
-                  </a:tcPr>
-                </a:tc>
-                <a:tc>
-                  <a:txBody>
-                    <a:bodyPr wrap="square"/>
-                    <a:lstStyle/>
-                    <a:p>
-                      <a:r>
-                        <a:rPr sz="1200" b="0">
-                          <a:solidFill>
-                            <a:srgbClr val="212121"/>
-                          </a:solidFill>
-                          <a:latin typeface="Calibri"/>
-                        </a:rPr>
-                        <a:t>₹0</a:t>
-                      </a:r>
-                    </a:p>
-                  </a:txBody>
-                  <a:tcPr marL="73152" marR="73152" marT="27432" marB="27432" anchor="ctr">
-                    <a:solidFill>
-                      <a:srgbClr val="FFFFFF"/>
-                    </a:solidFill>
-                  </a:tcPr>
-                </a:tc>
-                <a:tc>
-                  <a:txBody>
-                    <a:bodyPr wrap="square"/>
-                    <a:lstStyle/>
-                    <a:p>
-                      <a:r>
-                        <a:rPr sz="1200" b="0">
-                          <a:solidFill>
-                            <a:srgbClr val="212121"/>
-                          </a:solidFill>
-                          <a:latin typeface="Calibri"/>
-                        </a:rPr>
-                        <a:t>₹0</a:t>
-                      </a:r>
-                    </a:p>
-                  </a:txBody>
-                  <a:tcPr marL="73152" marR="73152" marT="27432" marB="27432" anchor="ctr">
-                    <a:solidFill>
-                      <a:srgbClr val="FFFFFF"/>
-                    </a:solidFill>
-                  </a:tcPr>
-                </a:tc>
-                <a:tc>
-                  <a:txBody>
-                    <a:bodyPr wrap="square"/>
-                    <a:lstStyle/>
-                    <a:p>
-                      <a:r>
-                        <a:rPr sz="1200" b="0">
-                          <a:solidFill>
-                            <a:srgbClr val="212121"/>
-                          </a:solidFill>
-                          <a:latin typeface="Calibri"/>
-                        </a:rPr>
-                        <a:t>BS6 / COPERT / EPA emission factors are published; maps, push notifications and connected-car dev tiers are free</a:t>
-                      </a:r>
-                    </a:p>
-                  </a:txBody>
-                  <a:tcPr marL="73152" marR="73152" marT="27432" marB="27432" anchor="ctr">
-                    <a:solidFill>
-                      <a:srgbClr val="FFFFFF"/>
-                    </a:solidFill>
-                  </a:tcPr>
-                </a:tc>
-              </a:tr>
-              <a:tr h="484632">
-                <a:tc>
-                  <a:txBody>
-                    <a:bodyPr wrap="square"/>
-                    <a:lstStyle/>
-                    <a:p>
-                      <a:r>
-                        <a:rPr sz="1200" b="1">
-                          <a:solidFill>
-                            <a:srgbClr val="212121"/>
-                          </a:solidFill>
-                          <a:latin typeface="Calibri"/>
-                        </a:rPr>
-                        <a:t>Pilot outreach &amp; testing</a:t>
-                      </a:r>
-                    </a:p>
-                  </a:txBody>
-                  <a:tcPr marL="73152" marR="73152" marT="27432" marB="27432" anchor="ctr">
-                    <a:solidFill>
-                      <a:srgbClr val="F1F8E9"/>
-                    </a:solidFill>
-                  </a:tcPr>
-                </a:tc>
-                <a:tc>
-                  <a:txBody>
-                    <a:bodyPr wrap="square"/>
-                    <a:lstStyle/>
-                    <a:p>
-                      <a:r>
-                        <a:rPr sz="1200" b="0">
-                          <a:solidFill>
-                            <a:srgbClr val="212121"/>
-                          </a:solidFill>
-                          <a:latin typeface="Calibri"/>
-                        </a:rPr>
-                        <a:t>₹2,000</a:t>
-                      </a:r>
-                    </a:p>
-                  </a:txBody>
-                  <a:tcPr marL="73152" marR="73152" marT="27432" marB="27432" anchor="ctr">
-                    <a:solidFill>
-                      <a:srgbClr val="F1F8E9"/>
-                    </a:solidFill>
-                  </a:tcPr>
-                </a:tc>
-                <a:tc>
-                  <a:txBody>
-                    <a:bodyPr wrap="square"/>
-                    <a:lstStyle/>
-                    <a:p>
-                      <a:r>
-                        <a:rPr sz="1200" b="0">
-                          <a:solidFill>
-                            <a:srgbClr val="212121"/>
-                          </a:solidFill>
-                          <a:latin typeface="Calibri"/>
-                        </a:rPr>
-                        <a:t>₹10,000 - 15,000</a:t>
-                      </a:r>
-                    </a:p>
-                  </a:txBody>
-                  <a:tcPr marL="73152" marR="73152" marT="27432" marB="27432" anchor="ctr">
-                    <a:solidFill>
-                      <a:srgbClr val="F1F8E9"/>
-                    </a:solidFill>
-                  </a:tcPr>
-                </a:tc>
-                <a:tc>
-                  <a:txBody>
-                    <a:bodyPr wrap="square"/>
-                    <a:lstStyle/>
-                    <a:p>
-                      <a:r>
-                        <a:rPr sz="1200" b="0">
-                          <a:solidFill>
-                            <a:srgbClr val="212121"/>
-                          </a:solidFill>
-                          <a:latin typeface="Calibri"/>
-                        </a:rPr>
-                        <a:t>Posters, fuel reimbursement for test drives, feedback incentives</a:t>
-                      </a:r>
-                    </a:p>
-                  </a:txBody>
-                  <a:tcPr marL="73152" marR="73152" marT="27432" marB="27432" anchor="ctr">
-                    <a:solidFill>
-                      <a:srgbClr val="F1F8E9"/>
-                    </a:solidFill>
-                  </a:tcPr>
-                </a:tc>
-              </a:tr>
-              <a:tr h="484632">
-                <a:tc>
-                  <a:txBody>
-                    <a:bodyPr wrap="square"/>
-                    <a:lstStyle/>
-                    <a:p>
-                      <a:r>
-                        <a:rPr sz="1200" b="1">
-                          <a:solidFill>
-                            <a:srgbClr val="212121"/>
-                          </a:solidFill>
-                          <a:latin typeface="Calibri"/>
-                        </a:rPr>
-                        <a:t>Contingency (~15%)</a:t>
-                      </a:r>
-                    </a:p>
-                  </a:txBody>
-                  <a:tcPr marL="73152" marR="73152" marT="27432" marB="27432" anchor="ctr">
-                    <a:solidFill>
-                      <a:srgbClr val="FFFFFF"/>
-                    </a:solidFill>
-                  </a:tcPr>
-                </a:tc>
-                <a:tc>
-                  <a:txBody>
-                    <a:bodyPr wrap="square"/>
-                    <a:lstStyle/>
-                    <a:p>
-                      <a:r>
-                        <a:rPr sz="1200" b="0">
-                          <a:solidFill>
-                            <a:srgbClr val="212121"/>
-                          </a:solidFill>
-                          <a:latin typeface="Calibri"/>
-                        </a:rPr>
-                        <a:t>₹1,000</a:t>
-                      </a:r>
-                    </a:p>
-                  </a:txBody>
-                  <a:tcPr marL="73152" marR="73152" marT="27432" marB="27432" anchor="ctr">
-                    <a:solidFill>
-                      <a:srgbClr val="FFFFFF"/>
-                    </a:solidFill>
-                  </a:tcPr>
-                </a:tc>
-                <a:tc>
-                  <a:txBody>
-                    <a:bodyPr wrap="square"/>
-                    <a:lstStyle/>
-                    <a:p>
-                      <a:r>
-                        <a:rPr sz="1200" b="0">
-                          <a:solidFill>
-                            <a:srgbClr val="212121"/>
-                          </a:solidFill>
-                          <a:latin typeface="Calibri"/>
-                        </a:rPr>
-                        <a:t>₹8,000</a:t>
-                      </a:r>
-                    </a:p>
-                  </a:txBody>
-                  <a:tcPr marL="73152" marR="73152" marT="27432" marB="27432" anchor="ctr">
-                    <a:solidFill>
-                      <a:srgbClr val="FFFFFF"/>
-                    </a:solidFill>
-                  </a:tcPr>
-                </a:tc>
-                <a:tc>
-                  <a:txBody>
-                    <a:bodyPr wrap="square"/>
-                    <a:lstStyle/>
-                    <a:p>
-                      <a:r>
-                        <a:rPr sz="1200" b="0">
-                          <a:solidFill>
-                            <a:srgbClr val="212121"/>
-                          </a:solidFill>
-                          <a:latin typeface="Calibri"/>
-                        </a:rPr>
-                        <a:t>Buffer for overruns</a:t>
-                      </a:r>
-                    </a:p>
-                  </a:txBody>
-                  <a:tcPr marL="73152" marR="73152" marT="27432" marB="27432" anchor="ctr">
-                    <a:solidFill>
-                      <a:srgbClr val="FFFFFF"/>
-                    </a:solidFill>
-                  </a:tcPr>
-                </a:tc>
-              </a:tr>
-            </a:tbl>
-          </a:graphicData>
-        </a:graphic>
-      </p:graphicFrame>
-      <p:sp>
-        <p:nvSpPr>
-          <p:cNvPr id="6" name="Rounded Rectangle 5"/>
-          <p:cNvSpPr/>
-          <p:nvPr/>
-        </p:nvSpPr>
-        <p:spPr>
-          <a:xfrm>
-            <a:off x="411480" y="5715000"/>
-            <a:ext cx="5486400" cy="777240"/>
-          </a:xfrm>
-          <a:prstGeom prst="roundRect">
-            <a:avLst/>
-          </a:prstGeom>
-          <a:solidFill>
-            <a:srgbClr val="1B5E20"/>
-          </a:solidFill>
-          <a:ln>
-            <a:noFill/>
-          </a:ln>
-          <a:effectLst/>
-        </p:spPr>
-        <p:style>
-          <a:lnRef idx="1">
-            <a:schemeClr val="accent1"/>
-          </a:lnRef>
-          <a:fillRef idx="3">
-            <a:schemeClr val="accent1"/>
-          </a:fillRef>
-          <a:effectRef idx="2">
-            <a:schemeClr val="accent1"/>
-          </a:effectRef>
-          <a:fontRef idx="minor">
-            <a:schemeClr val="lt1"/>
-          </a:fontRef>
-        </p:style>
-        <p:txBody>
-          <a:bodyPr rtlCol="0" anchor="ctr"/>
-          <a:lstStyle/>
-          <a:p>
-            <a:pPr algn="ctr"/>
-          </a:p>
-        </p:txBody>
-      </p:sp>
-      <p:sp>
-        <p:nvSpPr>
-          <p:cNvPr id="7" name="TextBox 6"/>
-          <p:cNvSpPr txBox="1"/>
-          <p:nvPr/>
-        </p:nvSpPr>
-        <p:spPr>
-          <a:xfrm>
-            <a:off x="594360" y="5769864"/>
-            <a:ext cx="5212080" cy="685800"/>
-          </a:xfrm>
-          <a:prstGeom prst="rect">
-            <a:avLst/>
-          </a:prstGeom>
-          <a:noFill/>
-        </p:spPr>
-        <p:txBody>
-          <a:bodyPr wrap="square" anchor="ctr">
-            <a:spAutoFit/>
-          </a:bodyPr>
-          <a:lstStyle/>
-          <a:p>
-            <a:pPr algn="l">
-              <a:lnSpc>
-                <a:spcPct val="115000"/>
-              </a:lnSpc>
-            </a:pPr>
-            <a:r>
-              <a:rPr sz="1600" b="1">
-                <a:solidFill>
-                  <a:srgbClr val="FFFFFF"/>
-                </a:solidFill>
-                <a:latin typeface="Calibri"/>
-              </a:rPr>
-              <a:t>Total MVP cost: ~₹6,000</a:t>
-            </a:r>
-          </a:p>
-          <a:p>
-            <a:pPr algn="l">
-              <a:lnSpc>
-                <a:spcPct val="115000"/>
-              </a:lnSpc>
-            </a:pPr>
-            <a:r>
-              <a:rPr sz="1600" b="1">
-                <a:solidFill>
-                  <a:srgbClr val="FFFFFF"/>
-                </a:solidFill>
-                <a:latin typeface="Calibri"/>
-              </a:rPr>
-              <a:t>Total Year-1 pilot: ~₹50,000 - 65,000</a:t>
-            </a:r>
-          </a:p>
-        </p:txBody>
-      </p:sp>
-      <p:sp>
-        <p:nvSpPr>
-          <p:cNvPr id="8" name="Rounded Rectangle 7"/>
-          <p:cNvSpPr/>
-          <p:nvPr/>
-        </p:nvSpPr>
-        <p:spPr>
-          <a:xfrm>
-            <a:off x="6172200" y="5715000"/>
-            <a:ext cx="5605272" cy="777240"/>
-          </a:xfrm>
-          <a:prstGeom prst="roundRect">
-            <a:avLst/>
-          </a:prstGeom>
-          <a:solidFill>
-            <a:srgbClr val="F1F8E9"/>
-          </a:solidFill>
-          <a:ln w="12700">
-            <a:solidFill>
-              <a:srgbClr val="43A047"/>
-            </a:solidFill>
-          </a:ln>
-          <a:effectLst/>
-        </p:spPr>
-        <p:style>
-          <a:lnRef idx="1">
-            <a:schemeClr val="accent1"/>
-          </a:lnRef>
-          <a:fillRef idx="3">
-            <a:schemeClr val="accent1"/>
-          </a:fillRef>
-          <a:effectRef idx="2">
-            <a:schemeClr val="accent1"/>
-          </a:effectRef>
-          <a:fontRef idx="minor">
-            <a:schemeClr val="lt1"/>
-          </a:fontRef>
-        </p:style>
-        <p:txBody>
-          <a:bodyPr rtlCol="0" anchor="ctr"/>
-          <a:lstStyle/>
-          <a:p>
-            <a:pPr algn="ctr"/>
-          </a:p>
-        </p:txBody>
-      </p:sp>
-      <p:sp>
-        <p:nvSpPr>
-          <p:cNvPr id="9" name="TextBox 8"/>
-          <p:cNvSpPr txBox="1"/>
-          <p:nvPr/>
-        </p:nvSpPr>
-        <p:spPr>
-          <a:xfrm>
-            <a:off x="6355080" y="5769864"/>
-            <a:ext cx="5303520" cy="685800"/>
-          </a:xfrm>
-          <a:prstGeom prst="rect">
-            <a:avLst/>
-          </a:prstGeom>
-          <a:noFill/>
-        </p:spPr>
-        <p:txBody>
-          <a:bodyPr wrap="square" anchor="ctr">
-            <a:spAutoFit/>
-          </a:bodyPr>
-          <a:lstStyle/>
-          <a:p>
-            <a:pPr algn="l">
-              <a:lnSpc>
-                <a:spcPct val="110000"/>
-              </a:lnSpc>
-            </a:pPr>
-            <a:r>
-              <a:rPr sz="1300" b="0">
-                <a:solidFill>
-                  <a:srgbClr val="1B5E20"/>
-                </a:solidFill>
-                <a:latin typeface="Calibri"/>
-              </a:rPr>
-              <a:t>Because there is no hardware, there is no per-unit cost - every rupee goes into software that scales to any number of cars.</a:t>
-            </a:r>
-          </a:p>
-        </p:txBody>
-      </p:sp>
-    </p:spTree>
-  </p:cSld>
-  <p:clrMapOvr>
-    <a:masterClrMapping/>
-  </p:clrMapOvr>
-</p:sld>
-</file>
-
-<file path=ppt/slides/slide9.xml><?xml version="1.0" encoding="utf-8"?>
 <p:sld xmlns:a="http://schemas.openxmlformats.org/drawingml/2006/main" xmlns:p="http://schemas.openxmlformats.org/presentationml/2006/main" xmlns:r="http://schemas.openxmlformats.org/officeDocument/2006/relationships">
   <p:cSld>
     <p:spTree>
@@ -10058,6 +5978,4250 @@
 </p:sld>
 </file>
 
+<file path=ppt/slides/slide5.xml><?xml version="1.0" encoding="utf-8"?>
+<p:sld xmlns:a="http://schemas.openxmlformats.org/drawingml/2006/main" xmlns:p="http://schemas.openxmlformats.org/presentationml/2006/main" xmlns:r="http://schemas.openxmlformats.org/officeDocument/2006/relationships">
+  <p:cSld>
+    <p:spTree>
+      <p:nvGrpSpPr>
+        <p:cNvPr id="1" name=""/>
+        <p:cNvGrpSpPr/>
+        <p:nvPr/>
+      </p:nvGrpSpPr>
+      <p:grpSpPr/>
+      <p:sp>
+        <p:nvSpPr>
+          <p:cNvPr id="2" name="Rectangle 1"/>
+          <p:cNvSpPr/>
+          <p:nvPr/>
+        </p:nvSpPr>
+        <p:spPr>
+          <a:xfrm>
+            <a:off x="0" y="0"/>
+            <a:ext cx="12191695" cy="914400"/>
+          </a:xfrm>
+          <a:prstGeom prst="rect">
+            <a:avLst/>
+          </a:prstGeom>
+          <a:solidFill>
+            <a:srgbClr val="1B5E20"/>
+          </a:solidFill>
+          <a:ln>
+            <a:noFill/>
+          </a:ln>
+          <a:effectLst/>
+        </p:spPr>
+        <p:style>
+          <a:lnRef idx="1">
+            <a:schemeClr val="accent1"/>
+          </a:lnRef>
+          <a:fillRef idx="3">
+            <a:schemeClr val="accent1"/>
+          </a:fillRef>
+          <a:effectRef idx="2">
+            <a:schemeClr val="accent1"/>
+          </a:effectRef>
+          <a:fontRef idx="minor">
+            <a:schemeClr val="lt1"/>
+          </a:fontRef>
+        </p:style>
+        <p:txBody>
+          <a:bodyPr rtlCol="0" anchor="ctr"/>
+          <a:lstStyle/>
+          <a:p>
+            <a:pPr algn="ctr"/>
+          </a:p>
+        </p:txBody>
+      </p:sp>
+      <p:sp>
+        <p:nvSpPr>
+          <p:cNvPr id="3" name="TextBox 2"/>
+          <p:cNvSpPr txBox="1"/>
+          <p:nvPr/>
+        </p:nvSpPr>
+        <p:spPr>
+          <a:xfrm>
+            <a:off x="502920" y="118872"/>
+            <a:ext cx="11185855" cy="685800"/>
+          </a:xfrm>
+          <a:prstGeom prst="rect">
+            <a:avLst/>
+          </a:prstGeom>
+          <a:noFill/>
+        </p:spPr>
+        <p:txBody>
+          <a:bodyPr wrap="square" anchor="ctr">
+            <a:spAutoFit/>
+          </a:bodyPr>
+          <a:lstStyle/>
+          <a:p>
+            <a:pPr algn="l">
+              <a:lnSpc>
+                <a:spcPct val="100000"/>
+              </a:lnSpc>
+            </a:pPr>
+            <a:r>
+              <a:rPr sz="3000" b="1">
+                <a:solidFill>
+                  <a:srgbClr val="FFFFFF"/>
+                </a:solidFill>
+                <a:latin typeface="Calibri"/>
+              </a:rPr>
+              <a:t>Existing Solutions and How Ours Is Different</a:t>
+            </a:r>
+          </a:p>
+        </p:txBody>
+      </p:sp>
+      <p:sp>
+        <p:nvSpPr>
+          <p:cNvPr id="4" name="Rectangle 3"/>
+          <p:cNvSpPr/>
+          <p:nvPr/>
+        </p:nvSpPr>
+        <p:spPr>
+          <a:xfrm>
+            <a:off x="0" y="914400"/>
+            <a:ext cx="12191695" cy="54864"/>
+          </a:xfrm>
+          <a:prstGeom prst="rect">
+            <a:avLst/>
+          </a:prstGeom>
+          <a:solidFill>
+            <a:srgbClr val="F9A825"/>
+          </a:solidFill>
+          <a:ln>
+            <a:noFill/>
+          </a:ln>
+          <a:effectLst/>
+        </p:spPr>
+        <p:style>
+          <a:lnRef idx="1">
+            <a:schemeClr val="accent1"/>
+          </a:lnRef>
+          <a:fillRef idx="3">
+            <a:schemeClr val="accent1"/>
+          </a:fillRef>
+          <a:effectRef idx="2">
+            <a:schemeClr val="accent1"/>
+          </a:effectRef>
+          <a:fontRef idx="minor">
+            <a:schemeClr val="lt1"/>
+          </a:fontRef>
+        </p:style>
+        <p:txBody>
+          <a:bodyPr rtlCol="0" anchor="ctr"/>
+          <a:lstStyle/>
+          <a:p>
+            <a:pPr algn="ctr"/>
+          </a:p>
+        </p:txBody>
+      </p:sp>
+      <p:graphicFrame>
+        <p:nvGraphicFramePr>
+          <p:cNvPr id="5" name="Table 4"/>
+          <p:cNvGraphicFramePr>
+            <a:graphicFrameLocks noGrp="1"/>
+          </p:cNvGraphicFramePr>
+          <p:nvPr/>
+        </p:nvGraphicFramePr>
+        <p:xfrm>
+          <a:off x="411480" y="1234440"/>
+          <a:ext cx="11365992" cy="4965192"/>
+        </p:xfrm>
+        <a:graphic>
+          <a:graphicData uri="http://schemas.openxmlformats.org/drawingml/2006/table">
+            <a:tbl>
+              <a:tblPr firstRow="1" bandRow="1">
+                <a:tableStyleId>{5C22544A-7EE6-4342-B048-85BDC9FD1C3A}</a:tableStyleId>
+              </a:tblPr>
+              <a:tblGrid>
+                <a:gridCol w="2377440"/>
+                <a:gridCol w="2834640"/>
+                <a:gridCol w="3108960"/>
+                <a:gridCol w="3044952"/>
+              </a:tblGrid>
+              <a:tr h="502920">
+                <a:tc>
+                  <a:txBody>
+                    <a:bodyPr wrap="square"/>
+                    <a:lstStyle/>
+                    <a:p>
+                      <a:r>
+                        <a:rPr sz="1400" b="1">
+                          <a:solidFill>
+                            <a:srgbClr val="FFFFFF"/>
+                          </a:solidFill>
+                          <a:latin typeface="Calibri"/>
+                        </a:rPr>
+                        <a:t>Existing solution</a:t>
+                      </a:r>
+                    </a:p>
+                  </a:txBody>
+                  <a:tcPr marL="82296" marR="82296" marT="45720" marB="45720" anchor="ctr">
+                    <a:solidFill>
+                      <a:srgbClr val="1B5E20"/>
+                    </a:solidFill>
+                  </a:tcPr>
+                </a:tc>
+                <a:tc>
+                  <a:txBody>
+                    <a:bodyPr wrap="square"/>
+                    <a:lstStyle/>
+                    <a:p>
+                      <a:r>
+                        <a:rPr sz="1400" b="1">
+                          <a:solidFill>
+                            <a:srgbClr val="FFFFFF"/>
+                          </a:solidFill>
+                          <a:latin typeface="Calibri"/>
+                        </a:rPr>
+                        <a:t>What it does</a:t>
+                      </a:r>
+                    </a:p>
+                  </a:txBody>
+                  <a:tcPr marL="82296" marR="82296" marT="45720" marB="45720" anchor="ctr">
+                    <a:solidFill>
+                      <a:srgbClr val="1B5E20"/>
+                    </a:solidFill>
+                  </a:tcPr>
+                </a:tc>
+                <a:tc>
+                  <a:txBody>
+                    <a:bodyPr wrap="square"/>
+                    <a:lstStyle/>
+                    <a:p>
+                      <a:r>
+                        <a:rPr sz="1400" b="1">
+                          <a:solidFill>
+                            <a:srgbClr val="FFFFFF"/>
+                          </a:solidFill>
+                          <a:latin typeface="Calibri"/>
+                        </a:rPr>
+                        <a:t>Its limitation</a:t>
+                      </a:r>
+                    </a:p>
+                  </a:txBody>
+                  <a:tcPr marL="82296" marR="82296" marT="45720" marB="45720" anchor="ctr">
+                    <a:solidFill>
+                      <a:srgbClr val="1B5E20"/>
+                    </a:solidFill>
+                  </a:tcPr>
+                </a:tc>
+                <a:tc>
+                  <a:txBody>
+                    <a:bodyPr wrap="square"/>
+                    <a:lstStyle/>
+                    <a:p>
+                      <a:r>
+                        <a:rPr sz="1400" b="1">
+                          <a:solidFill>
+                            <a:srgbClr val="FFFFFF"/>
+                          </a:solidFill>
+                          <a:latin typeface="Calibri"/>
+                        </a:rPr>
+                        <a:t>CarbonTrace</a:t>
+                      </a:r>
+                    </a:p>
+                  </a:txBody>
+                  <a:tcPr marL="82296" marR="82296" marT="45720" marB="45720" anchor="ctr">
+                    <a:solidFill>
+                      <a:srgbClr val="1B5E20"/>
+                    </a:solidFill>
+                  </a:tcPr>
+                </a:tc>
+              </a:tr>
+              <a:tr h="1115568">
+                <a:tc>
+                  <a:txBody>
+                    <a:bodyPr wrap="square"/>
+                    <a:lstStyle/>
+                    <a:p>
+                      <a:r>
+                        <a:rPr sz="1300" b="1">
+                          <a:solidFill>
+                            <a:srgbClr val="212121"/>
+                          </a:solidFill>
+                          <a:latin typeface="Calibri"/>
+                        </a:rPr>
+                        <a:t>PUC test centres</a:t>
+                      </a:r>
+                    </a:p>
+                  </a:txBody>
+                  <a:tcPr marL="82296" marR="82296" marT="45720" marB="45720" anchor="ctr">
+                    <a:solidFill>
+                      <a:srgbClr val="FFFFFF"/>
+                    </a:solidFill>
+                  </a:tcPr>
+                </a:tc>
+                <a:tc>
+                  <a:txBody>
+                    <a:bodyPr wrap="square"/>
+                    <a:lstStyle/>
+                    <a:p>
+                      <a:r>
+                        <a:rPr sz="1300" b="0">
+                          <a:solidFill>
+                            <a:srgbClr val="212121"/>
+                          </a:solidFill>
+                          <a:latin typeface="Calibri"/>
+                        </a:rPr>
+                        <a:t>Certified tailpipe test once or twice a year</a:t>
+                      </a:r>
+                    </a:p>
+                  </a:txBody>
+                  <a:tcPr marL="82296" marR="82296" marT="45720" marB="45720" anchor="ctr">
+                    <a:solidFill>
+                      <a:srgbClr val="FFFFFF"/>
+                    </a:solidFill>
+                  </a:tcPr>
+                </a:tc>
+                <a:tc>
+                  <a:txBody>
+                    <a:bodyPr wrap="square"/>
+                    <a:lstStyle/>
+                    <a:p>
+                      <a:r>
+                        <a:rPr sz="1300" b="0">
+                          <a:solidFill>
+                            <a:srgbClr val="212121"/>
+                          </a:solidFill>
+                          <a:latin typeface="Calibri"/>
+                        </a:rPr>
+                        <a:t>A snapshot only; faults pollute unnoticed for months between tests</a:t>
+                      </a:r>
+                    </a:p>
+                  </a:txBody>
+                  <a:tcPr marL="82296" marR="82296" marT="45720" marB="45720" anchor="ctr">
+                    <a:solidFill>
+                      <a:srgbClr val="FFFFFF"/>
+                    </a:solidFill>
+                  </a:tcPr>
+                </a:tc>
+                <a:tc>
+                  <a:txBody>
+                    <a:bodyPr wrap="square"/>
+                    <a:lstStyle/>
+                    <a:p>
+                      <a:r>
+                        <a:rPr sz="1300" b="1">
+                          <a:solidFill>
+                            <a:srgbClr val="1B5E20"/>
+                          </a:solidFill>
+                          <a:latin typeface="Calibri"/>
+                        </a:rPr>
+                        <a:t>Continuous monitoring every single trip; predicts PUC failure early</a:t>
+                      </a:r>
+                    </a:p>
+                  </a:txBody>
+                  <a:tcPr marL="82296" marR="82296" marT="45720" marB="45720" anchor="ctr">
+                    <a:solidFill>
+                      <a:srgbClr val="F1F8E9"/>
+                    </a:solidFill>
+                  </a:tcPr>
+                </a:tc>
+              </a:tr>
+              <a:tr h="1115568">
+                <a:tc>
+                  <a:txBody>
+                    <a:bodyPr wrap="square"/>
+                    <a:lstStyle/>
+                    <a:p>
+                      <a:r>
+                        <a:rPr sz="1300" b="1">
+                          <a:solidFill>
+                            <a:srgbClr val="212121"/>
+                          </a:solidFill>
+                          <a:latin typeface="Calibri"/>
+                        </a:rPr>
+                        <a:t>OBD-II apps (Torque, Carista)</a:t>
+                      </a:r>
+                    </a:p>
+                  </a:txBody>
+                  <a:tcPr marL="82296" marR="82296" marT="45720" marB="45720" anchor="ctr">
+                    <a:solidFill>
+                      <a:srgbClr val="FFFFFF"/>
+                    </a:solidFill>
+                  </a:tcPr>
+                </a:tc>
+                <a:tc>
+                  <a:txBody>
+                    <a:bodyPr wrap="square"/>
+                    <a:lstStyle/>
+                    <a:p>
+                      <a:r>
+                        <a:rPr sz="1300" b="0">
+                          <a:solidFill>
+                            <a:srgbClr val="212121"/>
+                          </a:solidFill>
+                          <a:latin typeface="Calibri"/>
+                        </a:rPr>
+                        <a:t>Read live engine data from the diagnostics port</a:t>
+                      </a:r>
+                    </a:p>
+                  </a:txBody>
+                  <a:tcPr marL="82296" marR="82296" marT="45720" marB="45720" anchor="ctr">
+                    <a:solidFill>
+                      <a:srgbClr val="FFFFFF"/>
+                    </a:solidFill>
+                  </a:tcPr>
+                </a:tc>
+                <a:tc>
+                  <a:txBody>
+                    <a:bodyPr wrap="square"/>
+                    <a:lstStyle/>
+                    <a:p>
+                      <a:r>
+                        <a:rPr sz="1300" b="0">
+                          <a:solidFill>
+                            <a:srgbClr val="212121"/>
+                          </a:solidFill>
+                          <a:latin typeface="Calibri"/>
+                        </a:rPr>
+                        <a:t>Need a hardware dongle plugged into the car</a:t>
+                      </a:r>
+                    </a:p>
+                  </a:txBody>
+                  <a:tcPr marL="82296" marR="82296" marT="45720" marB="45720" anchor="ctr">
+                    <a:solidFill>
+                      <a:srgbClr val="FFFFFF"/>
+                    </a:solidFill>
+                  </a:tcPr>
+                </a:tc>
+                <a:tc>
+                  <a:txBody>
+                    <a:bodyPr wrap="square"/>
+                    <a:lstStyle/>
+                    <a:p>
+                      <a:r>
+                        <a:rPr sz="1300" b="1">
+                          <a:solidFill>
+                            <a:srgbClr val="1B5E20"/>
+                          </a:solidFill>
+                          <a:latin typeface="Calibri"/>
+                        </a:rPr>
+                        <a:t>Zero hardware - works with just the phone the owner already has</a:t>
+                      </a:r>
+                    </a:p>
+                  </a:txBody>
+                  <a:tcPr marL="82296" marR="82296" marT="45720" marB="45720" anchor="ctr">
+                    <a:solidFill>
+                      <a:srgbClr val="F1F8E9"/>
+                    </a:solidFill>
+                  </a:tcPr>
+                </a:tc>
+              </a:tr>
+              <a:tr h="1115568">
+                <a:tc>
+                  <a:txBody>
+                    <a:bodyPr wrap="square"/>
+                    <a:lstStyle/>
+                    <a:p>
+                      <a:r>
+                        <a:rPr sz="1300" b="1">
+                          <a:solidFill>
+                            <a:srgbClr val="212121"/>
+                          </a:solidFill>
+                          <a:latin typeface="Calibri"/>
+                        </a:rPr>
+                        <a:t>Manufacturer apps (BlueLink, iConnect)</a:t>
+                      </a:r>
+                    </a:p>
+                  </a:txBody>
+                  <a:tcPr marL="82296" marR="82296" marT="45720" marB="45720" anchor="ctr">
+                    <a:solidFill>
+                      <a:srgbClr val="FFFFFF"/>
+                    </a:solidFill>
+                  </a:tcPr>
+                </a:tc>
+                <a:tc>
+                  <a:txBody>
+                    <a:bodyPr wrap="square"/>
+                    <a:lstStyle/>
+                    <a:p>
+                      <a:r>
+                        <a:rPr sz="1300" b="0">
+                          <a:solidFill>
+                            <a:srgbClr val="212121"/>
+                          </a:solidFill>
+                          <a:latin typeface="Calibri"/>
+                        </a:rPr>
+                        <a:t>Connected-car stats for one brand's new models</a:t>
+                      </a:r>
+                    </a:p>
+                  </a:txBody>
+                  <a:tcPr marL="82296" marR="82296" marT="45720" marB="45720" anchor="ctr">
+                    <a:solidFill>
+                      <a:srgbClr val="FFFFFF"/>
+                    </a:solidFill>
+                  </a:tcPr>
+                </a:tc>
+                <a:tc>
+                  <a:txBody>
+                    <a:bodyPr wrap="square"/>
+                    <a:lstStyle/>
+                    <a:p>
+                      <a:r>
+                        <a:rPr sz="1300" b="0">
+                          <a:solidFill>
+                            <a:srgbClr val="212121"/>
+                          </a:solidFill>
+                          <a:latin typeface="Calibri"/>
+                        </a:rPr>
+                        <a:t>Brand-locked, recent cars only, no emission analytics</a:t>
+                      </a:r>
+                    </a:p>
+                  </a:txBody>
+                  <a:tcPr marL="82296" marR="82296" marT="45720" marB="45720" anchor="ctr">
+                    <a:solidFill>
+                      <a:srgbClr val="FFFFFF"/>
+                    </a:solidFill>
+                  </a:tcPr>
+                </a:tc>
+                <a:tc>
+                  <a:txBody>
+                    <a:bodyPr wrap="square"/>
+                    <a:lstStyle/>
+                    <a:p>
+                      <a:r>
+                        <a:rPr sz="1300" b="1">
+                          <a:solidFill>
+                            <a:srgbClr val="1B5E20"/>
+                          </a:solidFill>
+                          <a:latin typeface="Calibri"/>
+                        </a:rPr>
+                        <a:t>Works across brands and car ages; emission-focused analytics</a:t>
+                      </a:r>
+                    </a:p>
+                  </a:txBody>
+                  <a:tcPr marL="82296" marR="82296" marT="45720" marB="45720" anchor="ctr">
+                    <a:solidFill>
+                      <a:srgbClr val="F1F8E9"/>
+                    </a:solidFill>
+                  </a:tcPr>
+                </a:tc>
+              </a:tr>
+              <a:tr h="1115568">
+                <a:tc>
+                  <a:txBody>
+                    <a:bodyPr wrap="square"/>
+                    <a:lstStyle/>
+                    <a:p>
+                      <a:r>
+                        <a:rPr sz="1300" b="1">
+                          <a:solidFill>
+                            <a:srgbClr val="212121"/>
+                          </a:solidFill>
+                          <a:latin typeface="Calibri"/>
+                        </a:rPr>
+                        <a:t>Fuel log apps (Fuelio, Drivvo)</a:t>
+                      </a:r>
+                    </a:p>
+                  </a:txBody>
+                  <a:tcPr marL="82296" marR="82296" marT="45720" marB="45720" anchor="ctr">
+                    <a:solidFill>
+                      <a:srgbClr val="FFFFFF"/>
+                    </a:solidFill>
+                  </a:tcPr>
+                </a:tc>
+                <a:tc>
+                  <a:txBody>
+                    <a:bodyPr wrap="square"/>
+                    <a:lstStyle/>
+                    <a:p>
+                      <a:r>
+                        <a:rPr sz="1300" b="0">
+                          <a:solidFill>
+                            <a:srgbClr val="212121"/>
+                          </a:solidFill>
+                          <a:latin typeface="Calibri"/>
+                        </a:rPr>
+                        <a:t>Track mileage from manual fuel entries</a:t>
+                      </a:r>
+                    </a:p>
+                  </a:txBody>
+                  <a:tcPr marL="82296" marR="82296" marT="45720" marB="45720" anchor="ctr">
+                    <a:solidFill>
+                      <a:srgbClr val="FFFFFF"/>
+                    </a:solidFill>
+                  </a:tcPr>
+                </a:tc>
+                <a:tc>
+                  <a:txBody>
+                    <a:bodyPr wrap="square"/>
+                    <a:lstStyle/>
+                    <a:p>
+                      <a:r>
+                        <a:rPr sz="1300" b="0">
+                          <a:solidFill>
+                            <a:srgbClr val="212121"/>
+                          </a:solidFill>
+                          <a:latin typeface="Calibri"/>
+                        </a:rPr>
+                        <a:t>Manual entry, no emissions, no fault detection</a:t>
+                      </a:r>
+                    </a:p>
+                  </a:txBody>
+                  <a:tcPr marL="82296" marR="82296" marT="45720" marB="45720" anchor="ctr">
+                    <a:solidFill>
+                      <a:srgbClr val="FFFFFF"/>
+                    </a:solidFill>
+                  </a:tcPr>
+                </a:tc>
+                <a:tc>
+                  <a:txBody>
+                    <a:bodyPr wrap="square"/>
+                    <a:lstStyle/>
+                    <a:p>
+                      <a:r>
+                        <a:rPr sz="1300" b="1">
+                          <a:solidFill>
+                            <a:srgbClr val="1B5E20"/>
+                          </a:solidFill>
+                          <a:latin typeface="Calibri"/>
+                        </a:rPr>
+                        <a:t>Fully automatic trip capture with CO2 estimates and anomaly alerts</a:t>
+                      </a:r>
+                    </a:p>
+                  </a:txBody>
+                  <a:tcPr marL="82296" marR="82296" marT="45720" marB="45720" anchor="ctr">
+                    <a:solidFill>
+                      <a:srgbClr val="F1F8E9"/>
+                    </a:solidFill>
+                  </a:tcPr>
+                </a:tc>
+              </a:tr>
+            </a:tbl>
+          </a:graphicData>
+        </a:graphic>
+      </p:graphicFrame>
+    </p:spTree>
+  </p:cSld>
+  <p:clrMapOvr>
+    <a:masterClrMapping/>
+  </p:clrMapOvr>
+</p:sld>
+</file>
+
+<file path=ppt/slides/slide6.xml><?xml version="1.0" encoding="utf-8"?>
+<p:sld xmlns:a="http://schemas.openxmlformats.org/drawingml/2006/main" xmlns:p="http://schemas.openxmlformats.org/presentationml/2006/main" xmlns:r="http://schemas.openxmlformats.org/officeDocument/2006/relationships">
+  <p:cSld>
+    <p:spTree>
+      <p:nvGrpSpPr>
+        <p:cNvPr id="1" name=""/>
+        <p:cNvGrpSpPr/>
+        <p:nvPr/>
+      </p:nvGrpSpPr>
+      <p:grpSpPr/>
+      <p:sp>
+        <p:nvSpPr>
+          <p:cNvPr id="2" name="Rectangle 1"/>
+          <p:cNvSpPr/>
+          <p:nvPr/>
+        </p:nvSpPr>
+        <p:spPr>
+          <a:xfrm>
+            <a:off x="0" y="0"/>
+            <a:ext cx="12191695" cy="914400"/>
+          </a:xfrm>
+          <a:prstGeom prst="rect">
+            <a:avLst/>
+          </a:prstGeom>
+          <a:solidFill>
+            <a:srgbClr val="1B5E20"/>
+          </a:solidFill>
+          <a:ln>
+            <a:noFill/>
+          </a:ln>
+          <a:effectLst/>
+        </p:spPr>
+        <p:style>
+          <a:lnRef idx="1">
+            <a:schemeClr val="accent1"/>
+          </a:lnRef>
+          <a:fillRef idx="3">
+            <a:schemeClr val="accent1"/>
+          </a:fillRef>
+          <a:effectRef idx="2">
+            <a:schemeClr val="accent1"/>
+          </a:effectRef>
+          <a:fontRef idx="minor">
+            <a:schemeClr val="lt1"/>
+          </a:fontRef>
+        </p:style>
+        <p:txBody>
+          <a:bodyPr rtlCol="0" anchor="ctr"/>
+          <a:lstStyle/>
+          <a:p>
+            <a:pPr algn="ctr"/>
+          </a:p>
+        </p:txBody>
+      </p:sp>
+      <p:sp>
+        <p:nvSpPr>
+          <p:cNvPr id="3" name="TextBox 2"/>
+          <p:cNvSpPr txBox="1"/>
+          <p:nvPr/>
+        </p:nvSpPr>
+        <p:spPr>
+          <a:xfrm>
+            <a:off x="502920" y="118872"/>
+            <a:ext cx="11185855" cy="685800"/>
+          </a:xfrm>
+          <a:prstGeom prst="rect">
+            <a:avLst/>
+          </a:prstGeom>
+          <a:noFill/>
+        </p:spPr>
+        <p:txBody>
+          <a:bodyPr wrap="square" anchor="ctr">
+            <a:spAutoFit/>
+          </a:bodyPr>
+          <a:lstStyle/>
+          <a:p>
+            <a:pPr algn="l">
+              <a:lnSpc>
+                <a:spcPct val="100000"/>
+              </a:lnSpc>
+            </a:pPr>
+            <a:r>
+              <a:rPr sz="3000" b="1">
+                <a:solidFill>
+                  <a:srgbClr val="FFFFFF"/>
+                </a:solidFill>
+                <a:latin typeface="Calibri"/>
+              </a:rPr>
+              <a:t>Features We Offer</a:t>
+            </a:r>
+          </a:p>
+        </p:txBody>
+      </p:sp>
+      <p:sp>
+        <p:nvSpPr>
+          <p:cNvPr id="4" name="Rectangle 3"/>
+          <p:cNvSpPr/>
+          <p:nvPr/>
+        </p:nvSpPr>
+        <p:spPr>
+          <a:xfrm>
+            <a:off x="0" y="914400"/>
+            <a:ext cx="12191695" cy="54864"/>
+          </a:xfrm>
+          <a:prstGeom prst="rect">
+            <a:avLst/>
+          </a:prstGeom>
+          <a:solidFill>
+            <a:srgbClr val="F9A825"/>
+          </a:solidFill>
+          <a:ln>
+            <a:noFill/>
+          </a:ln>
+          <a:effectLst/>
+        </p:spPr>
+        <p:style>
+          <a:lnRef idx="1">
+            <a:schemeClr val="accent1"/>
+          </a:lnRef>
+          <a:fillRef idx="3">
+            <a:schemeClr val="accent1"/>
+          </a:fillRef>
+          <a:effectRef idx="2">
+            <a:schemeClr val="accent1"/>
+          </a:effectRef>
+          <a:fontRef idx="minor">
+            <a:schemeClr val="lt1"/>
+          </a:fontRef>
+        </p:style>
+        <p:txBody>
+          <a:bodyPr rtlCol="0" anchor="ctr"/>
+          <a:lstStyle/>
+          <a:p>
+            <a:pPr algn="ctr"/>
+          </a:p>
+        </p:txBody>
+      </p:sp>
+      <p:sp>
+        <p:nvSpPr>
+          <p:cNvPr id="5" name="TextBox 4"/>
+          <p:cNvSpPr txBox="1"/>
+          <p:nvPr/>
+        </p:nvSpPr>
+        <p:spPr>
+          <a:xfrm>
+            <a:off x="502920" y="1325880"/>
+            <a:ext cx="5486400" cy="5120640"/>
+          </a:xfrm>
+          <a:prstGeom prst="rect">
+            <a:avLst/>
+          </a:prstGeom>
+          <a:noFill/>
+        </p:spPr>
+        <p:txBody>
+          <a:bodyPr wrap="square">
+            <a:spAutoFit/>
+          </a:bodyPr>
+          <a:lstStyle/>
+          <a:p>
+            <a:pPr>
+              <a:lnSpc>
+                <a:spcPct val="108000"/>
+              </a:lnSpc>
+              <a:spcAft>
+                <a:spcPts val="1400"/>
+              </a:spcAft>
+            </a:pPr>
+            <a:r>
+              <a:rPr sz="1600" b="1">
+                <a:solidFill>
+                  <a:srgbClr val="43A047"/>
+                </a:solidFill>
+                <a:latin typeface="Calibri"/>
+              </a:rPr>
+              <a:t>▸ </a:t>
+            </a:r>
+            <a:r>
+              <a:rPr sz="1600" b="1">
+                <a:solidFill>
+                  <a:srgbClr val="212121"/>
+                </a:solidFill>
+                <a:latin typeface="Calibri"/>
+              </a:rPr>
+              <a:t>Auto-start with the car</a:t>
+            </a:r>
+            <a:r>
+              <a:rPr sz="1600">
+                <a:solidFill>
+                  <a:srgbClr val="212121"/>
+                </a:solidFill>
+                <a:latin typeface="Calibri"/>
+              </a:rPr>
+              <a:t> — app wakes on car Bluetooth connection or driving motion and records the trip hands-free.</a:t>
+            </a:r>
+          </a:p>
+          <a:p>
+            <a:pPr>
+              <a:lnSpc>
+                <a:spcPct val="108000"/>
+              </a:lnSpc>
+              <a:spcAft>
+                <a:spcPts val="1400"/>
+              </a:spcAft>
+            </a:pPr>
+            <a:r>
+              <a:rPr sz="1600" b="1">
+                <a:solidFill>
+                  <a:srgbClr val="43A047"/>
+                </a:solidFill>
+                <a:latin typeface="Calibri"/>
+              </a:rPr>
+              <a:t>▸ </a:t>
+            </a:r>
+            <a:r>
+              <a:rPr sz="1600" b="1">
+                <a:solidFill>
+                  <a:srgbClr val="212121"/>
+                </a:solidFill>
+                <a:latin typeface="Calibri"/>
+              </a:rPr>
+              <a:t>Continuous CO2 records</a:t>
+            </a:r>
+            <a:r>
+              <a:rPr sz="1600">
+                <a:solidFill>
+                  <a:srgbClr val="212121"/>
+                </a:solidFill>
+                <a:latin typeface="Calibri"/>
+              </a:rPr>
+              <a:t> — every trip logged with estimated CO2, distance and g/km - stored offline first, synced to the cloud.</a:t>
+            </a:r>
+          </a:p>
+          <a:p>
+            <a:pPr>
+              <a:lnSpc>
+                <a:spcPct val="108000"/>
+              </a:lnSpc>
+              <a:spcAft>
+                <a:spcPts val="1400"/>
+              </a:spcAft>
+            </a:pPr>
+            <a:r>
+              <a:rPr sz="1600" b="1">
+                <a:solidFill>
+                  <a:srgbClr val="43A047"/>
+                </a:solidFill>
+                <a:latin typeface="Calibri"/>
+              </a:rPr>
+              <a:t>▸ </a:t>
+            </a:r>
+            <a:r>
+              <a:rPr sz="1600" b="1">
+                <a:solidFill>
+                  <a:srgbClr val="212121"/>
+                </a:solidFill>
+                <a:latin typeface="Calibri"/>
+              </a:rPr>
+              <a:t>Emission trends</a:t>
+            </a:r>
+            <a:r>
+              <a:rPr sz="1600">
+                <a:solidFill>
+                  <a:srgbClr val="212121"/>
+                </a:solidFill>
+                <a:latin typeface="Calibri"/>
+              </a:rPr>
+              <a:t> — daily, weekly and monthly CO2 totals with the car's g/km curve over time.</a:t>
+            </a:r>
+          </a:p>
+          <a:p>
+            <a:pPr>
+              <a:lnSpc>
+                <a:spcPct val="108000"/>
+              </a:lnSpc>
+              <a:spcAft>
+                <a:spcPts val="1400"/>
+              </a:spcAft>
+            </a:pPr>
+            <a:r>
+              <a:rPr sz="1600" b="1">
+                <a:solidFill>
+                  <a:srgbClr val="43A047"/>
+                </a:solidFill>
+                <a:latin typeface="Calibri"/>
+              </a:rPr>
+              <a:t>▸ </a:t>
+            </a:r>
+            <a:r>
+              <a:rPr sz="1600" b="1">
+                <a:solidFill>
+                  <a:srgbClr val="212121"/>
+                </a:solidFill>
+                <a:latin typeface="Calibri"/>
+              </a:rPr>
+              <a:t>Abnormal-emission alerts</a:t>
+            </a:r>
+            <a:r>
+              <a:rPr sz="1600">
+                <a:solidFill>
+                  <a:srgbClr val="212121"/>
+                </a:solidFill>
+                <a:latin typeface="Calibri"/>
+              </a:rPr>
+              <a:t> — drift above the car's own baseline triggers a 'service recommended' notification with the estimated rise.</a:t>
+            </a:r>
+          </a:p>
+        </p:txBody>
+      </p:sp>
+      <p:sp>
+        <p:nvSpPr>
+          <p:cNvPr id="6" name="TextBox 5"/>
+          <p:cNvSpPr txBox="1"/>
+          <p:nvPr/>
+        </p:nvSpPr>
+        <p:spPr>
+          <a:xfrm>
+            <a:off x="6355080" y="1325880"/>
+            <a:ext cx="5486400" cy="5120640"/>
+          </a:xfrm>
+          <a:prstGeom prst="rect">
+            <a:avLst/>
+          </a:prstGeom>
+          <a:noFill/>
+        </p:spPr>
+        <p:txBody>
+          <a:bodyPr wrap="square">
+            <a:spAutoFit/>
+          </a:bodyPr>
+          <a:lstStyle/>
+          <a:p>
+            <a:pPr>
+              <a:lnSpc>
+                <a:spcPct val="108000"/>
+              </a:lnSpc>
+              <a:spcAft>
+                <a:spcPts val="1400"/>
+              </a:spcAft>
+            </a:pPr>
+            <a:r>
+              <a:rPr sz="1600" b="1">
+                <a:solidFill>
+                  <a:srgbClr val="43A047"/>
+                </a:solidFill>
+                <a:latin typeface="Calibri"/>
+              </a:rPr>
+              <a:t>▸ </a:t>
+            </a:r>
+            <a:r>
+              <a:rPr sz="1600" b="1">
+                <a:solidFill>
+                  <a:srgbClr val="212121"/>
+                </a:solidFill>
+                <a:latin typeface="Calibri"/>
+              </a:rPr>
+              <a:t>PUC failure prediction</a:t>
+            </a:r>
+            <a:r>
+              <a:rPr sz="1600">
+                <a:solidFill>
+                  <a:srgbClr val="212121"/>
+                </a:solidFill>
+                <a:latin typeface="Calibri"/>
+              </a:rPr>
+              <a:t> — 'know before you fail' - a risk score for the next emission test so servicing happens first.</a:t>
+            </a:r>
+          </a:p>
+          <a:p>
+            <a:pPr>
+              <a:lnSpc>
+                <a:spcPct val="108000"/>
+              </a:lnSpc>
+              <a:spcAft>
+                <a:spcPts val="1400"/>
+              </a:spcAft>
+            </a:pPr>
+            <a:r>
+              <a:rPr sz="1600" b="1">
+                <a:solidFill>
+                  <a:srgbClr val="43A047"/>
+                </a:solidFill>
+                <a:latin typeface="Calibri"/>
+              </a:rPr>
+              <a:t>▸ </a:t>
+            </a:r>
+            <a:r>
+              <a:rPr sz="1600" b="1">
+                <a:solidFill>
+                  <a:srgbClr val="212121"/>
+                </a:solidFill>
+                <a:latin typeface="Calibri"/>
+              </a:rPr>
+              <a:t>Driving-style insights</a:t>
+            </a:r>
+            <a:r>
+              <a:rPr sz="1600">
+                <a:solidFill>
+                  <a:srgbClr val="212121"/>
+                </a:solidFill>
+                <a:latin typeface="Calibri"/>
+              </a:rPr>
+              <a:t> — idling, harsh acceleration and speed patterns that raise emissions, with tips to cut them.</a:t>
+            </a:r>
+          </a:p>
+          <a:p>
+            <a:pPr>
+              <a:lnSpc>
+                <a:spcPct val="108000"/>
+              </a:lnSpc>
+              <a:spcAft>
+                <a:spcPts val="1400"/>
+              </a:spcAft>
+            </a:pPr>
+            <a:r>
+              <a:rPr sz="1600" b="1">
+                <a:solidFill>
+                  <a:srgbClr val="43A047"/>
+                </a:solidFill>
+                <a:latin typeface="Calibri"/>
+              </a:rPr>
+              <a:t>▸ </a:t>
+            </a:r>
+            <a:r>
+              <a:rPr sz="1600" b="1">
+                <a:solidFill>
+                  <a:srgbClr val="212121"/>
+                </a:solidFill>
+                <a:latin typeface="Calibri"/>
+              </a:rPr>
+              <a:t>Works on any car</a:t>
+            </a:r>
+            <a:r>
+              <a:rPr sz="1600">
+                <a:solidFill>
+                  <a:srgbClr val="212121"/>
+                </a:solidFill>
+                <a:latin typeface="Calibri"/>
+              </a:rPr>
+              <a:t> — no hardware and no brand lock-in; optional connected-car link sharpens accuracy on newer cars.</a:t>
+            </a:r>
+          </a:p>
+          <a:p>
+            <a:pPr>
+              <a:lnSpc>
+                <a:spcPct val="108000"/>
+              </a:lnSpc>
+              <a:spcAft>
+                <a:spcPts val="1400"/>
+              </a:spcAft>
+            </a:pPr>
+            <a:r>
+              <a:rPr sz="1600" b="1">
+                <a:solidFill>
+                  <a:srgbClr val="43A047"/>
+                </a:solidFill>
+                <a:latin typeface="Calibri"/>
+              </a:rPr>
+              <a:t>▸ </a:t>
+            </a:r>
+            <a:r>
+              <a:rPr sz="1600" b="1">
+                <a:solidFill>
+                  <a:srgbClr val="212121"/>
+                </a:solidFill>
+                <a:latin typeface="Calibri"/>
+              </a:rPr>
+              <a:t>Fleet view for MSMEs</a:t>
+            </a:r>
+            <a:r>
+              <a:rPr sz="1600">
+                <a:solidFill>
+                  <a:srgbClr val="212121"/>
+                </a:solidFill>
+                <a:latin typeface="Calibri"/>
+              </a:rPr>
+              <a:t> — small businesses see emissions and service alerts across all their vehicles in one dashboard.</a:t>
+            </a:r>
+          </a:p>
+        </p:txBody>
+      </p:sp>
+    </p:spTree>
+  </p:cSld>
+  <p:clrMapOvr>
+    <a:masterClrMapping/>
+  </p:clrMapOvr>
+</p:sld>
+</file>
+
+<file path=ppt/slides/slide7.xml><?xml version="1.0" encoding="utf-8"?>
+<p:sld xmlns:a="http://schemas.openxmlformats.org/drawingml/2006/main" xmlns:p="http://schemas.openxmlformats.org/presentationml/2006/main" xmlns:r="http://schemas.openxmlformats.org/officeDocument/2006/relationships">
+  <p:cSld>
+    <p:spTree>
+      <p:nvGrpSpPr>
+        <p:cNvPr id="1" name=""/>
+        <p:cNvGrpSpPr/>
+        <p:nvPr/>
+      </p:nvGrpSpPr>
+      <p:grpSpPr/>
+      <p:sp>
+        <p:nvSpPr>
+          <p:cNvPr id="2" name="Rectangle 1"/>
+          <p:cNvSpPr/>
+          <p:nvPr/>
+        </p:nvSpPr>
+        <p:spPr>
+          <a:xfrm>
+            <a:off x="0" y="0"/>
+            <a:ext cx="12191695" cy="914400"/>
+          </a:xfrm>
+          <a:prstGeom prst="rect">
+            <a:avLst/>
+          </a:prstGeom>
+          <a:solidFill>
+            <a:srgbClr val="1B5E20"/>
+          </a:solidFill>
+          <a:ln>
+            <a:noFill/>
+          </a:ln>
+          <a:effectLst/>
+        </p:spPr>
+        <p:style>
+          <a:lnRef idx="1">
+            <a:schemeClr val="accent1"/>
+          </a:lnRef>
+          <a:fillRef idx="3">
+            <a:schemeClr val="accent1"/>
+          </a:fillRef>
+          <a:effectRef idx="2">
+            <a:schemeClr val="accent1"/>
+          </a:effectRef>
+          <a:fontRef idx="minor">
+            <a:schemeClr val="lt1"/>
+          </a:fontRef>
+        </p:style>
+        <p:txBody>
+          <a:bodyPr rtlCol="0" anchor="ctr"/>
+          <a:lstStyle/>
+          <a:p>
+            <a:pPr algn="ctr"/>
+          </a:p>
+        </p:txBody>
+      </p:sp>
+      <p:sp>
+        <p:nvSpPr>
+          <p:cNvPr id="3" name="TextBox 2"/>
+          <p:cNvSpPr txBox="1"/>
+          <p:nvPr/>
+        </p:nvSpPr>
+        <p:spPr>
+          <a:xfrm>
+            <a:off x="502920" y="118872"/>
+            <a:ext cx="11185855" cy="685800"/>
+          </a:xfrm>
+          <a:prstGeom prst="rect">
+            <a:avLst/>
+          </a:prstGeom>
+          <a:noFill/>
+        </p:spPr>
+        <p:txBody>
+          <a:bodyPr wrap="square" anchor="ctr">
+            <a:spAutoFit/>
+          </a:bodyPr>
+          <a:lstStyle/>
+          <a:p>
+            <a:pPr algn="l">
+              <a:lnSpc>
+                <a:spcPct val="100000"/>
+              </a:lnSpc>
+            </a:pPr>
+            <a:r>
+              <a:rPr sz="3000" b="1">
+                <a:solidFill>
+                  <a:srgbClr val="FFFFFF"/>
+                </a:solidFill>
+                <a:latin typeface="Calibri"/>
+              </a:rPr>
+              <a:t>Feasibility</a:t>
+            </a:r>
+          </a:p>
+        </p:txBody>
+      </p:sp>
+      <p:sp>
+        <p:nvSpPr>
+          <p:cNvPr id="4" name="Rectangle 3"/>
+          <p:cNvSpPr/>
+          <p:nvPr/>
+        </p:nvSpPr>
+        <p:spPr>
+          <a:xfrm>
+            <a:off x="0" y="914400"/>
+            <a:ext cx="12191695" cy="54864"/>
+          </a:xfrm>
+          <a:prstGeom prst="rect">
+            <a:avLst/>
+          </a:prstGeom>
+          <a:solidFill>
+            <a:srgbClr val="F9A825"/>
+          </a:solidFill>
+          <a:ln>
+            <a:noFill/>
+          </a:ln>
+          <a:effectLst/>
+        </p:spPr>
+        <p:style>
+          <a:lnRef idx="1">
+            <a:schemeClr val="accent1"/>
+          </a:lnRef>
+          <a:fillRef idx="3">
+            <a:schemeClr val="accent1"/>
+          </a:fillRef>
+          <a:effectRef idx="2">
+            <a:schemeClr val="accent1"/>
+          </a:effectRef>
+          <a:fontRef idx="minor">
+            <a:schemeClr val="lt1"/>
+          </a:fontRef>
+        </p:style>
+        <p:txBody>
+          <a:bodyPr rtlCol="0" anchor="ctr"/>
+          <a:lstStyle/>
+          <a:p>
+            <a:pPr algn="ctr"/>
+          </a:p>
+        </p:txBody>
+      </p:sp>
+      <p:sp>
+        <p:nvSpPr>
+          <p:cNvPr id="5" name="Rounded Rectangle 4"/>
+          <p:cNvSpPr/>
+          <p:nvPr/>
+        </p:nvSpPr>
+        <p:spPr>
+          <a:xfrm>
+            <a:off x="411480" y="1234440"/>
+            <a:ext cx="3703320" cy="502920"/>
+          </a:xfrm>
+          <a:prstGeom prst="roundRect">
+            <a:avLst/>
+          </a:prstGeom>
+          <a:solidFill>
+            <a:srgbClr val="43A047"/>
+          </a:solidFill>
+          <a:ln>
+            <a:noFill/>
+          </a:ln>
+          <a:effectLst/>
+        </p:spPr>
+        <p:style>
+          <a:lnRef idx="1">
+            <a:schemeClr val="accent1"/>
+          </a:lnRef>
+          <a:fillRef idx="3">
+            <a:schemeClr val="accent1"/>
+          </a:fillRef>
+          <a:effectRef idx="2">
+            <a:schemeClr val="accent1"/>
+          </a:effectRef>
+          <a:fontRef idx="minor">
+            <a:schemeClr val="lt1"/>
+          </a:fontRef>
+        </p:style>
+        <p:txBody>
+          <a:bodyPr rtlCol="0" anchor="ctr"/>
+          <a:lstStyle/>
+          <a:p>
+            <a:pPr algn="ctr"/>
+          </a:p>
+        </p:txBody>
+      </p:sp>
+      <p:sp>
+        <p:nvSpPr>
+          <p:cNvPr id="6" name="TextBox 5"/>
+          <p:cNvSpPr txBox="1"/>
+          <p:nvPr/>
+        </p:nvSpPr>
+        <p:spPr>
+          <a:xfrm>
+            <a:off x="411480" y="1289304"/>
+            <a:ext cx="3703320" cy="411480"/>
+          </a:xfrm>
+          <a:prstGeom prst="rect">
+            <a:avLst/>
+          </a:prstGeom>
+          <a:noFill/>
+        </p:spPr>
+        <p:txBody>
+          <a:bodyPr wrap="square" anchor="t">
+            <a:spAutoFit/>
+          </a:bodyPr>
+          <a:lstStyle/>
+          <a:p>
+            <a:pPr algn="ctr">
+              <a:lnSpc>
+                <a:spcPct val="100000"/>
+              </a:lnSpc>
+            </a:pPr>
+            <a:r>
+              <a:rPr sz="1800" b="1">
+                <a:solidFill>
+                  <a:srgbClr val="FFFFFF"/>
+                </a:solidFill>
+                <a:latin typeface="Calibri"/>
+              </a:rPr>
+              <a:t>Technical</a:t>
+            </a:r>
+          </a:p>
+        </p:txBody>
+      </p:sp>
+      <p:sp>
+        <p:nvSpPr>
+          <p:cNvPr id="7" name="Rounded Rectangle 6"/>
+          <p:cNvSpPr/>
+          <p:nvPr/>
+        </p:nvSpPr>
+        <p:spPr>
+          <a:xfrm>
+            <a:off x="411480" y="1828800"/>
+            <a:ext cx="3703320" cy="4480560"/>
+          </a:xfrm>
+          <a:prstGeom prst="roundRect">
+            <a:avLst/>
+          </a:prstGeom>
+          <a:solidFill>
+            <a:srgbClr val="F1F8E9"/>
+          </a:solidFill>
+          <a:ln w="12700">
+            <a:solidFill>
+              <a:srgbClr val="43A047"/>
+            </a:solidFill>
+          </a:ln>
+          <a:effectLst/>
+        </p:spPr>
+        <p:style>
+          <a:lnRef idx="1">
+            <a:schemeClr val="accent1"/>
+          </a:lnRef>
+          <a:fillRef idx="3">
+            <a:schemeClr val="accent1"/>
+          </a:fillRef>
+          <a:effectRef idx="2">
+            <a:schemeClr val="accent1"/>
+          </a:effectRef>
+          <a:fontRef idx="minor">
+            <a:schemeClr val="lt1"/>
+          </a:fontRef>
+        </p:style>
+        <p:txBody>
+          <a:bodyPr rtlCol="0" anchor="ctr"/>
+          <a:lstStyle/>
+          <a:p>
+            <a:pPr algn="ctr"/>
+          </a:p>
+        </p:txBody>
+      </p:sp>
+      <p:sp>
+        <p:nvSpPr>
+          <p:cNvPr id="8" name="TextBox 7"/>
+          <p:cNvSpPr txBox="1"/>
+          <p:nvPr/>
+        </p:nvSpPr>
+        <p:spPr>
+          <a:xfrm>
+            <a:off x="576072" y="2011680"/>
+            <a:ext cx="3374136" cy="4114800"/>
+          </a:xfrm>
+          <a:prstGeom prst="rect">
+            <a:avLst/>
+          </a:prstGeom>
+          <a:noFill/>
+        </p:spPr>
+        <p:txBody>
+          <a:bodyPr wrap="square">
+            <a:spAutoFit/>
+          </a:bodyPr>
+          <a:lstStyle/>
+          <a:p>
+            <a:pPr>
+              <a:lnSpc>
+                <a:spcPct val="108000"/>
+              </a:lnSpc>
+              <a:spcAft>
+                <a:spcPts val="1000"/>
+              </a:spcAft>
+            </a:pPr>
+            <a:r>
+              <a:rPr sz="1350" b="1">
+                <a:solidFill>
+                  <a:srgbClr val="43A047"/>
+                </a:solidFill>
+                <a:latin typeface="Calibri"/>
+              </a:rPr>
+              <a:t>▸ </a:t>
+            </a:r>
+            <a:r>
+              <a:rPr sz="1350" b="1">
+                <a:solidFill>
+                  <a:srgbClr val="212121"/>
+                </a:solidFill>
+                <a:latin typeface="Calibri"/>
+              </a:rPr>
+              <a:t>Built on proven, public building blocks: Bluetooth and activity-recognition triggers, phone GPS, and standard emission models (BS6 norms, COPERT / EPA factors).</a:t>
+            </a:r>
+          </a:p>
+          <a:p>
+            <a:pPr>
+              <a:lnSpc>
+                <a:spcPct val="108000"/>
+              </a:lnSpc>
+              <a:spcAft>
+                <a:spcPts val="1000"/>
+              </a:spcAft>
+            </a:pPr>
+            <a:r>
+              <a:rPr sz="1350" b="1">
+                <a:solidFill>
+                  <a:srgbClr val="43A047"/>
+                </a:solidFill>
+                <a:latin typeface="Calibri"/>
+              </a:rPr>
+              <a:t>▸ </a:t>
+            </a:r>
+            <a:r>
+              <a:rPr sz="1350" b="1">
+                <a:solidFill>
+                  <a:srgbClr val="212121"/>
+                </a:solidFill>
+                <a:latin typeface="Calibri"/>
+              </a:rPr>
+              <a:t>Stack: Flutter app (Android-first), FastAPI backend, cloud database - all free, mature tools.</a:t>
+            </a:r>
+          </a:p>
+          <a:p>
+            <a:pPr>
+              <a:lnSpc>
+                <a:spcPct val="108000"/>
+              </a:lnSpc>
+              <a:spcAft>
+                <a:spcPts val="1000"/>
+              </a:spcAft>
+            </a:pPr>
+            <a:r>
+              <a:rPr sz="1350" b="1">
+                <a:solidFill>
+                  <a:srgbClr val="43A047"/>
+                </a:solidFill>
+                <a:latin typeface="Calibri"/>
+              </a:rPr>
+              <a:t>▸ </a:t>
+            </a:r>
+            <a:r>
+              <a:rPr sz="1350" b="1">
+                <a:solidFill>
+                  <a:srgbClr val="212121"/>
+                </a:solidFill>
+                <a:latin typeface="Calibri"/>
+              </a:rPr>
+              <a:t>Accuracy: estimates, not certified readings - but trend and drift detection is reliable because every car is compared with its own baseline.</a:t>
+            </a:r>
+          </a:p>
+        </p:txBody>
+      </p:sp>
+      <p:sp>
+        <p:nvSpPr>
+          <p:cNvPr id="9" name="Rounded Rectangle 8"/>
+          <p:cNvSpPr/>
+          <p:nvPr/>
+        </p:nvSpPr>
+        <p:spPr>
+          <a:xfrm>
+            <a:off x="4251960" y="1234440"/>
+            <a:ext cx="3703320" cy="502920"/>
+          </a:xfrm>
+          <a:prstGeom prst="roundRect">
+            <a:avLst/>
+          </a:prstGeom>
+          <a:solidFill>
+            <a:srgbClr val="43A047"/>
+          </a:solidFill>
+          <a:ln>
+            <a:noFill/>
+          </a:ln>
+          <a:effectLst/>
+        </p:spPr>
+        <p:style>
+          <a:lnRef idx="1">
+            <a:schemeClr val="accent1"/>
+          </a:lnRef>
+          <a:fillRef idx="3">
+            <a:schemeClr val="accent1"/>
+          </a:fillRef>
+          <a:effectRef idx="2">
+            <a:schemeClr val="accent1"/>
+          </a:effectRef>
+          <a:fontRef idx="minor">
+            <a:schemeClr val="lt1"/>
+          </a:fontRef>
+        </p:style>
+        <p:txBody>
+          <a:bodyPr rtlCol="0" anchor="ctr"/>
+          <a:lstStyle/>
+          <a:p>
+            <a:pPr algn="ctr"/>
+          </a:p>
+        </p:txBody>
+      </p:sp>
+      <p:sp>
+        <p:nvSpPr>
+          <p:cNvPr id="10" name="TextBox 9"/>
+          <p:cNvSpPr txBox="1"/>
+          <p:nvPr/>
+        </p:nvSpPr>
+        <p:spPr>
+          <a:xfrm>
+            <a:off x="4251960" y="1289304"/>
+            <a:ext cx="3703320" cy="411480"/>
+          </a:xfrm>
+          <a:prstGeom prst="rect">
+            <a:avLst/>
+          </a:prstGeom>
+          <a:noFill/>
+        </p:spPr>
+        <p:txBody>
+          <a:bodyPr wrap="square" anchor="t">
+            <a:spAutoFit/>
+          </a:bodyPr>
+          <a:lstStyle/>
+          <a:p>
+            <a:pPr algn="ctr">
+              <a:lnSpc>
+                <a:spcPct val="100000"/>
+              </a:lnSpc>
+            </a:pPr>
+            <a:r>
+              <a:rPr sz="1800" b="1">
+                <a:solidFill>
+                  <a:srgbClr val="FFFFFF"/>
+                </a:solidFill>
+                <a:latin typeface="Calibri"/>
+              </a:rPr>
+              <a:t>Economic</a:t>
+            </a:r>
+          </a:p>
+        </p:txBody>
+      </p:sp>
+      <p:sp>
+        <p:nvSpPr>
+          <p:cNvPr id="11" name="Rounded Rectangle 10"/>
+          <p:cNvSpPr/>
+          <p:nvPr/>
+        </p:nvSpPr>
+        <p:spPr>
+          <a:xfrm>
+            <a:off x="4251960" y="1828800"/>
+            <a:ext cx="3703320" cy="4480560"/>
+          </a:xfrm>
+          <a:prstGeom prst="roundRect">
+            <a:avLst/>
+          </a:prstGeom>
+          <a:solidFill>
+            <a:srgbClr val="F1F8E9"/>
+          </a:solidFill>
+          <a:ln w="12700">
+            <a:solidFill>
+              <a:srgbClr val="43A047"/>
+            </a:solidFill>
+          </a:ln>
+          <a:effectLst/>
+        </p:spPr>
+        <p:style>
+          <a:lnRef idx="1">
+            <a:schemeClr val="accent1"/>
+          </a:lnRef>
+          <a:fillRef idx="3">
+            <a:schemeClr val="accent1"/>
+          </a:fillRef>
+          <a:effectRef idx="2">
+            <a:schemeClr val="accent1"/>
+          </a:effectRef>
+          <a:fontRef idx="minor">
+            <a:schemeClr val="lt1"/>
+          </a:fontRef>
+        </p:style>
+        <p:txBody>
+          <a:bodyPr rtlCol="0" anchor="ctr"/>
+          <a:lstStyle/>
+          <a:p>
+            <a:pPr algn="ctr"/>
+          </a:p>
+        </p:txBody>
+      </p:sp>
+      <p:sp>
+        <p:nvSpPr>
+          <p:cNvPr id="12" name="TextBox 11"/>
+          <p:cNvSpPr txBox="1"/>
+          <p:nvPr/>
+        </p:nvSpPr>
+        <p:spPr>
+          <a:xfrm>
+            <a:off x="4416552" y="2011680"/>
+            <a:ext cx="3374136" cy="4114800"/>
+          </a:xfrm>
+          <a:prstGeom prst="rect">
+            <a:avLst/>
+          </a:prstGeom>
+          <a:noFill/>
+        </p:spPr>
+        <p:txBody>
+          <a:bodyPr wrap="square">
+            <a:spAutoFit/>
+          </a:bodyPr>
+          <a:lstStyle/>
+          <a:p>
+            <a:pPr>
+              <a:lnSpc>
+                <a:spcPct val="108000"/>
+              </a:lnSpc>
+              <a:spcAft>
+                <a:spcPts val="1000"/>
+              </a:spcAft>
+            </a:pPr>
+            <a:r>
+              <a:rPr sz="1350" b="1">
+                <a:solidFill>
+                  <a:srgbClr val="43A047"/>
+                </a:solidFill>
+                <a:latin typeface="Calibri"/>
+              </a:rPr>
+              <a:t>▸ </a:t>
+            </a:r>
+            <a:r>
+              <a:rPr sz="1350" b="1">
+                <a:solidFill>
+                  <a:srgbClr val="212121"/>
+                </a:solidFill>
+                <a:latin typeface="Calibri"/>
+              </a:rPr>
+              <a:t>Zero hardware means near-zero marginal cost per user; the entire MVP can be built on free tiers.</a:t>
+            </a:r>
+          </a:p>
+          <a:p>
+            <a:pPr>
+              <a:lnSpc>
+                <a:spcPct val="108000"/>
+              </a:lnSpc>
+              <a:spcAft>
+                <a:spcPts val="1000"/>
+              </a:spcAft>
+            </a:pPr>
+            <a:r>
+              <a:rPr sz="1350" b="1">
+                <a:solidFill>
+                  <a:srgbClr val="43A047"/>
+                </a:solidFill>
+                <a:latin typeface="Calibri"/>
+              </a:rPr>
+              <a:t>▸ </a:t>
+            </a:r>
+            <a:r>
+              <a:rPr sz="1350" b="1">
+                <a:solidFill>
+                  <a:srgbClr val="212121"/>
+                </a:solidFill>
+                <a:latin typeface="Calibri"/>
+              </a:rPr>
+              <a:t>Freemium model: personal use free; premium analytics and MSME fleet dashboards subscription-based.</a:t>
+            </a:r>
+          </a:p>
+          <a:p>
+            <a:pPr>
+              <a:lnSpc>
+                <a:spcPct val="108000"/>
+              </a:lnSpc>
+              <a:spcAft>
+                <a:spcPts val="1000"/>
+              </a:spcAft>
+            </a:pPr>
+            <a:r>
+              <a:rPr sz="1350" b="1">
+                <a:solidFill>
+                  <a:srgbClr val="43A047"/>
+                </a:solidFill>
+                <a:latin typeface="Calibri"/>
+              </a:rPr>
+              <a:t>▸ </a:t>
+            </a:r>
+            <a:r>
+              <a:rPr sz="1350" b="1">
+                <a:solidFill>
+                  <a:srgbClr val="212121"/>
+                </a:solidFill>
+                <a:latin typeface="Calibri"/>
+              </a:rPr>
+              <a:t>No inventory, logistics or servicing costs - pure software scaling.</a:t>
+            </a:r>
+          </a:p>
+        </p:txBody>
+      </p:sp>
+      <p:sp>
+        <p:nvSpPr>
+          <p:cNvPr id="13" name="Rounded Rectangle 12"/>
+          <p:cNvSpPr/>
+          <p:nvPr/>
+        </p:nvSpPr>
+        <p:spPr>
+          <a:xfrm>
+            <a:off x="8092440" y="1234440"/>
+            <a:ext cx="3703320" cy="502920"/>
+          </a:xfrm>
+          <a:prstGeom prst="roundRect">
+            <a:avLst/>
+          </a:prstGeom>
+          <a:solidFill>
+            <a:srgbClr val="43A047"/>
+          </a:solidFill>
+          <a:ln>
+            <a:noFill/>
+          </a:ln>
+          <a:effectLst/>
+        </p:spPr>
+        <p:style>
+          <a:lnRef idx="1">
+            <a:schemeClr val="accent1"/>
+          </a:lnRef>
+          <a:fillRef idx="3">
+            <a:schemeClr val="accent1"/>
+          </a:fillRef>
+          <a:effectRef idx="2">
+            <a:schemeClr val="accent1"/>
+          </a:effectRef>
+          <a:fontRef idx="minor">
+            <a:schemeClr val="lt1"/>
+          </a:fontRef>
+        </p:style>
+        <p:txBody>
+          <a:bodyPr rtlCol="0" anchor="ctr"/>
+          <a:lstStyle/>
+          <a:p>
+            <a:pPr algn="ctr"/>
+          </a:p>
+        </p:txBody>
+      </p:sp>
+      <p:sp>
+        <p:nvSpPr>
+          <p:cNvPr id="14" name="TextBox 13"/>
+          <p:cNvSpPr txBox="1"/>
+          <p:nvPr/>
+        </p:nvSpPr>
+        <p:spPr>
+          <a:xfrm>
+            <a:off x="8092440" y="1289304"/>
+            <a:ext cx="3703320" cy="411480"/>
+          </a:xfrm>
+          <a:prstGeom prst="rect">
+            <a:avLst/>
+          </a:prstGeom>
+          <a:noFill/>
+        </p:spPr>
+        <p:txBody>
+          <a:bodyPr wrap="square" anchor="t">
+            <a:spAutoFit/>
+          </a:bodyPr>
+          <a:lstStyle/>
+          <a:p>
+            <a:pPr algn="ctr">
+              <a:lnSpc>
+                <a:spcPct val="100000"/>
+              </a:lnSpc>
+            </a:pPr>
+            <a:r>
+              <a:rPr sz="1800" b="1">
+                <a:solidFill>
+                  <a:srgbClr val="FFFFFF"/>
+                </a:solidFill>
+                <a:latin typeface="Calibri"/>
+              </a:rPr>
+              <a:t>Market &amp; operational</a:t>
+            </a:r>
+          </a:p>
+        </p:txBody>
+      </p:sp>
+      <p:sp>
+        <p:nvSpPr>
+          <p:cNvPr id="15" name="Rounded Rectangle 14"/>
+          <p:cNvSpPr/>
+          <p:nvPr/>
+        </p:nvSpPr>
+        <p:spPr>
+          <a:xfrm>
+            <a:off x="8092440" y="1828800"/>
+            <a:ext cx="3703320" cy="4480560"/>
+          </a:xfrm>
+          <a:prstGeom prst="roundRect">
+            <a:avLst/>
+          </a:prstGeom>
+          <a:solidFill>
+            <a:srgbClr val="F1F8E9"/>
+          </a:solidFill>
+          <a:ln w="12700">
+            <a:solidFill>
+              <a:srgbClr val="43A047"/>
+            </a:solidFill>
+          </a:ln>
+          <a:effectLst/>
+        </p:spPr>
+        <p:style>
+          <a:lnRef idx="1">
+            <a:schemeClr val="accent1"/>
+          </a:lnRef>
+          <a:fillRef idx="3">
+            <a:schemeClr val="accent1"/>
+          </a:fillRef>
+          <a:effectRef idx="2">
+            <a:schemeClr val="accent1"/>
+          </a:effectRef>
+          <a:fontRef idx="minor">
+            <a:schemeClr val="lt1"/>
+          </a:fontRef>
+        </p:style>
+        <p:txBody>
+          <a:bodyPr rtlCol="0" anchor="ctr"/>
+          <a:lstStyle/>
+          <a:p>
+            <a:pPr algn="ctr"/>
+          </a:p>
+        </p:txBody>
+      </p:sp>
+      <p:sp>
+        <p:nvSpPr>
+          <p:cNvPr id="16" name="TextBox 15"/>
+          <p:cNvSpPr txBox="1"/>
+          <p:nvPr/>
+        </p:nvSpPr>
+        <p:spPr>
+          <a:xfrm>
+            <a:off x="8257032" y="2011680"/>
+            <a:ext cx="3374136" cy="4114800"/>
+          </a:xfrm>
+          <a:prstGeom prst="rect">
+            <a:avLst/>
+          </a:prstGeom>
+          <a:noFill/>
+        </p:spPr>
+        <p:txBody>
+          <a:bodyPr wrap="square">
+            <a:spAutoFit/>
+          </a:bodyPr>
+          <a:lstStyle/>
+          <a:p>
+            <a:pPr>
+              <a:lnSpc>
+                <a:spcPct val="108000"/>
+              </a:lnSpc>
+              <a:spcAft>
+                <a:spcPts val="1000"/>
+              </a:spcAft>
+            </a:pPr>
+            <a:r>
+              <a:rPr sz="1350" b="1">
+                <a:solidFill>
+                  <a:srgbClr val="43A047"/>
+                </a:solidFill>
+                <a:latin typeface="Calibri"/>
+              </a:rPr>
+              <a:t>▸ </a:t>
+            </a:r>
+            <a:r>
+              <a:rPr sz="1350" b="1">
+                <a:solidFill>
+                  <a:srgbClr val="212121"/>
+                </a:solidFill>
+                <a:latin typeface="Calibri"/>
+              </a:rPr>
+              <a:t>India has 30+ crore registered vehicles and PUC certification is legally mandatory - awareness of emissions is universal.</a:t>
+            </a:r>
+          </a:p>
+          <a:p>
+            <a:pPr>
+              <a:lnSpc>
+                <a:spcPct val="108000"/>
+              </a:lnSpc>
+              <a:spcAft>
+                <a:spcPts val="1000"/>
+              </a:spcAft>
+            </a:pPr>
+            <a:r>
+              <a:rPr sz="1350" b="1">
+                <a:solidFill>
+                  <a:srgbClr val="43A047"/>
+                </a:solidFill>
+                <a:latin typeface="Calibri"/>
+              </a:rPr>
+              <a:t>▸ </a:t>
+            </a:r>
+            <a:r>
+              <a:rPr sz="1350" b="1">
+                <a:solidFill>
+                  <a:srgbClr val="212121"/>
+                </a:solidFill>
+                <a:latin typeface="Calibri"/>
+              </a:rPr>
+              <a:t>Onboarding takes minutes: install, pick your car model, pair Bluetooth once.</a:t>
+            </a:r>
+          </a:p>
+          <a:p>
+            <a:pPr>
+              <a:lnSpc>
+                <a:spcPct val="108000"/>
+              </a:lnSpc>
+              <a:spcAft>
+                <a:spcPts val="1000"/>
+              </a:spcAft>
+            </a:pPr>
+            <a:r>
+              <a:rPr sz="1350" b="1">
+                <a:solidFill>
+                  <a:srgbClr val="43A047"/>
+                </a:solidFill>
+                <a:latin typeface="Calibri"/>
+              </a:rPr>
+              <a:t>▸ </a:t>
+            </a:r>
+            <a:r>
+              <a:rPr sz="1350" b="1">
+                <a:solidFill>
+                  <a:srgbClr val="212121"/>
+                </a:solidFill>
+                <a:latin typeface="Calibri"/>
+              </a:rPr>
+              <a:t>MVP is buildable by a small student team within the hackathon timeline.</a:t>
+            </a:r>
+          </a:p>
+        </p:txBody>
+      </p:sp>
+    </p:spTree>
+  </p:cSld>
+  <p:clrMapOvr>
+    <a:masterClrMapping/>
+  </p:clrMapOvr>
+</p:sld>
+</file>
+
+<file path=ppt/slides/slide8.xml><?xml version="1.0" encoding="utf-8"?>
+<p:sld xmlns:a="http://schemas.openxmlformats.org/drawingml/2006/main" xmlns:p="http://schemas.openxmlformats.org/presentationml/2006/main" xmlns:r="http://schemas.openxmlformats.org/officeDocument/2006/relationships">
+  <p:cSld>
+    <p:spTree>
+      <p:nvGrpSpPr>
+        <p:cNvPr id="1" name=""/>
+        <p:cNvGrpSpPr/>
+        <p:nvPr/>
+      </p:nvGrpSpPr>
+      <p:grpSpPr/>
+      <p:sp>
+        <p:nvSpPr>
+          <p:cNvPr id="2" name="Rectangle 1"/>
+          <p:cNvSpPr/>
+          <p:nvPr/>
+        </p:nvSpPr>
+        <p:spPr>
+          <a:xfrm>
+            <a:off x="0" y="0"/>
+            <a:ext cx="12191695" cy="914400"/>
+          </a:xfrm>
+          <a:prstGeom prst="rect">
+            <a:avLst/>
+          </a:prstGeom>
+          <a:solidFill>
+            <a:srgbClr val="1B5E20"/>
+          </a:solidFill>
+          <a:ln>
+            <a:noFill/>
+          </a:ln>
+          <a:effectLst/>
+        </p:spPr>
+        <p:style>
+          <a:lnRef idx="1">
+            <a:schemeClr val="accent1"/>
+          </a:lnRef>
+          <a:fillRef idx="3">
+            <a:schemeClr val="accent1"/>
+          </a:fillRef>
+          <a:effectRef idx="2">
+            <a:schemeClr val="accent1"/>
+          </a:effectRef>
+          <a:fontRef idx="minor">
+            <a:schemeClr val="lt1"/>
+          </a:fontRef>
+        </p:style>
+        <p:txBody>
+          <a:bodyPr rtlCol="0" anchor="ctr"/>
+          <a:lstStyle/>
+          <a:p>
+            <a:pPr algn="ctr"/>
+          </a:p>
+        </p:txBody>
+      </p:sp>
+      <p:sp>
+        <p:nvSpPr>
+          <p:cNvPr id="3" name="TextBox 2"/>
+          <p:cNvSpPr txBox="1"/>
+          <p:nvPr/>
+        </p:nvSpPr>
+        <p:spPr>
+          <a:xfrm>
+            <a:off x="502920" y="118872"/>
+            <a:ext cx="11185855" cy="685800"/>
+          </a:xfrm>
+          <a:prstGeom prst="rect">
+            <a:avLst/>
+          </a:prstGeom>
+          <a:noFill/>
+        </p:spPr>
+        <p:txBody>
+          <a:bodyPr wrap="square" anchor="ctr">
+            <a:spAutoFit/>
+          </a:bodyPr>
+          <a:lstStyle/>
+          <a:p>
+            <a:pPr algn="l">
+              <a:lnSpc>
+                <a:spcPct val="100000"/>
+              </a:lnSpc>
+            </a:pPr>
+            <a:r>
+              <a:rPr sz="3000" b="1">
+                <a:solidFill>
+                  <a:srgbClr val="FFFFFF"/>
+                </a:solidFill>
+                <a:latin typeface="Calibri"/>
+              </a:rPr>
+              <a:t>UN Sustainable Development Goals We Cover</a:t>
+            </a:r>
+          </a:p>
+        </p:txBody>
+      </p:sp>
+      <p:sp>
+        <p:nvSpPr>
+          <p:cNvPr id="4" name="Rectangle 3"/>
+          <p:cNvSpPr/>
+          <p:nvPr/>
+        </p:nvSpPr>
+        <p:spPr>
+          <a:xfrm>
+            <a:off x="0" y="914400"/>
+            <a:ext cx="12191695" cy="54864"/>
+          </a:xfrm>
+          <a:prstGeom prst="rect">
+            <a:avLst/>
+          </a:prstGeom>
+          <a:solidFill>
+            <a:srgbClr val="F9A825"/>
+          </a:solidFill>
+          <a:ln>
+            <a:noFill/>
+          </a:ln>
+          <a:effectLst/>
+        </p:spPr>
+        <p:style>
+          <a:lnRef idx="1">
+            <a:schemeClr val="accent1"/>
+          </a:lnRef>
+          <a:fillRef idx="3">
+            <a:schemeClr val="accent1"/>
+          </a:fillRef>
+          <a:effectRef idx="2">
+            <a:schemeClr val="accent1"/>
+          </a:effectRef>
+          <a:fontRef idx="minor">
+            <a:schemeClr val="lt1"/>
+          </a:fontRef>
+        </p:style>
+        <p:txBody>
+          <a:bodyPr rtlCol="0" anchor="ctr"/>
+          <a:lstStyle/>
+          <a:p>
+            <a:pPr algn="ctr"/>
+          </a:p>
+        </p:txBody>
+      </p:sp>
+      <p:sp>
+        <p:nvSpPr>
+          <p:cNvPr id="5" name="Rounded Rectangle 4"/>
+          <p:cNvSpPr/>
+          <p:nvPr/>
+        </p:nvSpPr>
+        <p:spPr>
+          <a:xfrm>
+            <a:off x="411480" y="1188720"/>
+            <a:ext cx="1234440" cy="932688"/>
+          </a:xfrm>
+          <a:prstGeom prst="roundRect">
+            <a:avLst/>
+          </a:prstGeom>
+          <a:solidFill>
+            <a:srgbClr val="1B5E20"/>
+          </a:solidFill>
+          <a:ln>
+            <a:noFill/>
+          </a:ln>
+          <a:effectLst/>
+        </p:spPr>
+        <p:style>
+          <a:lnRef idx="1">
+            <a:schemeClr val="accent1"/>
+          </a:lnRef>
+          <a:fillRef idx="3">
+            <a:schemeClr val="accent1"/>
+          </a:fillRef>
+          <a:effectRef idx="2">
+            <a:schemeClr val="accent1"/>
+          </a:effectRef>
+          <a:fontRef idx="minor">
+            <a:schemeClr val="lt1"/>
+          </a:fontRef>
+        </p:style>
+        <p:txBody>
+          <a:bodyPr rtlCol="0" anchor="ctr"/>
+          <a:lstStyle/>
+          <a:p>
+            <a:pPr algn="ctr"/>
+          </a:p>
+        </p:txBody>
+      </p:sp>
+      <p:sp>
+        <p:nvSpPr>
+          <p:cNvPr id="6" name="TextBox 5"/>
+          <p:cNvSpPr txBox="1"/>
+          <p:nvPr/>
+        </p:nvSpPr>
+        <p:spPr>
+          <a:xfrm>
+            <a:off x="411480" y="1408176"/>
+            <a:ext cx="1234440" cy="548640"/>
+          </a:xfrm>
+          <a:prstGeom prst="rect">
+            <a:avLst/>
+          </a:prstGeom>
+          <a:noFill/>
+        </p:spPr>
+        <p:txBody>
+          <a:bodyPr wrap="square" anchor="t">
+            <a:spAutoFit/>
+          </a:bodyPr>
+          <a:lstStyle/>
+          <a:p>
+            <a:pPr algn="ctr">
+              <a:lnSpc>
+                <a:spcPct val="100000"/>
+              </a:lnSpc>
+            </a:pPr>
+            <a:r>
+              <a:rPr sz="2000" b="1">
+                <a:solidFill>
+                  <a:srgbClr val="FFFFFF"/>
+                </a:solidFill>
+                <a:latin typeface="Calibri"/>
+              </a:rPr>
+              <a:t>SDG 3</a:t>
+            </a:r>
+          </a:p>
+        </p:txBody>
+      </p:sp>
+      <p:sp>
+        <p:nvSpPr>
+          <p:cNvPr id="7" name="TextBox 6"/>
+          <p:cNvSpPr txBox="1"/>
+          <p:nvPr/>
+        </p:nvSpPr>
+        <p:spPr>
+          <a:xfrm>
+            <a:off x="1828800" y="1207008"/>
+            <a:ext cx="3108960" cy="914400"/>
+          </a:xfrm>
+          <a:prstGeom prst="rect">
+            <a:avLst/>
+          </a:prstGeom>
+          <a:noFill/>
+        </p:spPr>
+        <p:txBody>
+          <a:bodyPr wrap="square" anchor="ctr">
+            <a:spAutoFit/>
+          </a:bodyPr>
+          <a:lstStyle/>
+          <a:p>
+            <a:pPr algn="l">
+              <a:lnSpc>
+                <a:spcPct val="100000"/>
+              </a:lnSpc>
+            </a:pPr>
+            <a:r>
+              <a:rPr sz="1600" b="1">
+                <a:solidFill>
+                  <a:srgbClr val="1B5E20"/>
+                </a:solidFill>
+                <a:latin typeface="Calibri"/>
+              </a:rPr>
+              <a:t>Good Health &amp; Well-Being</a:t>
+            </a:r>
+          </a:p>
+        </p:txBody>
+      </p:sp>
+      <p:sp>
+        <p:nvSpPr>
+          <p:cNvPr id="8" name="TextBox 7"/>
+          <p:cNvSpPr txBox="1"/>
+          <p:nvPr/>
+        </p:nvSpPr>
+        <p:spPr>
+          <a:xfrm>
+            <a:off x="5029200" y="1207008"/>
+            <a:ext cx="6766560" cy="914400"/>
+          </a:xfrm>
+          <a:prstGeom prst="rect">
+            <a:avLst/>
+          </a:prstGeom>
+          <a:noFill/>
+        </p:spPr>
+        <p:txBody>
+          <a:bodyPr wrap="square" anchor="ctr">
+            <a:spAutoFit/>
+          </a:bodyPr>
+          <a:lstStyle/>
+          <a:p>
+            <a:pPr algn="l">
+              <a:lnSpc>
+                <a:spcPct val="105000"/>
+              </a:lnSpc>
+            </a:pPr>
+            <a:r>
+              <a:rPr sz="1350" b="0">
+                <a:solidFill>
+                  <a:srgbClr val="212121"/>
+                </a:solidFill>
+                <a:latin typeface="Calibri"/>
+              </a:rPr>
+              <a:t>Vehicle exhaust is a major source of urban air pollution; fixing high-emitting engines earlier directly cuts the pollutants people breathe.</a:t>
+            </a:r>
+          </a:p>
+        </p:txBody>
+      </p:sp>
+      <p:sp>
+        <p:nvSpPr>
+          <p:cNvPr id="9" name="Rounded Rectangle 8"/>
+          <p:cNvSpPr/>
+          <p:nvPr/>
+        </p:nvSpPr>
+        <p:spPr>
+          <a:xfrm>
+            <a:off x="411480" y="2267712"/>
+            <a:ext cx="1234440" cy="932688"/>
+          </a:xfrm>
+          <a:prstGeom prst="roundRect">
+            <a:avLst/>
+          </a:prstGeom>
+          <a:solidFill>
+            <a:srgbClr val="1B5E20"/>
+          </a:solidFill>
+          <a:ln>
+            <a:noFill/>
+          </a:ln>
+          <a:effectLst/>
+        </p:spPr>
+        <p:style>
+          <a:lnRef idx="1">
+            <a:schemeClr val="accent1"/>
+          </a:lnRef>
+          <a:fillRef idx="3">
+            <a:schemeClr val="accent1"/>
+          </a:fillRef>
+          <a:effectRef idx="2">
+            <a:schemeClr val="accent1"/>
+          </a:effectRef>
+          <a:fontRef idx="minor">
+            <a:schemeClr val="lt1"/>
+          </a:fontRef>
+        </p:style>
+        <p:txBody>
+          <a:bodyPr rtlCol="0" anchor="ctr"/>
+          <a:lstStyle/>
+          <a:p>
+            <a:pPr algn="ctr"/>
+          </a:p>
+        </p:txBody>
+      </p:sp>
+      <p:sp>
+        <p:nvSpPr>
+          <p:cNvPr id="10" name="TextBox 9"/>
+          <p:cNvSpPr txBox="1"/>
+          <p:nvPr/>
+        </p:nvSpPr>
+        <p:spPr>
+          <a:xfrm>
+            <a:off x="411480" y="2487168"/>
+            <a:ext cx="1234440" cy="548640"/>
+          </a:xfrm>
+          <a:prstGeom prst="rect">
+            <a:avLst/>
+          </a:prstGeom>
+          <a:noFill/>
+        </p:spPr>
+        <p:txBody>
+          <a:bodyPr wrap="square" anchor="t">
+            <a:spAutoFit/>
+          </a:bodyPr>
+          <a:lstStyle/>
+          <a:p>
+            <a:pPr algn="ctr">
+              <a:lnSpc>
+                <a:spcPct val="100000"/>
+              </a:lnSpc>
+            </a:pPr>
+            <a:r>
+              <a:rPr sz="2000" b="1">
+                <a:solidFill>
+                  <a:srgbClr val="FFFFFF"/>
+                </a:solidFill>
+                <a:latin typeface="Calibri"/>
+              </a:rPr>
+              <a:t>SDG 9</a:t>
+            </a:r>
+          </a:p>
+        </p:txBody>
+      </p:sp>
+      <p:sp>
+        <p:nvSpPr>
+          <p:cNvPr id="11" name="TextBox 10"/>
+          <p:cNvSpPr txBox="1"/>
+          <p:nvPr/>
+        </p:nvSpPr>
+        <p:spPr>
+          <a:xfrm>
+            <a:off x="1828800" y="2286000"/>
+            <a:ext cx="3108960" cy="914400"/>
+          </a:xfrm>
+          <a:prstGeom prst="rect">
+            <a:avLst/>
+          </a:prstGeom>
+          <a:noFill/>
+        </p:spPr>
+        <p:txBody>
+          <a:bodyPr wrap="square" anchor="ctr">
+            <a:spAutoFit/>
+          </a:bodyPr>
+          <a:lstStyle/>
+          <a:p>
+            <a:pPr algn="l">
+              <a:lnSpc>
+                <a:spcPct val="100000"/>
+              </a:lnSpc>
+            </a:pPr>
+            <a:r>
+              <a:rPr sz="1600" b="1">
+                <a:solidFill>
+                  <a:srgbClr val="1B5E20"/>
+                </a:solidFill>
+                <a:latin typeface="Calibri"/>
+              </a:rPr>
+              <a:t>Industry, Innovation &amp; Infrastructure</a:t>
+            </a:r>
+          </a:p>
+        </p:txBody>
+      </p:sp>
+      <p:sp>
+        <p:nvSpPr>
+          <p:cNvPr id="12" name="TextBox 11"/>
+          <p:cNvSpPr txBox="1"/>
+          <p:nvPr/>
+        </p:nvSpPr>
+        <p:spPr>
+          <a:xfrm>
+            <a:off x="5029200" y="2286000"/>
+            <a:ext cx="6766560" cy="914400"/>
+          </a:xfrm>
+          <a:prstGeom prst="rect">
+            <a:avLst/>
+          </a:prstGeom>
+          <a:noFill/>
+        </p:spPr>
+        <p:txBody>
+          <a:bodyPr wrap="square" anchor="ctr">
+            <a:spAutoFit/>
+          </a:bodyPr>
+          <a:lstStyle/>
+          <a:p>
+            <a:pPr algn="l">
+              <a:lnSpc>
+                <a:spcPct val="105000"/>
+              </a:lnSpc>
+            </a:pPr>
+            <a:r>
+              <a:rPr sz="1350" b="0">
+                <a:solidFill>
+                  <a:srgbClr val="212121"/>
+                </a:solidFill>
+                <a:latin typeface="Calibri"/>
+              </a:rPr>
+              <a:t>A software-only innovation that upgrades emission monitoring without any new physical infrastructure or hardware manufacturing.</a:t>
+            </a:r>
+          </a:p>
+        </p:txBody>
+      </p:sp>
+      <p:sp>
+        <p:nvSpPr>
+          <p:cNvPr id="13" name="Rounded Rectangle 12"/>
+          <p:cNvSpPr/>
+          <p:nvPr/>
+        </p:nvSpPr>
+        <p:spPr>
+          <a:xfrm>
+            <a:off x="411480" y="3346704"/>
+            <a:ext cx="1234440" cy="932688"/>
+          </a:xfrm>
+          <a:prstGeom prst="roundRect">
+            <a:avLst/>
+          </a:prstGeom>
+          <a:solidFill>
+            <a:srgbClr val="1B5E20"/>
+          </a:solidFill>
+          <a:ln>
+            <a:noFill/>
+          </a:ln>
+          <a:effectLst/>
+        </p:spPr>
+        <p:style>
+          <a:lnRef idx="1">
+            <a:schemeClr val="accent1"/>
+          </a:lnRef>
+          <a:fillRef idx="3">
+            <a:schemeClr val="accent1"/>
+          </a:fillRef>
+          <a:effectRef idx="2">
+            <a:schemeClr val="accent1"/>
+          </a:effectRef>
+          <a:fontRef idx="minor">
+            <a:schemeClr val="lt1"/>
+          </a:fontRef>
+        </p:style>
+        <p:txBody>
+          <a:bodyPr rtlCol="0" anchor="ctr"/>
+          <a:lstStyle/>
+          <a:p>
+            <a:pPr algn="ctr"/>
+          </a:p>
+        </p:txBody>
+      </p:sp>
+      <p:sp>
+        <p:nvSpPr>
+          <p:cNvPr id="14" name="TextBox 13"/>
+          <p:cNvSpPr txBox="1"/>
+          <p:nvPr/>
+        </p:nvSpPr>
+        <p:spPr>
+          <a:xfrm>
+            <a:off x="411480" y="3566160"/>
+            <a:ext cx="1234440" cy="548640"/>
+          </a:xfrm>
+          <a:prstGeom prst="rect">
+            <a:avLst/>
+          </a:prstGeom>
+          <a:noFill/>
+        </p:spPr>
+        <p:txBody>
+          <a:bodyPr wrap="square" anchor="t">
+            <a:spAutoFit/>
+          </a:bodyPr>
+          <a:lstStyle/>
+          <a:p>
+            <a:pPr algn="ctr">
+              <a:lnSpc>
+                <a:spcPct val="100000"/>
+              </a:lnSpc>
+            </a:pPr>
+            <a:r>
+              <a:rPr sz="2000" b="1">
+                <a:solidFill>
+                  <a:srgbClr val="FFFFFF"/>
+                </a:solidFill>
+                <a:latin typeface="Calibri"/>
+              </a:rPr>
+              <a:t>SDG 11</a:t>
+            </a:r>
+          </a:p>
+        </p:txBody>
+      </p:sp>
+      <p:sp>
+        <p:nvSpPr>
+          <p:cNvPr id="15" name="TextBox 14"/>
+          <p:cNvSpPr txBox="1"/>
+          <p:nvPr/>
+        </p:nvSpPr>
+        <p:spPr>
+          <a:xfrm>
+            <a:off x="1828800" y="3364992"/>
+            <a:ext cx="3108960" cy="914400"/>
+          </a:xfrm>
+          <a:prstGeom prst="rect">
+            <a:avLst/>
+          </a:prstGeom>
+          <a:noFill/>
+        </p:spPr>
+        <p:txBody>
+          <a:bodyPr wrap="square" anchor="ctr">
+            <a:spAutoFit/>
+          </a:bodyPr>
+          <a:lstStyle/>
+          <a:p>
+            <a:pPr algn="l">
+              <a:lnSpc>
+                <a:spcPct val="100000"/>
+              </a:lnSpc>
+            </a:pPr>
+            <a:r>
+              <a:rPr sz="1600" b="1">
+                <a:solidFill>
+                  <a:srgbClr val="1B5E20"/>
+                </a:solidFill>
+                <a:latin typeface="Calibri"/>
+              </a:rPr>
+              <a:t>Sustainable Cities &amp; Communities</a:t>
+            </a:r>
+          </a:p>
+        </p:txBody>
+      </p:sp>
+      <p:sp>
+        <p:nvSpPr>
+          <p:cNvPr id="16" name="TextBox 15"/>
+          <p:cNvSpPr txBox="1"/>
+          <p:nvPr/>
+        </p:nvSpPr>
+        <p:spPr>
+          <a:xfrm>
+            <a:off x="5029200" y="3364992"/>
+            <a:ext cx="6766560" cy="914400"/>
+          </a:xfrm>
+          <a:prstGeom prst="rect">
+            <a:avLst/>
+          </a:prstGeom>
+          <a:noFill/>
+        </p:spPr>
+        <p:txBody>
+          <a:bodyPr wrap="square" anchor="ctr">
+            <a:spAutoFit/>
+          </a:bodyPr>
+          <a:lstStyle/>
+          <a:p>
+            <a:pPr algn="l">
+              <a:lnSpc>
+                <a:spcPct val="105000"/>
+              </a:lnSpc>
+            </a:pPr>
+            <a:r>
+              <a:rPr sz="1350" b="0">
+                <a:solidFill>
+                  <a:srgbClr val="212121"/>
+                </a:solidFill>
+                <a:latin typeface="Calibri"/>
+              </a:rPr>
+              <a:t>Cleaner running vehicles and fewer failed emission tests mean healthier, more sustainable city air.</a:t>
+            </a:r>
+          </a:p>
+        </p:txBody>
+      </p:sp>
+      <p:sp>
+        <p:nvSpPr>
+          <p:cNvPr id="17" name="Rounded Rectangle 16"/>
+          <p:cNvSpPr/>
+          <p:nvPr/>
+        </p:nvSpPr>
+        <p:spPr>
+          <a:xfrm>
+            <a:off x="411480" y="4425696"/>
+            <a:ext cx="1234440" cy="932688"/>
+          </a:xfrm>
+          <a:prstGeom prst="roundRect">
+            <a:avLst/>
+          </a:prstGeom>
+          <a:solidFill>
+            <a:srgbClr val="1B5E20"/>
+          </a:solidFill>
+          <a:ln>
+            <a:noFill/>
+          </a:ln>
+          <a:effectLst/>
+        </p:spPr>
+        <p:style>
+          <a:lnRef idx="1">
+            <a:schemeClr val="accent1"/>
+          </a:lnRef>
+          <a:fillRef idx="3">
+            <a:schemeClr val="accent1"/>
+          </a:fillRef>
+          <a:effectRef idx="2">
+            <a:schemeClr val="accent1"/>
+          </a:effectRef>
+          <a:fontRef idx="minor">
+            <a:schemeClr val="lt1"/>
+          </a:fontRef>
+        </p:style>
+        <p:txBody>
+          <a:bodyPr rtlCol="0" anchor="ctr"/>
+          <a:lstStyle/>
+          <a:p>
+            <a:pPr algn="ctr"/>
+          </a:p>
+        </p:txBody>
+      </p:sp>
+      <p:sp>
+        <p:nvSpPr>
+          <p:cNvPr id="18" name="TextBox 17"/>
+          <p:cNvSpPr txBox="1"/>
+          <p:nvPr/>
+        </p:nvSpPr>
+        <p:spPr>
+          <a:xfrm>
+            <a:off x="411480" y="4645152"/>
+            <a:ext cx="1234440" cy="548640"/>
+          </a:xfrm>
+          <a:prstGeom prst="rect">
+            <a:avLst/>
+          </a:prstGeom>
+          <a:noFill/>
+        </p:spPr>
+        <p:txBody>
+          <a:bodyPr wrap="square" anchor="t">
+            <a:spAutoFit/>
+          </a:bodyPr>
+          <a:lstStyle/>
+          <a:p>
+            <a:pPr algn="ctr">
+              <a:lnSpc>
+                <a:spcPct val="100000"/>
+              </a:lnSpc>
+            </a:pPr>
+            <a:r>
+              <a:rPr sz="2000" b="1">
+                <a:solidFill>
+                  <a:srgbClr val="FFFFFF"/>
+                </a:solidFill>
+                <a:latin typeface="Calibri"/>
+              </a:rPr>
+              <a:t>SDG 12</a:t>
+            </a:r>
+          </a:p>
+        </p:txBody>
+      </p:sp>
+      <p:sp>
+        <p:nvSpPr>
+          <p:cNvPr id="19" name="TextBox 18"/>
+          <p:cNvSpPr txBox="1"/>
+          <p:nvPr/>
+        </p:nvSpPr>
+        <p:spPr>
+          <a:xfrm>
+            <a:off x="1828800" y="4443984"/>
+            <a:ext cx="3108960" cy="914400"/>
+          </a:xfrm>
+          <a:prstGeom prst="rect">
+            <a:avLst/>
+          </a:prstGeom>
+          <a:noFill/>
+        </p:spPr>
+        <p:txBody>
+          <a:bodyPr wrap="square" anchor="ctr">
+            <a:spAutoFit/>
+          </a:bodyPr>
+          <a:lstStyle/>
+          <a:p>
+            <a:pPr algn="l">
+              <a:lnSpc>
+                <a:spcPct val="100000"/>
+              </a:lnSpc>
+            </a:pPr>
+            <a:r>
+              <a:rPr sz="1600" b="1">
+                <a:solidFill>
+                  <a:srgbClr val="1B5E20"/>
+                </a:solidFill>
+                <a:latin typeface="Calibri"/>
+              </a:rPr>
+              <a:t>Responsible Consumption &amp; Production</a:t>
+            </a:r>
+          </a:p>
+        </p:txBody>
+      </p:sp>
+      <p:sp>
+        <p:nvSpPr>
+          <p:cNvPr id="20" name="TextBox 19"/>
+          <p:cNvSpPr txBox="1"/>
+          <p:nvPr/>
+        </p:nvSpPr>
+        <p:spPr>
+          <a:xfrm>
+            <a:off x="5029200" y="4443984"/>
+            <a:ext cx="6766560" cy="914400"/>
+          </a:xfrm>
+          <a:prstGeom prst="rect">
+            <a:avLst/>
+          </a:prstGeom>
+          <a:noFill/>
+        </p:spPr>
+        <p:txBody>
+          <a:bodyPr wrap="square" anchor="ctr">
+            <a:spAutoFit/>
+          </a:bodyPr>
+          <a:lstStyle/>
+          <a:p>
+            <a:pPr algn="l">
+              <a:lnSpc>
+                <a:spcPct val="105000"/>
+              </a:lnSpc>
+            </a:pPr>
+            <a:r>
+              <a:rPr sz="1350" b="0">
+                <a:solidFill>
+                  <a:srgbClr val="212121"/>
+                </a:solidFill>
+                <a:latin typeface="Calibri"/>
+              </a:rPr>
+              <a:t>Emission and driving-style feedback nudges owners toward efficient driving and timely maintenance, reducing fuel waste.</a:t>
+            </a:r>
+          </a:p>
+        </p:txBody>
+      </p:sp>
+      <p:sp>
+        <p:nvSpPr>
+          <p:cNvPr id="21" name="Rounded Rectangle 20"/>
+          <p:cNvSpPr/>
+          <p:nvPr/>
+        </p:nvSpPr>
+        <p:spPr>
+          <a:xfrm>
+            <a:off x="411480" y="5504688"/>
+            <a:ext cx="1234440" cy="932688"/>
+          </a:xfrm>
+          <a:prstGeom prst="roundRect">
+            <a:avLst/>
+          </a:prstGeom>
+          <a:solidFill>
+            <a:srgbClr val="1B5E20"/>
+          </a:solidFill>
+          <a:ln>
+            <a:noFill/>
+          </a:ln>
+          <a:effectLst/>
+        </p:spPr>
+        <p:style>
+          <a:lnRef idx="1">
+            <a:schemeClr val="accent1"/>
+          </a:lnRef>
+          <a:fillRef idx="3">
+            <a:schemeClr val="accent1"/>
+          </a:fillRef>
+          <a:effectRef idx="2">
+            <a:schemeClr val="accent1"/>
+          </a:effectRef>
+          <a:fontRef idx="minor">
+            <a:schemeClr val="lt1"/>
+          </a:fontRef>
+        </p:style>
+        <p:txBody>
+          <a:bodyPr rtlCol="0" anchor="ctr"/>
+          <a:lstStyle/>
+          <a:p>
+            <a:pPr algn="ctr"/>
+          </a:p>
+        </p:txBody>
+      </p:sp>
+      <p:sp>
+        <p:nvSpPr>
+          <p:cNvPr id="22" name="TextBox 21"/>
+          <p:cNvSpPr txBox="1"/>
+          <p:nvPr/>
+        </p:nvSpPr>
+        <p:spPr>
+          <a:xfrm>
+            <a:off x="411480" y="5724144"/>
+            <a:ext cx="1234440" cy="548640"/>
+          </a:xfrm>
+          <a:prstGeom prst="rect">
+            <a:avLst/>
+          </a:prstGeom>
+          <a:noFill/>
+        </p:spPr>
+        <p:txBody>
+          <a:bodyPr wrap="square" anchor="t">
+            <a:spAutoFit/>
+          </a:bodyPr>
+          <a:lstStyle/>
+          <a:p>
+            <a:pPr algn="ctr">
+              <a:lnSpc>
+                <a:spcPct val="100000"/>
+              </a:lnSpc>
+            </a:pPr>
+            <a:r>
+              <a:rPr sz="2000" b="1">
+                <a:solidFill>
+                  <a:srgbClr val="FFFFFF"/>
+                </a:solidFill>
+                <a:latin typeface="Calibri"/>
+              </a:rPr>
+              <a:t>SDG 13</a:t>
+            </a:r>
+          </a:p>
+        </p:txBody>
+      </p:sp>
+      <p:sp>
+        <p:nvSpPr>
+          <p:cNvPr id="23" name="TextBox 22"/>
+          <p:cNvSpPr txBox="1"/>
+          <p:nvPr/>
+        </p:nvSpPr>
+        <p:spPr>
+          <a:xfrm>
+            <a:off x="1828800" y="5522976"/>
+            <a:ext cx="3108960" cy="914400"/>
+          </a:xfrm>
+          <a:prstGeom prst="rect">
+            <a:avLst/>
+          </a:prstGeom>
+          <a:noFill/>
+        </p:spPr>
+        <p:txBody>
+          <a:bodyPr wrap="square" anchor="ctr">
+            <a:spAutoFit/>
+          </a:bodyPr>
+          <a:lstStyle/>
+          <a:p>
+            <a:pPr algn="l">
+              <a:lnSpc>
+                <a:spcPct val="100000"/>
+              </a:lnSpc>
+            </a:pPr>
+            <a:r>
+              <a:rPr sz="1600" b="1">
+                <a:solidFill>
+                  <a:srgbClr val="1B5E20"/>
+                </a:solidFill>
+                <a:latin typeface="Calibri"/>
+              </a:rPr>
+              <a:t>Climate Action</a:t>
+            </a:r>
+          </a:p>
+        </p:txBody>
+      </p:sp>
+      <p:sp>
+        <p:nvSpPr>
+          <p:cNvPr id="24" name="TextBox 23"/>
+          <p:cNvSpPr txBox="1"/>
+          <p:nvPr/>
+        </p:nvSpPr>
+        <p:spPr>
+          <a:xfrm>
+            <a:off x="5029200" y="5522976"/>
+            <a:ext cx="6766560" cy="914400"/>
+          </a:xfrm>
+          <a:prstGeom prst="rect">
+            <a:avLst/>
+          </a:prstGeom>
+          <a:noFill/>
+        </p:spPr>
+        <p:txBody>
+          <a:bodyPr wrap="square" anchor="ctr">
+            <a:spAutoFit/>
+          </a:bodyPr>
+          <a:lstStyle/>
+          <a:p>
+            <a:pPr algn="l">
+              <a:lnSpc>
+                <a:spcPct val="105000"/>
+              </a:lnSpc>
+            </a:pPr>
+            <a:r>
+              <a:rPr sz="1350" b="0">
+                <a:solidFill>
+                  <a:srgbClr val="212121"/>
+                </a:solidFill>
+                <a:latin typeface="Calibri"/>
+              </a:rPr>
+              <a:t>Continuous CO2 tracking makes every owner's carbon footprint visible and actionable - small per-car savings multiplied across millions of vehicles.</a:t>
+            </a:r>
+          </a:p>
+        </p:txBody>
+      </p:sp>
+    </p:spTree>
+  </p:cSld>
+  <p:clrMapOvr>
+    <a:masterClrMapping/>
+  </p:clrMapOvr>
+</p:sld>
+</file>
+
+<file path=ppt/slides/slide9.xml><?xml version="1.0" encoding="utf-8"?>
+<p:sld xmlns:a="http://schemas.openxmlformats.org/drawingml/2006/main" xmlns:p="http://schemas.openxmlformats.org/presentationml/2006/main" xmlns:r="http://schemas.openxmlformats.org/officeDocument/2006/relationships">
+  <p:cSld>
+    <p:spTree>
+      <p:nvGrpSpPr>
+        <p:cNvPr id="1" name=""/>
+        <p:cNvGrpSpPr/>
+        <p:nvPr/>
+      </p:nvGrpSpPr>
+      <p:grpSpPr/>
+      <p:sp>
+        <p:nvSpPr>
+          <p:cNvPr id="2" name="Rectangle 1"/>
+          <p:cNvSpPr/>
+          <p:nvPr/>
+        </p:nvSpPr>
+        <p:spPr>
+          <a:xfrm>
+            <a:off x="0" y="0"/>
+            <a:ext cx="12191695" cy="914400"/>
+          </a:xfrm>
+          <a:prstGeom prst="rect">
+            <a:avLst/>
+          </a:prstGeom>
+          <a:solidFill>
+            <a:srgbClr val="1B5E20"/>
+          </a:solidFill>
+          <a:ln>
+            <a:noFill/>
+          </a:ln>
+          <a:effectLst/>
+        </p:spPr>
+        <p:style>
+          <a:lnRef idx="1">
+            <a:schemeClr val="accent1"/>
+          </a:lnRef>
+          <a:fillRef idx="3">
+            <a:schemeClr val="accent1"/>
+          </a:fillRef>
+          <a:effectRef idx="2">
+            <a:schemeClr val="accent1"/>
+          </a:effectRef>
+          <a:fontRef idx="minor">
+            <a:schemeClr val="lt1"/>
+          </a:fontRef>
+        </p:style>
+        <p:txBody>
+          <a:bodyPr rtlCol="0" anchor="ctr"/>
+          <a:lstStyle/>
+          <a:p>
+            <a:pPr algn="ctr"/>
+          </a:p>
+        </p:txBody>
+      </p:sp>
+      <p:sp>
+        <p:nvSpPr>
+          <p:cNvPr id="3" name="TextBox 2"/>
+          <p:cNvSpPr txBox="1"/>
+          <p:nvPr/>
+        </p:nvSpPr>
+        <p:spPr>
+          <a:xfrm>
+            <a:off x="502920" y="118872"/>
+            <a:ext cx="11185855" cy="685800"/>
+          </a:xfrm>
+          <a:prstGeom prst="rect">
+            <a:avLst/>
+          </a:prstGeom>
+          <a:noFill/>
+        </p:spPr>
+        <p:txBody>
+          <a:bodyPr wrap="square" anchor="ctr">
+            <a:spAutoFit/>
+          </a:bodyPr>
+          <a:lstStyle/>
+          <a:p>
+            <a:pPr algn="l">
+              <a:lnSpc>
+                <a:spcPct val="100000"/>
+              </a:lnSpc>
+            </a:pPr>
+            <a:r>
+              <a:rPr sz="3000" b="1">
+                <a:solidFill>
+                  <a:srgbClr val="FFFFFF"/>
+                </a:solidFill>
+                <a:latin typeface="Calibri"/>
+              </a:rPr>
+              <a:t>Budget Requirements</a:t>
+            </a:r>
+          </a:p>
+        </p:txBody>
+      </p:sp>
+      <p:sp>
+        <p:nvSpPr>
+          <p:cNvPr id="4" name="Rectangle 3"/>
+          <p:cNvSpPr/>
+          <p:nvPr/>
+        </p:nvSpPr>
+        <p:spPr>
+          <a:xfrm>
+            <a:off x="0" y="914400"/>
+            <a:ext cx="12191695" cy="54864"/>
+          </a:xfrm>
+          <a:prstGeom prst="rect">
+            <a:avLst/>
+          </a:prstGeom>
+          <a:solidFill>
+            <a:srgbClr val="F9A825"/>
+          </a:solidFill>
+          <a:ln>
+            <a:noFill/>
+          </a:ln>
+          <a:effectLst/>
+        </p:spPr>
+        <p:style>
+          <a:lnRef idx="1">
+            <a:schemeClr val="accent1"/>
+          </a:lnRef>
+          <a:fillRef idx="3">
+            <a:schemeClr val="accent1"/>
+          </a:fillRef>
+          <a:effectRef idx="2">
+            <a:schemeClr val="accent1"/>
+          </a:effectRef>
+          <a:fontRef idx="minor">
+            <a:schemeClr val="lt1"/>
+          </a:fontRef>
+        </p:style>
+        <p:txBody>
+          <a:bodyPr rtlCol="0" anchor="ctr"/>
+          <a:lstStyle/>
+          <a:p>
+            <a:pPr algn="ctr"/>
+          </a:p>
+        </p:txBody>
+      </p:sp>
+      <p:graphicFrame>
+        <p:nvGraphicFramePr>
+          <p:cNvPr id="5" name="Table 4"/>
+          <p:cNvGraphicFramePr>
+            <a:graphicFrameLocks noGrp="1"/>
+          </p:cNvGraphicFramePr>
+          <p:nvPr/>
+        </p:nvGraphicFramePr>
+        <p:xfrm>
+          <a:off x="411480" y="1115568"/>
+          <a:ext cx="11365992" cy="4480560"/>
+        </p:xfrm>
+        <a:graphic>
+          <a:graphicData uri="http://schemas.openxmlformats.org/drawingml/2006/table">
+            <a:tbl>
+              <a:tblPr firstRow="1" bandRow="1">
+                <a:tableStyleId>{5C22544A-7EE6-4342-B048-85BDC9FD1C3A}</a:tableStyleId>
+              </a:tblPr>
+              <a:tblGrid>
+                <a:gridCol w="2743200"/>
+                <a:gridCol w="1783080"/>
+                <a:gridCol w="1783080"/>
+                <a:gridCol w="5056632"/>
+              </a:tblGrid>
+              <a:tr h="365760">
+                <a:tc>
+                  <a:txBody>
+                    <a:bodyPr wrap="square"/>
+                    <a:lstStyle/>
+                    <a:p>
+                      <a:r>
+                        <a:rPr sz="1250" b="1">
+                          <a:solidFill>
+                            <a:srgbClr val="FFFFFF"/>
+                          </a:solidFill>
+                          <a:latin typeface="Calibri"/>
+                        </a:rPr>
+                        <a:t>Item</a:t>
+                      </a:r>
+                    </a:p>
+                  </a:txBody>
+                  <a:tcPr marL="64008" marR="64008" marT="18288" marB="18288" anchor="ctr">
+                    <a:solidFill>
+                      <a:srgbClr val="1B5E20"/>
+                    </a:solidFill>
+                  </a:tcPr>
+                </a:tc>
+                <a:tc>
+                  <a:txBody>
+                    <a:bodyPr wrap="square"/>
+                    <a:lstStyle/>
+                    <a:p>
+                      <a:r>
+                        <a:rPr sz="1250" b="1">
+                          <a:solidFill>
+                            <a:srgbClr val="FFFFFF"/>
+                          </a:solidFill>
+                          <a:latin typeface="Calibri"/>
+                        </a:rPr>
+                        <a:t>MVP / Hackathon</a:t>
+                      </a:r>
+                    </a:p>
+                  </a:txBody>
+                  <a:tcPr marL="64008" marR="64008" marT="18288" marB="18288" anchor="ctr">
+                    <a:solidFill>
+                      <a:srgbClr val="1B5E20"/>
+                    </a:solidFill>
+                  </a:tcPr>
+                </a:tc>
+                <a:tc>
+                  <a:txBody>
+                    <a:bodyPr wrap="square"/>
+                    <a:lstStyle/>
+                    <a:p>
+                      <a:r>
+                        <a:rPr sz="1250" b="1">
+                          <a:solidFill>
+                            <a:srgbClr val="FFFFFF"/>
+                          </a:solidFill>
+                          <a:latin typeface="Calibri"/>
+                        </a:rPr>
+                        <a:t>Pilot (Year 1)</a:t>
+                      </a:r>
+                    </a:p>
+                  </a:txBody>
+                  <a:tcPr marL="64008" marR="64008" marT="18288" marB="18288" anchor="ctr">
+                    <a:solidFill>
+                      <a:srgbClr val="1B5E20"/>
+                    </a:solidFill>
+                  </a:tcPr>
+                </a:tc>
+                <a:tc>
+                  <a:txBody>
+                    <a:bodyPr wrap="square"/>
+                    <a:lstStyle/>
+                    <a:p>
+                      <a:r>
+                        <a:rPr sz="1250" b="1">
+                          <a:solidFill>
+                            <a:srgbClr val="FFFFFF"/>
+                          </a:solidFill>
+                          <a:latin typeface="Calibri"/>
+                        </a:rPr>
+                        <a:t>Notes</a:t>
+                      </a:r>
+                    </a:p>
+                  </a:txBody>
+                  <a:tcPr marL="64008" marR="64008" marT="18288" marB="18288" anchor="ctr">
+                    <a:solidFill>
+                      <a:srgbClr val="1B5E20"/>
+                    </a:solidFill>
+                  </a:tcPr>
+                </a:tc>
+              </a:tr>
+              <a:tr h="411480">
+                <a:tc>
+                  <a:txBody>
+                    <a:bodyPr wrap="square"/>
+                    <a:lstStyle/>
+                    <a:p>
+                      <a:r>
+                        <a:rPr sz="1100" b="1">
+                          <a:solidFill>
+                            <a:srgbClr val="212121"/>
+                          </a:solidFill>
+                          <a:latin typeface="Calibri"/>
+                        </a:rPr>
+                        <a:t>App &amp; backend development</a:t>
+                      </a:r>
+                    </a:p>
+                  </a:txBody>
+                  <a:tcPr marL="64008" marR="64008" marT="18288" marB="18288" anchor="ctr">
+                    <a:solidFill>
+                      <a:srgbClr val="FFFFFF"/>
+                    </a:solidFill>
+                  </a:tcPr>
+                </a:tc>
+                <a:tc>
+                  <a:txBody>
+                    <a:bodyPr wrap="square"/>
+                    <a:lstStyle/>
+                    <a:p>
+                      <a:r>
+                        <a:rPr sz="1100" b="0">
+                          <a:solidFill>
+                            <a:srgbClr val="212121"/>
+                          </a:solidFill>
+                          <a:latin typeface="Calibri"/>
+                        </a:rPr>
+                        <a:t>₹0 (in-house)</a:t>
+                      </a:r>
+                    </a:p>
+                  </a:txBody>
+                  <a:tcPr marL="64008" marR="64008" marT="18288" marB="18288" anchor="ctr">
+                    <a:solidFill>
+                      <a:srgbClr val="FFFFFF"/>
+                    </a:solidFill>
+                  </a:tcPr>
+                </a:tc>
+                <a:tc>
+                  <a:txBody>
+                    <a:bodyPr wrap="square"/>
+                    <a:lstStyle/>
+                    <a:p>
+                      <a:r>
+                        <a:rPr sz="1100" b="0">
+                          <a:solidFill>
+                            <a:srgbClr val="212121"/>
+                          </a:solidFill>
+                          <a:latin typeface="Calibri"/>
+                        </a:rPr>
+                        <a:t>₹0 (in-house)</a:t>
+                      </a:r>
+                    </a:p>
+                  </a:txBody>
+                  <a:tcPr marL="64008" marR="64008" marT="18288" marB="18288" anchor="ctr">
+                    <a:solidFill>
+                      <a:srgbClr val="FFFFFF"/>
+                    </a:solidFill>
+                  </a:tcPr>
+                </a:tc>
+                <a:tc>
+                  <a:txBody>
+                    <a:bodyPr wrap="square"/>
+                    <a:lstStyle/>
+                    <a:p>
+                      <a:r>
+                        <a:rPr sz="1100" b="0">
+                          <a:solidFill>
+                            <a:srgbClr val="212121"/>
+                          </a:solidFill>
+                          <a:latin typeface="Calibri"/>
+                        </a:rPr>
+                        <a:t>Built by the team on free, open-source tools (Flutter, FastAPI)</a:t>
+                      </a:r>
+                    </a:p>
+                  </a:txBody>
+                  <a:tcPr marL="64008" marR="64008" marT="18288" marB="18288" anchor="ctr">
+                    <a:solidFill>
+                      <a:srgbClr val="FFFFFF"/>
+                    </a:solidFill>
+                  </a:tcPr>
+                </a:tc>
+              </a:tr>
+              <a:tr h="411480">
+                <a:tc>
+                  <a:txBody>
+                    <a:bodyPr wrap="square"/>
+                    <a:lstStyle/>
+                    <a:p>
+                      <a:r>
+                        <a:rPr sz="1100" b="1">
+                          <a:solidFill>
+                            <a:srgbClr val="212121"/>
+                          </a:solidFill>
+                          <a:latin typeface="Calibri"/>
+                        </a:rPr>
+                        <a:t>Cloud hosting &amp; database</a:t>
+                      </a:r>
+                    </a:p>
+                  </a:txBody>
+                  <a:tcPr marL="64008" marR="64008" marT="18288" marB="18288" anchor="ctr">
+                    <a:solidFill>
+                      <a:srgbClr val="F1F8E9"/>
+                    </a:solidFill>
+                  </a:tcPr>
+                </a:tc>
+                <a:tc>
+                  <a:txBody>
+                    <a:bodyPr wrap="square"/>
+                    <a:lstStyle/>
+                    <a:p>
+                      <a:r>
+                        <a:rPr sz="1100" b="0">
+                          <a:solidFill>
+                            <a:srgbClr val="212121"/>
+                          </a:solidFill>
+                          <a:latin typeface="Calibri"/>
+                        </a:rPr>
+                        <a:t>₹0 (free tier)</a:t>
+                      </a:r>
+                    </a:p>
+                  </a:txBody>
+                  <a:tcPr marL="64008" marR="64008" marT="18288" marB="18288" anchor="ctr">
+                    <a:solidFill>
+                      <a:srgbClr val="F1F8E9"/>
+                    </a:solidFill>
+                  </a:tcPr>
+                </a:tc>
+                <a:tc>
+                  <a:txBody>
+                    <a:bodyPr wrap="square"/>
+                    <a:lstStyle/>
+                    <a:p>
+                      <a:r>
+                        <a:rPr sz="1100" b="0">
+                          <a:solidFill>
+                            <a:srgbClr val="212121"/>
+                          </a:solidFill>
+                          <a:latin typeface="Calibri"/>
+                        </a:rPr>
+                        <a:t>₹18,000 - 30,000</a:t>
+                      </a:r>
+                    </a:p>
+                  </a:txBody>
+                  <a:tcPr marL="64008" marR="64008" marT="18288" marB="18288" anchor="ctr">
+                    <a:solidFill>
+                      <a:srgbClr val="F1F8E9"/>
+                    </a:solidFill>
+                  </a:tcPr>
+                </a:tc>
+                <a:tc>
+                  <a:txBody>
+                    <a:bodyPr wrap="square"/>
+                    <a:lstStyle/>
+                    <a:p>
+                      <a:r>
+                        <a:rPr sz="1100" b="0">
+                          <a:solidFill>
+                            <a:srgbClr val="212121"/>
+                          </a:solidFill>
+                          <a:latin typeface="Calibri"/>
+                        </a:rPr>
+                        <a:t>Free tiers cover the demo; ~₹1,500-2,500/month at pilot scale</a:t>
+                      </a:r>
+                    </a:p>
+                  </a:txBody>
+                  <a:tcPr marL="64008" marR="64008" marT="18288" marB="18288" anchor="ctr">
+                    <a:solidFill>
+                      <a:srgbClr val="F1F8E9"/>
+                    </a:solidFill>
+                  </a:tcPr>
+                </a:tc>
+              </a:tr>
+              <a:tr h="411480">
+                <a:tc>
+                  <a:txBody>
+                    <a:bodyPr wrap="square"/>
+                    <a:lstStyle/>
+                    <a:p>
+                      <a:r>
+                        <a:rPr sz="1100" b="1">
+                          <a:solidFill>
+                            <a:srgbClr val="212121"/>
+                          </a:solidFill>
+                          <a:latin typeface="Calibri"/>
+                        </a:rPr>
+                        <a:t>Google Play developer account</a:t>
+                      </a:r>
+                    </a:p>
+                  </a:txBody>
+                  <a:tcPr marL="64008" marR="64008" marT="18288" marB="18288" anchor="ctr">
+                    <a:solidFill>
+                      <a:srgbClr val="FFFFFF"/>
+                    </a:solidFill>
+                  </a:tcPr>
+                </a:tc>
+                <a:tc>
+                  <a:txBody>
+                    <a:bodyPr wrap="square"/>
+                    <a:lstStyle/>
+                    <a:p>
+                      <a:r>
+                        <a:rPr sz="1100" b="0">
+                          <a:solidFill>
+                            <a:srgbClr val="212121"/>
+                          </a:solidFill>
+                          <a:latin typeface="Calibri"/>
+                        </a:rPr>
+                        <a:t>₹2,100</a:t>
+                      </a:r>
+                    </a:p>
+                  </a:txBody>
+                  <a:tcPr marL="64008" marR="64008" marT="18288" marB="18288" anchor="ctr">
+                    <a:solidFill>
+                      <a:srgbClr val="FFFFFF"/>
+                    </a:solidFill>
+                  </a:tcPr>
+                </a:tc>
+                <a:tc>
+                  <a:txBody>
+                    <a:bodyPr wrap="square"/>
+                    <a:lstStyle/>
+                    <a:p>
+                      <a:r>
+                        <a:rPr sz="1100" b="0">
+                          <a:solidFill>
+                            <a:srgbClr val="212121"/>
+                          </a:solidFill>
+                          <a:latin typeface="Calibri"/>
+                        </a:rPr>
+                        <a:t>-</a:t>
+                      </a:r>
+                    </a:p>
+                  </a:txBody>
+                  <a:tcPr marL="64008" marR="64008" marT="18288" marB="18288" anchor="ctr">
+                    <a:solidFill>
+                      <a:srgbClr val="FFFFFF"/>
+                    </a:solidFill>
+                  </a:tcPr>
+                </a:tc>
+                <a:tc>
+                  <a:txBody>
+                    <a:bodyPr wrap="square"/>
+                    <a:lstStyle/>
+                    <a:p>
+                      <a:r>
+                        <a:rPr sz="1100" b="0">
+                          <a:solidFill>
+                            <a:srgbClr val="212121"/>
+                          </a:solidFill>
+                          <a:latin typeface="Calibri"/>
+                        </a:rPr>
+                        <a:t>One-time fee (~USD 25)</a:t>
+                      </a:r>
+                    </a:p>
+                  </a:txBody>
+                  <a:tcPr marL="64008" marR="64008" marT="18288" marB="18288" anchor="ctr">
+                    <a:solidFill>
+                      <a:srgbClr val="FFFFFF"/>
+                    </a:solidFill>
+                  </a:tcPr>
+                </a:tc>
+              </a:tr>
+              <a:tr h="411480">
+                <a:tc>
+                  <a:txBody>
+                    <a:bodyPr wrap="square"/>
+                    <a:lstStyle/>
+                    <a:p>
+                      <a:r>
+                        <a:rPr sz="1100" b="1">
+                          <a:solidFill>
+                            <a:srgbClr val="212121"/>
+                          </a:solidFill>
+                          <a:latin typeface="Calibri"/>
+                        </a:rPr>
+                        <a:t>Apple App Store (optional, later)</a:t>
+                      </a:r>
+                    </a:p>
+                  </a:txBody>
+                  <a:tcPr marL="64008" marR="64008" marT="18288" marB="18288" anchor="ctr">
+                    <a:solidFill>
+                      <a:srgbClr val="F1F8E9"/>
+                    </a:solidFill>
+                  </a:tcPr>
+                </a:tc>
+                <a:tc>
+                  <a:txBody>
+                    <a:bodyPr wrap="square"/>
+                    <a:lstStyle/>
+                    <a:p>
+                      <a:r>
+                        <a:rPr sz="1100" b="0">
+                          <a:solidFill>
+                            <a:srgbClr val="212121"/>
+                          </a:solidFill>
+                          <a:latin typeface="Calibri"/>
+                        </a:rPr>
+                        <a:t>-</a:t>
+                      </a:r>
+                    </a:p>
+                  </a:txBody>
+                  <a:tcPr marL="64008" marR="64008" marT="18288" marB="18288" anchor="ctr">
+                    <a:solidFill>
+                      <a:srgbClr val="F1F8E9"/>
+                    </a:solidFill>
+                  </a:tcPr>
+                </a:tc>
+                <a:tc>
+                  <a:txBody>
+                    <a:bodyPr wrap="square"/>
+                    <a:lstStyle/>
+                    <a:p>
+                      <a:r>
+                        <a:rPr sz="1100" b="0">
+                          <a:solidFill>
+                            <a:srgbClr val="212121"/>
+                          </a:solidFill>
+                          <a:latin typeface="Calibri"/>
+                        </a:rPr>
+                        <a:t>₹8,500 / year</a:t>
+                      </a:r>
+                    </a:p>
+                  </a:txBody>
+                  <a:tcPr marL="64008" marR="64008" marT="18288" marB="18288" anchor="ctr">
+                    <a:solidFill>
+                      <a:srgbClr val="F1F8E9"/>
+                    </a:solidFill>
+                  </a:tcPr>
+                </a:tc>
+                <a:tc>
+                  <a:txBody>
+                    <a:bodyPr wrap="square"/>
+                    <a:lstStyle/>
+                    <a:p>
+                      <a:r>
+                        <a:rPr sz="1100" b="0">
+                          <a:solidFill>
+                            <a:srgbClr val="212121"/>
+                          </a:solidFill>
+                          <a:latin typeface="Calibri"/>
+                        </a:rPr>
+                        <a:t>Only when the iOS version ships</a:t>
+                      </a:r>
+                    </a:p>
+                  </a:txBody>
+                  <a:tcPr marL="64008" marR="64008" marT="18288" marB="18288" anchor="ctr">
+                    <a:solidFill>
+                      <a:srgbClr val="F1F8E9"/>
+                    </a:solidFill>
+                  </a:tcPr>
+                </a:tc>
+              </a:tr>
+              <a:tr h="411480">
+                <a:tc>
+                  <a:txBody>
+                    <a:bodyPr wrap="square"/>
+                    <a:lstStyle/>
+                    <a:p>
+                      <a:r>
+                        <a:rPr sz="1100" b="1">
+                          <a:solidFill>
+                            <a:srgbClr val="212121"/>
+                          </a:solidFill>
+                          <a:latin typeface="Calibri"/>
+                        </a:rPr>
+                        <a:t>Domain, SSL &amp; email</a:t>
+                      </a:r>
+                    </a:p>
+                  </a:txBody>
+                  <a:tcPr marL="64008" marR="64008" marT="18288" marB="18288" anchor="ctr">
+                    <a:solidFill>
+                      <a:srgbClr val="FFFFFF"/>
+                    </a:solidFill>
+                  </a:tcPr>
+                </a:tc>
+                <a:tc>
+                  <a:txBody>
+                    <a:bodyPr wrap="square"/>
+                    <a:lstStyle/>
+                    <a:p>
+                      <a:r>
+                        <a:rPr sz="1100" b="0">
+                          <a:solidFill>
+                            <a:srgbClr val="212121"/>
+                          </a:solidFill>
+                          <a:latin typeface="Calibri"/>
+                        </a:rPr>
+                        <a:t>₹1,000</a:t>
+                      </a:r>
+                    </a:p>
+                  </a:txBody>
+                  <a:tcPr marL="64008" marR="64008" marT="18288" marB="18288" anchor="ctr">
+                    <a:solidFill>
+                      <a:srgbClr val="FFFFFF"/>
+                    </a:solidFill>
+                  </a:tcPr>
+                </a:tc>
+                <a:tc>
+                  <a:txBody>
+                    <a:bodyPr wrap="square"/>
+                    <a:lstStyle/>
+                    <a:p>
+                      <a:r>
+                        <a:rPr sz="1100" b="0">
+                          <a:solidFill>
+                            <a:srgbClr val="212121"/>
+                          </a:solidFill>
+                          <a:latin typeface="Calibri"/>
+                        </a:rPr>
+                        <a:t>₹1,500 / year</a:t>
+                      </a:r>
+                    </a:p>
+                  </a:txBody>
+                  <a:tcPr marL="64008" marR="64008" marT="18288" marB="18288" anchor="ctr">
+                    <a:solidFill>
+                      <a:srgbClr val="FFFFFF"/>
+                    </a:solidFill>
+                  </a:tcPr>
+                </a:tc>
+                <a:tc>
+                  <a:txBody>
+                    <a:bodyPr wrap="square"/>
+                    <a:lstStyle/>
+                    <a:p>
+                      <a:r>
+                        <a:rPr sz="1100" b="0">
+                          <a:solidFill>
+                            <a:srgbClr val="212121"/>
+                          </a:solidFill>
+                          <a:latin typeface="Calibri"/>
+                        </a:rPr>
+                        <a:t>Project website and support email</a:t>
+                      </a:r>
+                    </a:p>
+                  </a:txBody>
+                  <a:tcPr marL="64008" marR="64008" marT="18288" marB="18288" anchor="ctr">
+                    <a:solidFill>
+                      <a:srgbClr val="FFFFFF"/>
+                    </a:solidFill>
+                  </a:tcPr>
+                </a:tc>
+              </a:tr>
+              <a:tr h="411480">
+                <a:tc>
+                  <a:txBody>
+                    <a:bodyPr wrap="square"/>
+                    <a:lstStyle/>
+                    <a:p>
+                      <a:r>
+                        <a:rPr sz="1100" b="1">
+                          <a:solidFill>
+                            <a:srgbClr val="212121"/>
+                          </a:solidFill>
+                          <a:latin typeface="Calibri"/>
+                        </a:rPr>
+                        <a:t>Emission factors &amp; connected-car APIs</a:t>
+                      </a:r>
+                    </a:p>
+                  </a:txBody>
+                  <a:tcPr marL="64008" marR="64008" marT="18288" marB="18288" anchor="ctr">
+                    <a:solidFill>
+                      <a:srgbClr val="F1F8E9"/>
+                    </a:solidFill>
+                  </a:tcPr>
+                </a:tc>
+                <a:tc>
+                  <a:txBody>
+                    <a:bodyPr wrap="square"/>
+                    <a:lstStyle/>
+                    <a:p>
+                      <a:r>
+                        <a:rPr sz="1100" b="0">
+                          <a:solidFill>
+                            <a:srgbClr val="212121"/>
+                          </a:solidFill>
+                          <a:latin typeface="Calibri"/>
+                        </a:rPr>
+                        <a:t>₹0</a:t>
+                      </a:r>
+                    </a:p>
+                  </a:txBody>
+                  <a:tcPr marL="64008" marR="64008" marT="18288" marB="18288" anchor="ctr">
+                    <a:solidFill>
+                      <a:srgbClr val="F1F8E9"/>
+                    </a:solidFill>
+                  </a:tcPr>
+                </a:tc>
+                <a:tc>
+                  <a:txBody>
+                    <a:bodyPr wrap="square"/>
+                    <a:lstStyle/>
+                    <a:p>
+                      <a:r>
+                        <a:rPr sz="1100" b="0">
+                          <a:solidFill>
+                            <a:srgbClr val="212121"/>
+                          </a:solidFill>
+                          <a:latin typeface="Calibri"/>
+                        </a:rPr>
+                        <a:t>₹0</a:t>
+                      </a:r>
+                    </a:p>
+                  </a:txBody>
+                  <a:tcPr marL="64008" marR="64008" marT="18288" marB="18288" anchor="ctr">
+                    <a:solidFill>
+                      <a:srgbClr val="F1F8E9"/>
+                    </a:solidFill>
+                  </a:tcPr>
+                </a:tc>
+                <a:tc>
+                  <a:txBody>
+                    <a:bodyPr wrap="square"/>
+                    <a:lstStyle/>
+                    <a:p>
+                      <a:r>
+                        <a:rPr sz="1100" b="0">
+                          <a:solidFill>
+                            <a:srgbClr val="212121"/>
+                          </a:solidFill>
+                          <a:latin typeface="Calibri"/>
+                        </a:rPr>
+                        <a:t>BS6/COPERT factors are published; connected-car dev tiers are free</a:t>
+                      </a:r>
+                    </a:p>
+                  </a:txBody>
+                  <a:tcPr marL="64008" marR="64008" marT="18288" marB="18288" anchor="ctr">
+                    <a:solidFill>
+                      <a:srgbClr val="F1F8E9"/>
+                    </a:solidFill>
+                  </a:tcPr>
+                </a:tc>
+              </a:tr>
+              <a:tr h="411480">
+                <a:tc>
+                  <a:txBody>
+                    <a:bodyPr wrap="square"/>
+                    <a:lstStyle/>
+                    <a:p>
+                      <a:r>
+                        <a:rPr sz="1100" b="1">
+                          <a:solidFill>
+                            <a:srgbClr val="212121"/>
+                          </a:solidFill>
+                          <a:latin typeface="Calibri"/>
+                        </a:rPr>
+                        <a:t>Automatic fill-up capture</a:t>
+                      </a:r>
+                    </a:p>
+                  </a:txBody>
+                  <a:tcPr marL="64008" marR="64008" marT="18288" marB="18288" anchor="ctr">
+                    <a:solidFill>
+                      <a:srgbClr val="F1F8E9"/>
+                    </a:solidFill>
+                  </a:tcPr>
+                </a:tc>
+                <a:tc>
+                  <a:txBody>
+                    <a:bodyPr wrap="square"/>
+                    <a:lstStyle/>
+                    <a:p>
+                      <a:r>
+                        <a:rPr sz="1100" b="0">
+                          <a:solidFill>
+                            <a:srgbClr val="212121"/>
+                          </a:solidFill>
+                          <a:latin typeface="Calibri"/>
+                        </a:rPr>
+                        <a:t>₹0</a:t>
+                      </a:r>
+                    </a:p>
+                  </a:txBody>
+                  <a:tcPr marL="64008" marR="64008" marT="18288" marB="18288" anchor="ctr">
+                    <a:solidFill>
+                      <a:srgbClr val="F1F8E9"/>
+                    </a:solidFill>
+                  </a:tcPr>
+                </a:tc>
+                <a:tc>
+                  <a:txBody>
+                    <a:bodyPr wrap="square"/>
+                    <a:lstStyle/>
+                    <a:p>
+                      <a:r>
+                        <a:rPr sz="1100" b="0">
+                          <a:solidFill>
+                            <a:srgbClr val="212121"/>
+                          </a:solidFill>
+                          <a:latin typeface="Calibri"/>
+                        </a:rPr>
+                        <a:t>₹0</a:t>
+                      </a:r>
+                    </a:p>
+                  </a:txBody>
+                  <a:tcPr marL="64008" marR="64008" marT="18288" marB="18288" anchor="ctr">
+                    <a:solidFill>
+                      <a:srgbClr val="F1F8E9"/>
+                    </a:solidFill>
+                  </a:tcPr>
+                </a:tc>
+                <a:tc>
+                  <a:txBody>
+                    <a:bodyPr wrap="square"/>
+                    <a:lstStyle/>
+                    <a:p>
+                      <a:r>
+                        <a:rPr sz="1100" b="0">
+                          <a:solidFill>
+                            <a:srgbClr val="212121"/>
+                          </a:solidFill>
+                          <a:latin typeface="Calibri"/>
+                        </a:rPr>
+                        <a:t>Payment-notification parsing runs fully on-device - no SMS gateway or OCR service fees</a:t>
+                      </a:r>
+                    </a:p>
+                  </a:txBody>
+                  <a:tcPr marL="64008" marR="64008" marT="18288" marB="18288" anchor="ctr">
+                    <a:solidFill>
+                      <a:srgbClr val="F1F8E9"/>
+                    </a:solidFill>
+                  </a:tcPr>
+                </a:tc>
+              </a:tr>
+              <a:tr h="411480">
+                <a:tc>
+                  <a:txBody>
+                    <a:bodyPr wrap="square"/>
+                    <a:lstStyle/>
+                    <a:p>
+                      <a:r>
+                        <a:rPr sz="1100" b="1">
+                          <a:solidFill>
+                            <a:srgbClr val="212121"/>
+                          </a:solidFill>
+                          <a:latin typeface="Calibri"/>
+                        </a:rPr>
+                        <a:t>OBD dev &amp; calibration dongles</a:t>
+                      </a:r>
+                    </a:p>
+                  </a:txBody>
+                  <a:tcPr marL="64008" marR="64008" marT="18288" marB="18288" anchor="ctr">
+                    <a:solidFill>
+                      <a:srgbClr val="F1F8E9"/>
+                    </a:solidFill>
+                  </a:tcPr>
+                </a:tc>
+                <a:tc>
+                  <a:txBody>
+                    <a:bodyPr wrap="square"/>
+                    <a:lstStyle/>
+                    <a:p>
+                      <a:r>
+                        <a:rPr sz="1100" b="0">
+                          <a:solidFill>
+                            <a:srgbClr val="212121"/>
+                          </a:solidFill>
+                          <a:latin typeface="Calibri"/>
+                        </a:rPr>
+                        <a:t>₹1,500</a:t>
+                      </a:r>
+                    </a:p>
+                  </a:txBody>
+                  <a:tcPr marL="64008" marR="64008" marT="18288" marB="18288" anchor="ctr">
+                    <a:solidFill>
+                      <a:srgbClr val="F1F8E9"/>
+                    </a:solidFill>
+                  </a:tcPr>
+                </a:tc>
+                <a:tc>
+                  <a:txBody>
+                    <a:bodyPr wrap="square"/>
+                    <a:lstStyle/>
+                    <a:p>
+                      <a:r>
+                        <a:rPr sz="1100" b="0">
+                          <a:solidFill>
+                            <a:srgbClr val="212121"/>
+                          </a:solidFill>
+                          <a:latin typeface="Calibri"/>
+                        </a:rPr>
+                        <a:t>₹5,000</a:t>
+                      </a:r>
+                    </a:p>
+                  </a:txBody>
+                  <a:tcPr marL="64008" marR="64008" marT="18288" marB="18288" anchor="ctr">
+                    <a:solidFill>
+                      <a:srgbClr val="F1F8E9"/>
+                    </a:solidFill>
+                  </a:tcPr>
+                </a:tc>
+                <a:tc>
+                  <a:txBody>
+                    <a:bodyPr wrap="square"/>
+                    <a:lstStyle/>
+                    <a:p>
+                      <a:r>
+                        <a:rPr sz="1100" b="0">
+                          <a:solidFill>
+                            <a:srgbClr val="212121"/>
+                          </a:solidFill>
+                          <a:latin typeface="Calibri"/>
+                        </a:rPr>
+                        <a:t>2 ELM327 adapters for development; 10-car calibration fleet in year 1. Dev-time only - pro-tier users buy their own (~₹500)</a:t>
+                      </a:r>
+                    </a:p>
+                  </a:txBody>
+                  <a:tcPr marL="64008" marR="64008" marT="18288" marB="18288" anchor="ctr">
+                    <a:solidFill>
+                      <a:srgbClr val="F1F8E9"/>
+                    </a:solidFill>
+                  </a:tcPr>
+                </a:tc>
+              </a:tr>
+              <a:tr h="411480">
+                <a:tc>
+                  <a:txBody>
+                    <a:bodyPr wrap="square"/>
+                    <a:lstStyle/>
+                    <a:p>
+                      <a:r>
+                        <a:rPr sz="1100" b="1">
+                          <a:solidFill>
+                            <a:srgbClr val="212121"/>
+                          </a:solidFill>
+                          <a:latin typeface="Calibri"/>
+                        </a:rPr>
+                        <a:t>Pilot outreach &amp; testing</a:t>
+                      </a:r>
+                    </a:p>
+                  </a:txBody>
+                  <a:tcPr marL="64008" marR="64008" marT="18288" marB="18288" anchor="ctr">
+                    <a:solidFill>
+                      <a:srgbClr val="FFFFFF"/>
+                    </a:solidFill>
+                  </a:tcPr>
+                </a:tc>
+                <a:tc>
+                  <a:txBody>
+                    <a:bodyPr wrap="square"/>
+                    <a:lstStyle/>
+                    <a:p>
+                      <a:r>
+                        <a:rPr sz="1100" b="0">
+                          <a:solidFill>
+                            <a:srgbClr val="212121"/>
+                          </a:solidFill>
+                          <a:latin typeface="Calibri"/>
+                        </a:rPr>
+                        <a:t>₹2,000</a:t>
+                      </a:r>
+                    </a:p>
+                  </a:txBody>
+                  <a:tcPr marL="64008" marR="64008" marT="18288" marB="18288" anchor="ctr">
+                    <a:solidFill>
+                      <a:srgbClr val="FFFFFF"/>
+                    </a:solidFill>
+                  </a:tcPr>
+                </a:tc>
+                <a:tc>
+                  <a:txBody>
+                    <a:bodyPr wrap="square"/>
+                    <a:lstStyle/>
+                    <a:p>
+                      <a:r>
+                        <a:rPr sz="1100" b="0">
+                          <a:solidFill>
+                            <a:srgbClr val="212121"/>
+                          </a:solidFill>
+                          <a:latin typeface="Calibri"/>
+                        </a:rPr>
+                        <a:t>₹10,000 - 15,000</a:t>
+                      </a:r>
+                    </a:p>
+                  </a:txBody>
+                  <a:tcPr marL="64008" marR="64008" marT="18288" marB="18288" anchor="ctr">
+                    <a:solidFill>
+                      <a:srgbClr val="FFFFFF"/>
+                    </a:solidFill>
+                  </a:tcPr>
+                </a:tc>
+                <a:tc>
+                  <a:txBody>
+                    <a:bodyPr wrap="square"/>
+                    <a:lstStyle/>
+                    <a:p>
+                      <a:r>
+                        <a:rPr sz="1100" b="0">
+                          <a:solidFill>
+                            <a:srgbClr val="212121"/>
+                          </a:solidFill>
+                          <a:latin typeface="Calibri"/>
+                        </a:rPr>
+                        <a:t>Posters, test-drive fuel, feedback incentives</a:t>
+                      </a:r>
+                    </a:p>
+                  </a:txBody>
+                  <a:tcPr marL="64008" marR="64008" marT="18288" marB="18288" anchor="ctr">
+                    <a:solidFill>
+                      <a:srgbClr val="FFFFFF"/>
+                    </a:solidFill>
+                  </a:tcPr>
+                </a:tc>
+              </a:tr>
+              <a:tr h="411480">
+                <a:tc>
+                  <a:txBody>
+                    <a:bodyPr wrap="square"/>
+                    <a:lstStyle/>
+                    <a:p>
+                      <a:r>
+                        <a:rPr sz="1100" b="1">
+                          <a:solidFill>
+                            <a:srgbClr val="212121"/>
+                          </a:solidFill>
+                          <a:latin typeface="Calibri"/>
+                        </a:rPr>
+                        <a:t>Contingency (~15%)</a:t>
+                      </a:r>
+                    </a:p>
+                  </a:txBody>
+                  <a:tcPr marL="64008" marR="64008" marT="18288" marB="18288" anchor="ctr">
+                    <a:solidFill>
+                      <a:srgbClr val="F1F8E9"/>
+                    </a:solidFill>
+                  </a:tcPr>
+                </a:tc>
+                <a:tc>
+                  <a:txBody>
+                    <a:bodyPr wrap="square"/>
+                    <a:lstStyle/>
+                    <a:p>
+                      <a:r>
+                        <a:rPr sz="1100" b="0">
+                          <a:solidFill>
+                            <a:srgbClr val="212121"/>
+                          </a:solidFill>
+                          <a:latin typeface="Calibri"/>
+                        </a:rPr>
+                        <a:t>₹1,000</a:t>
+                      </a:r>
+                    </a:p>
+                  </a:txBody>
+                  <a:tcPr marL="64008" marR="64008" marT="18288" marB="18288" anchor="ctr">
+                    <a:solidFill>
+                      <a:srgbClr val="F1F8E9"/>
+                    </a:solidFill>
+                  </a:tcPr>
+                </a:tc>
+                <a:tc>
+                  <a:txBody>
+                    <a:bodyPr wrap="square"/>
+                    <a:lstStyle/>
+                    <a:p>
+                      <a:r>
+                        <a:rPr sz="1100" b="0">
+                          <a:solidFill>
+                            <a:srgbClr val="212121"/>
+                          </a:solidFill>
+                          <a:latin typeface="Calibri"/>
+                        </a:rPr>
+                        <a:t>₹8,000</a:t>
+                      </a:r>
+                    </a:p>
+                  </a:txBody>
+                  <a:tcPr marL="64008" marR="64008" marT="18288" marB="18288" anchor="ctr">
+                    <a:solidFill>
+                      <a:srgbClr val="F1F8E9"/>
+                    </a:solidFill>
+                  </a:tcPr>
+                </a:tc>
+                <a:tc>
+                  <a:txBody>
+                    <a:bodyPr wrap="square"/>
+                    <a:lstStyle/>
+                    <a:p>
+                      <a:r>
+                        <a:rPr sz="1100" b="0">
+                          <a:solidFill>
+                            <a:srgbClr val="212121"/>
+                          </a:solidFill>
+                          <a:latin typeface="Calibri"/>
+                        </a:rPr>
+                        <a:t>Buffer for overruns</a:t>
+                      </a:r>
+                    </a:p>
+                  </a:txBody>
+                  <a:tcPr marL="64008" marR="64008" marT="18288" marB="18288" anchor="ctr">
+                    <a:solidFill>
+                      <a:srgbClr val="F1F8E9"/>
+                    </a:solidFill>
+                  </a:tcPr>
+                </a:tc>
+              </a:tr>
+            </a:tbl>
+          </a:graphicData>
+        </a:graphic>
+      </p:graphicFrame>
+      <p:sp>
+        <p:nvSpPr>
+          <p:cNvPr id="6" name="Rounded Rectangle 5"/>
+          <p:cNvSpPr/>
+          <p:nvPr/>
+        </p:nvSpPr>
+        <p:spPr>
+          <a:xfrm>
+            <a:off x="411480" y="5806440"/>
+            <a:ext cx="5486400" cy="731520"/>
+          </a:xfrm>
+          <a:prstGeom prst="roundRect">
+            <a:avLst/>
+          </a:prstGeom>
+          <a:solidFill>
+            <a:srgbClr val="1B5E20"/>
+          </a:solidFill>
+          <a:ln>
+            <a:noFill/>
+          </a:ln>
+          <a:effectLst/>
+        </p:spPr>
+        <p:style>
+          <a:lnRef idx="1">
+            <a:schemeClr val="accent1"/>
+          </a:lnRef>
+          <a:fillRef idx="3">
+            <a:schemeClr val="accent1"/>
+          </a:fillRef>
+          <a:effectRef idx="2">
+            <a:schemeClr val="accent1"/>
+          </a:effectRef>
+          <a:fontRef idx="minor">
+            <a:schemeClr val="lt1"/>
+          </a:fontRef>
+        </p:style>
+        <p:txBody>
+          <a:bodyPr rtlCol="0" anchor="ctr"/>
+          <a:lstStyle/>
+          <a:p>
+            <a:pPr algn="ctr"/>
+          </a:p>
+        </p:txBody>
+      </p:sp>
+      <p:sp>
+        <p:nvSpPr>
+          <p:cNvPr id="7" name="TextBox 6"/>
+          <p:cNvSpPr txBox="1"/>
+          <p:nvPr/>
+        </p:nvSpPr>
+        <p:spPr>
+          <a:xfrm>
+            <a:off x="594360" y="5861304"/>
+            <a:ext cx="5212080" cy="640080"/>
+          </a:xfrm>
+          <a:prstGeom prst="rect">
+            <a:avLst/>
+          </a:prstGeom>
+          <a:noFill/>
+        </p:spPr>
+        <p:txBody>
+          <a:bodyPr wrap="square" anchor="ctr">
+            <a:spAutoFit/>
+          </a:bodyPr>
+          <a:lstStyle/>
+          <a:p>
+            <a:pPr algn="l">
+              <a:lnSpc>
+                <a:spcPct val="100000"/>
+              </a:lnSpc>
+            </a:pPr>
+            <a:r>
+              <a:rPr sz="1500" b="1">
+                <a:solidFill>
+                  <a:srgbClr val="FFFFFF"/>
+                </a:solidFill>
+                <a:latin typeface="Calibri"/>
+              </a:rPr>
+              <a:t>Total MVP: ~₹7,500      Year-1 pilot: ~₹55,000 - 70,000</a:t>
+            </a:r>
+          </a:p>
+        </p:txBody>
+      </p:sp>
+      <p:sp>
+        <p:nvSpPr>
+          <p:cNvPr id="8" name="Rounded Rectangle 7"/>
+          <p:cNvSpPr/>
+          <p:nvPr/>
+        </p:nvSpPr>
+        <p:spPr>
+          <a:xfrm>
+            <a:off x="6172200" y="5806440"/>
+            <a:ext cx="5605272" cy="731520"/>
+          </a:xfrm>
+          <a:prstGeom prst="roundRect">
+            <a:avLst/>
+          </a:prstGeom>
+          <a:solidFill>
+            <a:srgbClr val="F1F8E9"/>
+          </a:solidFill>
+          <a:ln w="12700">
+            <a:solidFill>
+              <a:srgbClr val="43A047"/>
+            </a:solidFill>
+          </a:ln>
+          <a:effectLst/>
+        </p:spPr>
+        <p:style>
+          <a:lnRef idx="1">
+            <a:schemeClr val="accent1"/>
+          </a:lnRef>
+          <a:fillRef idx="3">
+            <a:schemeClr val="accent1"/>
+          </a:fillRef>
+          <a:effectRef idx="2">
+            <a:schemeClr val="accent1"/>
+          </a:effectRef>
+          <a:fontRef idx="minor">
+            <a:schemeClr val="lt1"/>
+          </a:fontRef>
+        </p:style>
+        <p:txBody>
+          <a:bodyPr rtlCol="0" anchor="ctr"/>
+          <a:lstStyle/>
+          <a:p>
+            <a:pPr algn="ctr"/>
+          </a:p>
+        </p:txBody>
+      </p:sp>
+      <p:sp>
+        <p:nvSpPr>
+          <p:cNvPr id="9" name="TextBox 8"/>
+          <p:cNvSpPr txBox="1"/>
+          <p:nvPr/>
+        </p:nvSpPr>
+        <p:spPr>
+          <a:xfrm>
+            <a:off x="6355080" y="5861304"/>
+            <a:ext cx="5303520" cy="640080"/>
+          </a:xfrm>
+          <a:prstGeom prst="rect">
+            <a:avLst/>
+          </a:prstGeom>
+          <a:noFill/>
+        </p:spPr>
+        <p:txBody>
+          <a:bodyPr wrap="square" anchor="ctr">
+            <a:spAutoFit/>
+          </a:bodyPr>
+          <a:lstStyle/>
+          <a:p>
+            <a:pPr algn="l">
+              <a:lnSpc>
+                <a:spcPct val="110000"/>
+              </a:lnSpc>
+            </a:pPr>
+            <a:r>
+              <a:rPr sz="1250" b="0">
+                <a:solidFill>
+                  <a:srgbClr val="1B5E20"/>
+                </a:solidFill>
+                <a:latin typeface="Calibri"/>
+              </a:rPr>
+              <a:t>Zero per-user hardware cost: dongles are dev-time calibration tools, and automatic capture is pure software.</a:t>
+            </a:r>
+          </a:p>
+        </p:txBody>
+      </p:sp>
+    </p:spTree>
+  </p:cSld>
+  <p:clrMapOvr>
+    <a:masterClrMapping/>
+  </p:clrMapOvr>
+</p:sld>
+</file>
+
 <file path=ppt/theme/theme1.xml><?xml version="1.0" encoding="utf-8"?>
 <a:theme xmlns:a="http://schemas.openxmlformats.org/drawingml/2006/main" name="Office Theme">
   <a:themeElements>
